--- a/CalendarioAgo2026/proyecto/SITUACION_PROBLEMA.pptx
+++ b/CalendarioAgo2026/proyecto/SITUACION_PROBLEMA.pptx
@@ -5,27 +5,24 @@
     <p:sldMasterId id="2147483648" r:id="rId1"/>
   </p:sldMasterIdLst>
   <p:notesMasterIdLst>
-    <p:notesMasterId r:id="rId20"/>
+    <p:notesMasterId r:id="rId17"/>
   </p:notesMasterIdLst>
   <p:sldIdLst>
     <p:sldId id="289" r:id="rId2"/>
     <p:sldId id="359" r:id="rId3"/>
-    <p:sldId id="360" r:id="rId4"/>
-    <p:sldId id="361" r:id="rId5"/>
-    <p:sldId id="362" r:id="rId6"/>
-    <p:sldId id="364" r:id="rId7"/>
-    <p:sldId id="332" r:id="rId8"/>
-    <p:sldId id="366" r:id="rId9"/>
+    <p:sldId id="378" r:id="rId4"/>
+    <p:sldId id="360" r:id="rId5"/>
+    <p:sldId id="361" r:id="rId6"/>
+    <p:sldId id="377" r:id="rId7"/>
+    <p:sldId id="364" r:id="rId8"/>
+    <p:sldId id="332" r:id="rId9"/>
     <p:sldId id="367" r:id="rId10"/>
     <p:sldId id="302" r:id="rId11"/>
-    <p:sldId id="363" r:id="rId12"/>
-    <p:sldId id="372" r:id="rId13"/>
-    <p:sldId id="368" r:id="rId14"/>
-    <p:sldId id="370" r:id="rId15"/>
-    <p:sldId id="373" r:id="rId16"/>
-    <p:sldId id="374" r:id="rId17"/>
-    <p:sldId id="375" r:id="rId18"/>
-    <p:sldId id="376" r:id="rId19"/>
+    <p:sldId id="370" r:id="rId12"/>
+    <p:sldId id="373" r:id="rId13"/>
+    <p:sldId id="374" r:id="rId14"/>
+    <p:sldId id="375" r:id="rId15"/>
+    <p:sldId id="376" r:id="rId16"/>
   </p:sldIdLst>
   <p:sldSz cx="9144000" cy="6858000" type="screen4x3"/>
   <p:notesSz cx="6858000" cy="9144000"/>
@@ -143,6 +140,432 @@
 </p:presentation>
 </file>
 
+<file path=ppt/revisionInfo.xml><?xml version="1.0" encoding="utf-8"?>
+<p1510:revInfo xmlns:a="http://schemas.openxmlformats.org/drawingml/2006/main" xmlns:r="http://schemas.openxmlformats.org/officeDocument/2006/relationships" xmlns:p1510="http://schemas.microsoft.com/office/powerpoint/2015/10/main">
+  <p1510:revLst>
+    <p1510:client id="{940A510A-3F6A-4B3D-B4CC-3C39B8976ED7}" v="12" dt="2026-08-24T23:14:03.982"/>
+  </p1510:revLst>
+</p1510:revInfo>
+</file>
+
+<file path=ppt/changesInfos/changesInfo1.xml><?xml version="1.0" encoding="utf-8"?>
+<pc:chgInfo xmlns:a="http://schemas.openxmlformats.org/drawingml/2006/main" xmlns:r="http://schemas.openxmlformats.org/officeDocument/2006/relationships" xmlns:ac="http://schemas.microsoft.com/office/drawing/2013/main/command" xmlns:pc="http://schemas.microsoft.com/office/powerpoint/2013/main/command">
+  <pc:docChgLst>
+    <pc:chgData name="Lizethe Pérez Fuertes" userId="4ae9ef87-2a7d-42f8-8dfa-0a501a9e2ff4" providerId="ADAL" clId="{FDDD45CB-1330-4033-A842-3D2746AFF7C7}"/>
+    <pc:docChg chg="custSel addSld delSld modSld">
+      <pc:chgData name="Lizethe Pérez Fuertes" userId="4ae9ef87-2a7d-42f8-8dfa-0a501a9e2ff4" providerId="ADAL" clId="{FDDD45CB-1330-4033-A842-3D2746AFF7C7}" dt="2026-08-24T23:20:18.243" v="687" actId="113"/>
+      <pc:docMkLst>
+        <pc:docMk/>
+      </pc:docMkLst>
+      <pc:sldChg chg="modSp mod">
+        <pc:chgData name="Lizethe Pérez Fuertes" userId="4ae9ef87-2a7d-42f8-8dfa-0a501a9e2ff4" providerId="ADAL" clId="{FDDD45CB-1330-4033-A842-3D2746AFF7C7}" dt="2026-08-24T22:13:49.342" v="56" actId="6549"/>
+        <pc:sldMkLst>
+          <pc:docMk/>
+          <pc:sldMk cId="2553855534" sldId="289"/>
+        </pc:sldMkLst>
+        <pc:spChg chg="mod">
+          <ac:chgData name="Lizethe Pérez Fuertes" userId="4ae9ef87-2a7d-42f8-8dfa-0a501a9e2ff4" providerId="ADAL" clId="{FDDD45CB-1330-4033-A842-3D2746AFF7C7}" dt="2026-08-24T22:13:49.342" v="56" actId="6549"/>
+          <ac:spMkLst>
+            <pc:docMk/>
+            <pc:sldMk cId="2553855534" sldId="289"/>
+            <ac:spMk id="2" creationId="{00000000-0000-0000-0000-000000000000}"/>
+          </ac:spMkLst>
+        </pc:spChg>
+      </pc:sldChg>
+      <pc:sldChg chg="modSp mod">
+        <pc:chgData name="Lizethe Pérez Fuertes" userId="4ae9ef87-2a7d-42f8-8dfa-0a501a9e2ff4" providerId="ADAL" clId="{FDDD45CB-1330-4033-A842-3D2746AFF7C7}" dt="2026-08-24T23:16:18.031" v="659" actId="113"/>
+        <pc:sldMkLst>
+          <pc:docMk/>
+          <pc:sldMk cId="3785121578" sldId="302"/>
+        </pc:sldMkLst>
+        <pc:spChg chg="mod">
+          <ac:chgData name="Lizethe Pérez Fuertes" userId="4ae9ef87-2a7d-42f8-8dfa-0a501a9e2ff4" providerId="ADAL" clId="{FDDD45CB-1330-4033-A842-3D2746AFF7C7}" dt="2026-08-24T23:16:18.031" v="659" actId="113"/>
+          <ac:spMkLst>
+            <pc:docMk/>
+            <pc:sldMk cId="3785121578" sldId="302"/>
+            <ac:spMk id="184324" creationId="{00000000-0000-0000-0000-000000000000}"/>
+          </ac:spMkLst>
+        </pc:spChg>
+      </pc:sldChg>
+      <pc:sldChg chg="modSp mod">
+        <pc:chgData name="Lizethe Pérez Fuertes" userId="4ae9ef87-2a7d-42f8-8dfa-0a501a9e2ff4" providerId="ADAL" clId="{FDDD45CB-1330-4033-A842-3D2746AFF7C7}" dt="2026-08-24T23:10:56.241" v="499" actId="14100"/>
+        <pc:sldMkLst>
+          <pc:docMk/>
+          <pc:sldMk cId="3299616051" sldId="332"/>
+        </pc:sldMkLst>
+        <pc:spChg chg="mod">
+          <ac:chgData name="Lizethe Pérez Fuertes" userId="4ae9ef87-2a7d-42f8-8dfa-0a501a9e2ff4" providerId="ADAL" clId="{FDDD45CB-1330-4033-A842-3D2746AFF7C7}" dt="2026-08-24T23:10:56.241" v="499" actId="14100"/>
+          <ac:spMkLst>
+            <pc:docMk/>
+            <pc:sldMk cId="3299616051" sldId="332"/>
+            <ac:spMk id="4098" creationId="{00000000-0000-0000-0000-000000000000}"/>
+          </ac:spMkLst>
+        </pc:spChg>
+        <pc:spChg chg="mod">
+          <ac:chgData name="Lizethe Pérez Fuertes" userId="4ae9ef87-2a7d-42f8-8dfa-0a501a9e2ff4" providerId="ADAL" clId="{FDDD45CB-1330-4033-A842-3D2746AFF7C7}" dt="2026-08-24T23:01:22.021" v="328" actId="1076"/>
+          <ac:spMkLst>
+            <pc:docMk/>
+            <pc:sldMk cId="3299616051" sldId="332"/>
+            <ac:spMk id="184324" creationId="{00000000-0000-0000-0000-000000000000}"/>
+          </ac:spMkLst>
+        </pc:spChg>
+        <pc:picChg chg="mod ord">
+          <ac:chgData name="Lizethe Pérez Fuertes" userId="4ae9ef87-2a7d-42f8-8dfa-0a501a9e2ff4" providerId="ADAL" clId="{FDDD45CB-1330-4033-A842-3D2746AFF7C7}" dt="2026-08-24T23:10:38.801" v="495" actId="1076"/>
+          <ac:picMkLst>
+            <pc:docMk/>
+            <pc:sldMk cId="3299616051" sldId="332"/>
+            <ac:picMk id="3" creationId="{B7A2194D-FDB4-4270-A0B6-97ED9690BFC4}"/>
+          </ac:picMkLst>
+        </pc:picChg>
+      </pc:sldChg>
+      <pc:sldChg chg="modSp mod">
+        <pc:chgData name="Lizethe Pérez Fuertes" userId="4ae9ef87-2a7d-42f8-8dfa-0a501a9e2ff4" providerId="ADAL" clId="{FDDD45CB-1330-4033-A842-3D2746AFF7C7}" dt="2026-08-24T22:15:56.372" v="67" actId="113"/>
+        <pc:sldMkLst>
+          <pc:docMk/>
+          <pc:sldMk cId="1316496051" sldId="359"/>
+        </pc:sldMkLst>
+        <pc:spChg chg="mod">
+          <ac:chgData name="Lizethe Pérez Fuertes" userId="4ae9ef87-2a7d-42f8-8dfa-0a501a9e2ff4" providerId="ADAL" clId="{FDDD45CB-1330-4033-A842-3D2746AFF7C7}" dt="2026-08-24T22:15:20.873" v="66" actId="948"/>
+          <ac:spMkLst>
+            <pc:docMk/>
+            <pc:sldMk cId="1316496051" sldId="359"/>
+            <ac:spMk id="4098" creationId="{00000000-0000-0000-0000-000000000000}"/>
+          </ac:spMkLst>
+        </pc:spChg>
+        <pc:spChg chg="mod">
+          <ac:chgData name="Lizethe Pérez Fuertes" userId="4ae9ef87-2a7d-42f8-8dfa-0a501a9e2ff4" providerId="ADAL" clId="{FDDD45CB-1330-4033-A842-3D2746AFF7C7}" dt="2026-08-24T22:15:56.372" v="67" actId="113"/>
+          <ac:spMkLst>
+            <pc:docMk/>
+            <pc:sldMk cId="1316496051" sldId="359"/>
+            <ac:spMk id="184324" creationId="{00000000-0000-0000-0000-000000000000}"/>
+          </ac:spMkLst>
+        </pc:spChg>
+      </pc:sldChg>
+      <pc:sldChg chg="modSp mod">
+        <pc:chgData name="Lizethe Pérez Fuertes" userId="4ae9ef87-2a7d-42f8-8dfa-0a501a9e2ff4" providerId="ADAL" clId="{FDDD45CB-1330-4033-A842-3D2746AFF7C7}" dt="2026-08-24T22:36:49.086" v="88" actId="113"/>
+        <pc:sldMkLst>
+          <pc:docMk/>
+          <pc:sldMk cId="3550217860" sldId="360"/>
+        </pc:sldMkLst>
+        <pc:spChg chg="mod">
+          <ac:chgData name="Lizethe Pérez Fuertes" userId="4ae9ef87-2a7d-42f8-8dfa-0a501a9e2ff4" providerId="ADAL" clId="{FDDD45CB-1330-4033-A842-3D2746AFF7C7}" dt="2026-08-24T22:36:49.086" v="88" actId="113"/>
+          <ac:spMkLst>
+            <pc:docMk/>
+            <pc:sldMk cId="3550217860" sldId="360"/>
+            <ac:spMk id="4098" creationId="{00000000-0000-0000-0000-000000000000}"/>
+          </ac:spMkLst>
+        </pc:spChg>
+        <pc:spChg chg="mod">
+          <ac:chgData name="Lizethe Pérez Fuertes" userId="4ae9ef87-2a7d-42f8-8dfa-0a501a9e2ff4" providerId="ADAL" clId="{FDDD45CB-1330-4033-A842-3D2746AFF7C7}" dt="2026-08-24T22:16:08.364" v="68" actId="113"/>
+          <ac:spMkLst>
+            <pc:docMk/>
+            <pc:sldMk cId="3550217860" sldId="360"/>
+            <ac:spMk id="184324" creationId="{00000000-0000-0000-0000-000000000000}"/>
+          </ac:spMkLst>
+        </pc:spChg>
+      </pc:sldChg>
+      <pc:sldChg chg="addSp modSp mod">
+        <pc:chgData name="Lizethe Pérez Fuertes" userId="4ae9ef87-2a7d-42f8-8dfa-0a501a9e2ff4" providerId="ADAL" clId="{FDDD45CB-1330-4033-A842-3D2746AFF7C7}" dt="2026-08-24T22:47:33.533" v="222" actId="1076"/>
+        <pc:sldMkLst>
+          <pc:docMk/>
+          <pc:sldMk cId="2680330102" sldId="361"/>
+        </pc:sldMkLst>
+        <pc:spChg chg="mod">
+          <ac:chgData name="Lizethe Pérez Fuertes" userId="4ae9ef87-2a7d-42f8-8dfa-0a501a9e2ff4" providerId="ADAL" clId="{FDDD45CB-1330-4033-A842-3D2746AFF7C7}" dt="2026-08-24T22:47:21.771" v="218" actId="14100"/>
+          <ac:spMkLst>
+            <pc:docMk/>
+            <pc:sldMk cId="2680330102" sldId="361"/>
+            <ac:spMk id="4098" creationId="{00000000-0000-0000-0000-000000000000}"/>
+          </ac:spMkLst>
+        </pc:spChg>
+        <pc:spChg chg="mod">
+          <ac:chgData name="Lizethe Pérez Fuertes" userId="4ae9ef87-2a7d-42f8-8dfa-0a501a9e2ff4" providerId="ADAL" clId="{FDDD45CB-1330-4033-A842-3D2746AFF7C7}" dt="2026-08-24T22:31:21.899" v="70" actId="113"/>
+          <ac:spMkLst>
+            <pc:docMk/>
+            <pc:sldMk cId="2680330102" sldId="361"/>
+            <ac:spMk id="184324" creationId="{00000000-0000-0000-0000-000000000000}"/>
+          </ac:spMkLst>
+        </pc:spChg>
+        <pc:picChg chg="add mod ord">
+          <ac:chgData name="Lizethe Pérez Fuertes" userId="4ae9ef87-2a7d-42f8-8dfa-0a501a9e2ff4" providerId="ADAL" clId="{FDDD45CB-1330-4033-A842-3D2746AFF7C7}" dt="2026-08-24T22:47:33.533" v="222" actId="1076"/>
+          <ac:picMkLst>
+            <pc:docMk/>
+            <pc:sldMk cId="2680330102" sldId="361"/>
+            <ac:picMk id="3" creationId="{DEEDC082-4811-8F4F-7D5C-C7E129D3E487}"/>
+          </ac:picMkLst>
+        </pc:picChg>
+      </pc:sldChg>
+      <pc:sldChg chg="del">
+        <pc:chgData name="Lizethe Pérez Fuertes" userId="4ae9ef87-2a7d-42f8-8dfa-0a501a9e2ff4" providerId="ADAL" clId="{FDDD45CB-1330-4033-A842-3D2746AFF7C7}" dt="2026-08-24T22:54:05.681" v="246" actId="47"/>
+        <pc:sldMkLst>
+          <pc:docMk/>
+          <pc:sldMk cId="3734763544" sldId="362"/>
+        </pc:sldMkLst>
+      </pc:sldChg>
+      <pc:sldChg chg="del">
+        <pc:chgData name="Lizethe Pérez Fuertes" userId="4ae9ef87-2a7d-42f8-8dfa-0a501a9e2ff4" providerId="ADAL" clId="{FDDD45CB-1330-4033-A842-3D2746AFF7C7}" dt="2026-08-24T23:16:22.536" v="660" actId="47"/>
+        <pc:sldMkLst>
+          <pc:docMk/>
+          <pc:sldMk cId="772380651" sldId="363"/>
+        </pc:sldMkLst>
+      </pc:sldChg>
+      <pc:sldChg chg="modSp mod">
+        <pc:chgData name="Lizethe Pérez Fuertes" userId="4ae9ef87-2a7d-42f8-8dfa-0a501a9e2ff4" providerId="ADAL" clId="{FDDD45CB-1330-4033-A842-3D2746AFF7C7}" dt="2026-08-24T22:57:39.174" v="290" actId="20577"/>
+        <pc:sldMkLst>
+          <pc:docMk/>
+          <pc:sldMk cId="4160736367" sldId="364"/>
+        </pc:sldMkLst>
+        <pc:spChg chg="mod">
+          <ac:chgData name="Lizethe Pérez Fuertes" userId="4ae9ef87-2a7d-42f8-8dfa-0a501a9e2ff4" providerId="ADAL" clId="{FDDD45CB-1330-4033-A842-3D2746AFF7C7}" dt="2026-08-24T22:57:39.174" v="290" actId="20577"/>
+          <ac:spMkLst>
+            <pc:docMk/>
+            <pc:sldMk cId="4160736367" sldId="364"/>
+            <ac:spMk id="9" creationId="{0A7E3DB6-2EEA-41A3-A742-AB314E48E123}"/>
+          </ac:spMkLst>
+        </pc:spChg>
+        <pc:spChg chg="mod">
+          <ac:chgData name="Lizethe Pérez Fuertes" userId="4ae9ef87-2a7d-42f8-8dfa-0a501a9e2ff4" providerId="ADAL" clId="{FDDD45CB-1330-4033-A842-3D2746AFF7C7}" dt="2026-08-24T22:57:06.464" v="280" actId="113"/>
+          <ac:spMkLst>
+            <pc:docMk/>
+            <pc:sldMk cId="4160736367" sldId="364"/>
+            <ac:spMk id="184324" creationId="{00000000-0000-0000-0000-000000000000}"/>
+          </ac:spMkLst>
+        </pc:spChg>
+      </pc:sldChg>
+      <pc:sldChg chg="del">
+        <pc:chgData name="Lizethe Pérez Fuertes" userId="4ae9ef87-2a7d-42f8-8dfa-0a501a9e2ff4" providerId="ADAL" clId="{FDDD45CB-1330-4033-A842-3D2746AFF7C7}" dt="2026-08-24T23:11:24.646" v="500" actId="47"/>
+        <pc:sldMkLst>
+          <pc:docMk/>
+          <pc:sldMk cId="1179431574" sldId="366"/>
+        </pc:sldMkLst>
+      </pc:sldChg>
+      <pc:sldChg chg="modSp mod">
+        <pc:chgData name="Lizethe Pérez Fuertes" userId="4ae9ef87-2a7d-42f8-8dfa-0a501a9e2ff4" providerId="ADAL" clId="{FDDD45CB-1330-4033-A842-3D2746AFF7C7}" dt="2026-08-24T23:15:50.646" v="658" actId="20577"/>
+        <pc:sldMkLst>
+          <pc:docMk/>
+          <pc:sldMk cId="3551076472" sldId="367"/>
+        </pc:sldMkLst>
+        <pc:spChg chg="mod">
+          <ac:chgData name="Lizethe Pérez Fuertes" userId="4ae9ef87-2a7d-42f8-8dfa-0a501a9e2ff4" providerId="ADAL" clId="{FDDD45CB-1330-4033-A842-3D2746AFF7C7}" dt="2026-08-24T23:15:50.646" v="658" actId="20577"/>
+          <ac:spMkLst>
+            <pc:docMk/>
+            <pc:sldMk cId="3551076472" sldId="367"/>
+            <ac:spMk id="4098" creationId="{00000000-0000-0000-0000-000000000000}"/>
+          </ac:spMkLst>
+        </pc:spChg>
+        <pc:spChg chg="mod">
+          <ac:chgData name="Lizethe Pérez Fuertes" userId="4ae9ef87-2a7d-42f8-8dfa-0a501a9e2ff4" providerId="ADAL" clId="{FDDD45CB-1330-4033-A842-3D2746AFF7C7}" dt="2026-08-24T23:11:31.719" v="501" actId="113"/>
+          <ac:spMkLst>
+            <pc:docMk/>
+            <pc:sldMk cId="3551076472" sldId="367"/>
+            <ac:spMk id="184324" creationId="{00000000-0000-0000-0000-000000000000}"/>
+          </ac:spMkLst>
+        </pc:spChg>
+      </pc:sldChg>
+      <pc:sldChg chg="del">
+        <pc:chgData name="Lizethe Pérez Fuertes" userId="4ae9ef87-2a7d-42f8-8dfa-0a501a9e2ff4" providerId="ADAL" clId="{FDDD45CB-1330-4033-A842-3D2746AFF7C7}" dt="2026-08-24T23:16:44.571" v="661" actId="47"/>
+        <pc:sldMkLst>
+          <pc:docMk/>
+          <pc:sldMk cId="2650679" sldId="368"/>
+        </pc:sldMkLst>
+      </pc:sldChg>
+      <pc:sldChg chg="modSp mod">
+        <pc:chgData name="Lizethe Pérez Fuertes" userId="4ae9ef87-2a7d-42f8-8dfa-0a501a9e2ff4" providerId="ADAL" clId="{FDDD45CB-1330-4033-A842-3D2746AFF7C7}" dt="2026-08-24T23:18:21.028" v="672" actId="1076"/>
+        <pc:sldMkLst>
+          <pc:docMk/>
+          <pc:sldMk cId="2681880623" sldId="370"/>
+        </pc:sldMkLst>
+        <pc:spChg chg="mod">
+          <ac:chgData name="Lizethe Pérez Fuertes" userId="4ae9ef87-2a7d-42f8-8dfa-0a501a9e2ff4" providerId="ADAL" clId="{FDDD45CB-1330-4033-A842-3D2746AFF7C7}" dt="2026-08-24T23:18:11.745" v="671" actId="948"/>
+          <ac:spMkLst>
+            <pc:docMk/>
+            <pc:sldMk cId="2681880623" sldId="370"/>
+            <ac:spMk id="4098" creationId="{00000000-0000-0000-0000-000000000000}"/>
+          </ac:spMkLst>
+        </pc:spChg>
+        <pc:spChg chg="mod">
+          <ac:chgData name="Lizethe Pérez Fuertes" userId="4ae9ef87-2a7d-42f8-8dfa-0a501a9e2ff4" providerId="ADAL" clId="{FDDD45CB-1330-4033-A842-3D2746AFF7C7}" dt="2026-08-24T23:17:08.709" v="662" actId="113"/>
+          <ac:spMkLst>
+            <pc:docMk/>
+            <pc:sldMk cId="2681880623" sldId="370"/>
+            <ac:spMk id="184324" creationId="{00000000-0000-0000-0000-000000000000}"/>
+          </ac:spMkLst>
+        </pc:spChg>
+        <pc:picChg chg="mod">
+          <ac:chgData name="Lizethe Pérez Fuertes" userId="4ae9ef87-2a7d-42f8-8dfa-0a501a9e2ff4" providerId="ADAL" clId="{FDDD45CB-1330-4033-A842-3D2746AFF7C7}" dt="2026-08-24T23:18:21.028" v="672" actId="1076"/>
+          <ac:picMkLst>
+            <pc:docMk/>
+            <pc:sldMk cId="2681880623" sldId="370"/>
+            <ac:picMk id="5" creationId="{B312F5C1-0B54-4279-B05E-43551BDB3426}"/>
+          </ac:picMkLst>
+        </pc:picChg>
+      </pc:sldChg>
+      <pc:sldChg chg="del">
+        <pc:chgData name="Lizethe Pérez Fuertes" userId="4ae9ef87-2a7d-42f8-8dfa-0a501a9e2ff4" providerId="ADAL" clId="{FDDD45CB-1330-4033-A842-3D2746AFF7C7}" dt="2026-08-24T23:16:44.571" v="661" actId="47"/>
+        <pc:sldMkLst>
+          <pc:docMk/>
+          <pc:sldMk cId="3526004009" sldId="372"/>
+        </pc:sldMkLst>
+      </pc:sldChg>
+      <pc:sldChg chg="modSp mod">
+        <pc:chgData name="Lizethe Pérez Fuertes" userId="4ae9ef87-2a7d-42f8-8dfa-0a501a9e2ff4" providerId="ADAL" clId="{FDDD45CB-1330-4033-A842-3D2746AFF7C7}" dt="2026-08-24T23:19:09.876" v="680" actId="14100"/>
+        <pc:sldMkLst>
+          <pc:docMk/>
+          <pc:sldMk cId="3132394090" sldId="373"/>
+        </pc:sldMkLst>
+        <pc:spChg chg="mod">
+          <ac:chgData name="Lizethe Pérez Fuertes" userId="4ae9ef87-2a7d-42f8-8dfa-0a501a9e2ff4" providerId="ADAL" clId="{FDDD45CB-1330-4033-A842-3D2746AFF7C7}" dt="2026-08-24T23:19:09.876" v="680" actId="14100"/>
+          <ac:spMkLst>
+            <pc:docMk/>
+            <pc:sldMk cId="3132394090" sldId="373"/>
+            <ac:spMk id="5" creationId="{320E9E94-35B1-4964-BB02-8EA246862BDF}"/>
+          </ac:spMkLst>
+        </pc:spChg>
+        <pc:spChg chg="mod">
+          <ac:chgData name="Lizethe Pérez Fuertes" userId="4ae9ef87-2a7d-42f8-8dfa-0a501a9e2ff4" providerId="ADAL" clId="{FDDD45CB-1330-4033-A842-3D2746AFF7C7}" dt="2026-08-24T23:18:54.677" v="676" actId="113"/>
+          <ac:spMkLst>
+            <pc:docMk/>
+            <pc:sldMk cId="3132394090" sldId="373"/>
+            <ac:spMk id="184324" creationId="{00000000-0000-0000-0000-000000000000}"/>
+          </ac:spMkLst>
+        </pc:spChg>
+      </pc:sldChg>
+      <pc:sldChg chg="modSp mod">
+        <pc:chgData name="Lizethe Pérez Fuertes" userId="4ae9ef87-2a7d-42f8-8dfa-0a501a9e2ff4" providerId="ADAL" clId="{FDDD45CB-1330-4033-A842-3D2746AFF7C7}" dt="2026-08-24T23:19:24.189" v="682" actId="113"/>
+        <pc:sldMkLst>
+          <pc:docMk/>
+          <pc:sldMk cId="3783525750" sldId="374"/>
+        </pc:sldMkLst>
+        <pc:spChg chg="mod">
+          <ac:chgData name="Lizethe Pérez Fuertes" userId="4ae9ef87-2a7d-42f8-8dfa-0a501a9e2ff4" providerId="ADAL" clId="{FDDD45CB-1330-4033-A842-3D2746AFF7C7}" dt="2026-08-24T23:19:24.189" v="682" actId="113"/>
+          <ac:spMkLst>
+            <pc:docMk/>
+            <pc:sldMk cId="3783525750" sldId="374"/>
+            <ac:spMk id="184324" creationId="{00000000-0000-0000-0000-000000000000}"/>
+          </ac:spMkLst>
+        </pc:spChg>
+      </pc:sldChg>
+      <pc:sldChg chg="modSp mod">
+        <pc:chgData name="Lizethe Pérez Fuertes" userId="4ae9ef87-2a7d-42f8-8dfa-0a501a9e2ff4" providerId="ADAL" clId="{FDDD45CB-1330-4033-A842-3D2746AFF7C7}" dt="2026-08-24T23:19:47.375" v="685" actId="6549"/>
+        <pc:sldMkLst>
+          <pc:docMk/>
+          <pc:sldMk cId="3672429509" sldId="375"/>
+        </pc:sldMkLst>
+        <pc:spChg chg="mod">
+          <ac:chgData name="Lizethe Pérez Fuertes" userId="4ae9ef87-2a7d-42f8-8dfa-0a501a9e2ff4" providerId="ADAL" clId="{FDDD45CB-1330-4033-A842-3D2746AFF7C7}" dt="2026-08-24T23:19:47.375" v="685" actId="6549"/>
+          <ac:spMkLst>
+            <pc:docMk/>
+            <pc:sldMk cId="3672429509" sldId="375"/>
+            <ac:spMk id="5" creationId="{320E9E94-35B1-4964-BB02-8EA246862BDF}"/>
+          </ac:spMkLst>
+        </pc:spChg>
+        <pc:spChg chg="mod">
+          <ac:chgData name="Lizethe Pérez Fuertes" userId="4ae9ef87-2a7d-42f8-8dfa-0a501a9e2ff4" providerId="ADAL" clId="{FDDD45CB-1330-4033-A842-3D2746AFF7C7}" dt="2026-08-24T23:19:40.453" v="684" actId="113"/>
+          <ac:spMkLst>
+            <pc:docMk/>
+            <pc:sldMk cId="3672429509" sldId="375"/>
+            <ac:spMk id="184324" creationId="{00000000-0000-0000-0000-000000000000}"/>
+          </ac:spMkLst>
+        </pc:spChg>
+      </pc:sldChg>
+      <pc:sldChg chg="modSp mod">
+        <pc:chgData name="Lizethe Pérez Fuertes" userId="4ae9ef87-2a7d-42f8-8dfa-0a501a9e2ff4" providerId="ADAL" clId="{FDDD45CB-1330-4033-A842-3D2746AFF7C7}" dt="2026-08-24T23:20:18.243" v="687" actId="113"/>
+        <pc:sldMkLst>
+          <pc:docMk/>
+          <pc:sldMk cId="831269208" sldId="376"/>
+        </pc:sldMkLst>
+        <pc:spChg chg="mod">
+          <ac:chgData name="Lizethe Pérez Fuertes" userId="4ae9ef87-2a7d-42f8-8dfa-0a501a9e2ff4" providerId="ADAL" clId="{FDDD45CB-1330-4033-A842-3D2746AFF7C7}" dt="2026-08-24T23:20:18.243" v="687" actId="113"/>
+          <ac:spMkLst>
+            <pc:docMk/>
+            <pc:sldMk cId="831269208" sldId="376"/>
+            <ac:spMk id="184324" creationId="{00000000-0000-0000-0000-000000000000}"/>
+          </ac:spMkLst>
+        </pc:spChg>
+      </pc:sldChg>
+      <pc:sldChg chg="addSp modSp add mod">
+        <pc:chgData name="Lizethe Pérez Fuertes" userId="4ae9ef87-2a7d-42f8-8dfa-0a501a9e2ff4" providerId="ADAL" clId="{FDDD45CB-1330-4033-A842-3D2746AFF7C7}" dt="2026-08-24T22:53:41.150" v="245" actId="1076"/>
+        <pc:sldMkLst>
+          <pc:docMk/>
+          <pc:sldMk cId="427573656" sldId="377"/>
+        </pc:sldMkLst>
+        <pc:spChg chg="mod">
+          <ac:chgData name="Lizethe Pérez Fuertes" userId="4ae9ef87-2a7d-42f8-8dfa-0a501a9e2ff4" providerId="ADAL" clId="{FDDD45CB-1330-4033-A842-3D2746AFF7C7}" dt="2026-08-24T22:50:04.396" v="242" actId="14100"/>
+          <ac:spMkLst>
+            <pc:docMk/>
+            <pc:sldMk cId="427573656" sldId="377"/>
+            <ac:spMk id="4098" creationId="{6363BDEF-826F-35BA-7B9E-8E60FC54A4E6}"/>
+          </ac:spMkLst>
+        </pc:spChg>
+        <pc:spChg chg="mod">
+          <ac:chgData name="Lizethe Pérez Fuertes" userId="4ae9ef87-2a7d-42f8-8dfa-0a501a9e2ff4" providerId="ADAL" clId="{FDDD45CB-1330-4033-A842-3D2746AFF7C7}" dt="2026-08-24T22:37:18.052" v="120" actId="20577"/>
+          <ac:spMkLst>
+            <pc:docMk/>
+            <pc:sldMk cId="427573656" sldId="377"/>
+            <ac:spMk id="184324" creationId="{14E02352-C507-6518-7E5B-492B2742BB8F}"/>
+          </ac:spMkLst>
+        </pc:spChg>
+        <pc:picChg chg="add mod">
+          <ac:chgData name="Lizethe Pérez Fuertes" userId="4ae9ef87-2a7d-42f8-8dfa-0a501a9e2ff4" providerId="ADAL" clId="{FDDD45CB-1330-4033-A842-3D2746AFF7C7}" dt="2026-08-24T22:53:41.150" v="245" actId="1076"/>
+          <ac:picMkLst>
+            <pc:docMk/>
+            <pc:sldMk cId="427573656" sldId="377"/>
+            <ac:picMk id="3" creationId="{61A1B667-1DD6-8716-2F16-7FE7BF30D92C}"/>
+          </ac:picMkLst>
+        </pc:picChg>
+      </pc:sldChg>
+      <pc:sldChg chg="addSp delSp modSp add mod">
+        <pc:chgData name="Lizethe Pérez Fuertes" userId="4ae9ef87-2a7d-42f8-8dfa-0a501a9e2ff4" providerId="ADAL" clId="{FDDD45CB-1330-4033-A842-3D2746AFF7C7}" dt="2026-08-24T22:48:23.685" v="231" actId="1076"/>
+        <pc:sldMkLst>
+          <pc:docMk/>
+          <pc:sldMk cId="1289742310" sldId="378"/>
+        </pc:sldMkLst>
+        <pc:spChg chg="add mod">
+          <ac:chgData name="Lizethe Pérez Fuertes" userId="4ae9ef87-2a7d-42f8-8dfa-0a501a9e2ff4" providerId="ADAL" clId="{FDDD45CB-1330-4033-A842-3D2746AFF7C7}" dt="2026-08-24T22:48:08.935" v="226" actId="207"/>
+          <ac:spMkLst>
+            <pc:docMk/>
+            <pc:sldMk cId="1289742310" sldId="378"/>
+            <ac:spMk id="4" creationId="{E6F561E5-5123-CF02-955A-17FA5E904910}"/>
+          </ac:spMkLst>
+        </pc:spChg>
+        <pc:spChg chg="mod">
+          <ac:chgData name="Lizethe Pérez Fuertes" userId="4ae9ef87-2a7d-42f8-8dfa-0a501a9e2ff4" providerId="ADAL" clId="{FDDD45CB-1330-4033-A842-3D2746AFF7C7}" dt="2026-08-24T22:48:18.097" v="228" actId="14100"/>
+          <ac:spMkLst>
+            <pc:docMk/>
+            <pc:sldMk cId="1289742310" sldId="378"/>
+            <ac:spMk id="4098" creationId="{5977D660-C00F-10E7-8FEB-D08DDA13BEFE}"/>
+          </ac:spMkLst>
+        </pc:spChg>
+        <pc:spChg chg="mod">
+          <ac:chgData name="Lizethe Pérez Fuertes" userId="4ae9ef87-2a7d-42f8-8dfa-0a501a9e2ff4" providerId="ADAL" clId="{FDDD45CB-1330-4033-A842-3D2746AFF7C7}" dt="2026-08-24T22:42:26.303" v="181" actId="1076"/>
+          <ac:spMkLst>
+            <pc:docMk/>
+            <pc:sldMk cId="1289742310" sldId="378"/>
+            <ac:spMk id="184324" creationId="{6541A636-2EE5-36E5-3B7B-20C3BD9BAFD7}"/>
+          </ac:spMkLst>
+        </pc:spChg>
+        <pc:picChg chg="add mod ord">
+          <ac:chgData name="Lizethe Pérez Fuertes" userId="4ae9ef87-2a7d-42f8-8dfa-0a501a9e2ff4" providerId="ADAL" clId="{FDDD45CB-1330-4033-A842-3D2746AFF7C7}" dt="2026-08-24T22:48:23.685" v="231" actId="1076"/>
+          <ac:picMkLst>
+            <pc:docMk/>
+            <pc:sldMk cId="1289742310" sldId="378"/>
+            <ac:picMk id="3" creationId="{F5E2AD1C-3A7A-F34F-6590-778EC7C38747}"/>
+          </ac:picMkLst>
+        </pc:picChg>
+        <pc:picChg chg="del">
+          <ac:chgData name="Lizethe Pérez Fuertes" userId="4ae9ef87-2a7d-42f8-8dfa-0a501a9e2ff4" providerId="ADAL" clId="{FDDD45CB-1330-4033-A842-3D2746AFF7C7}" dt="2026-08-24T22:40:12.171" v="150" actId="478"/>
+          <ac:picMkLst>
+            <pc:docMk/>
+            <pc:sldMk cId="1289742310" sldId="378"/>
+            <ac:picMk id="7" creationId="{E1741E21-A3D3-48FB-C324-19FFC76A81DE}"/>
+          </ac:picMkLst>
+        </pc:picChg>
+      </pc:sldChg>
+    </pc:docChg>
+  </pc:docChgLst>
+</pc:chgInfo>
+</file>
+
 <file path=ppt/notesMasters/notesMaster1.xml><?xml version="1.0" encoding="utf-8"?>
 <p:notesMaster xmlns:a="http://schemas.openxmlformats.org/drawingml/2006/main" xmlns:r="http://schemas.openxmlformats.org/officeDocument/2006/relationships" xmlns:p="http://schemas.openxmlformats.org/presentationml/2006/main">
   <p:cSld>
@@ -225,7 +648,7 @@
           <a:p>
             <a:fld id="{DDE721D5-655F-45D2-B717-3C4CD78C8568}" type="datetimeFigureOut">
               <a:rPr lang="es-MX" smtClean="0"/>
-              <a:t>14/10/2022</a:t>
+              <a:t>24/08/2026</a:t>
             </a:fld>
             <a:endParaRPr lang="es-MX" dirty="0"/>
           </a:p>
@@ -674,7 +1097,7 @@
           <a:p>
             <a:fld id="{B3F3E716-CACC-4490-AD07-F24B6A68DE47}" type="datetimeFigureOut">
               <a:rPr lang="es-MX" smtClean="0"/>
-              <a:t>14/10/2022</a:t>
+              <a:t>24/08/2026</a:t>
             </a:fld>
             <a:endParaRPr lang="es-MX" dirty="0"/>
           </a:p>
@@ -844,7 +1267,7 @@
           <a:p>
             <a:fld id="{B3F3E716-CACC-4490-AD07-F24B6A68DE47}" type="datetimeFigureOut">
               <a:rPr lang="es-MX" smtClean="0"/>
-              <a:t>14/10/2022</a:t>
+              <a:t>24/08/2026</a:t>
             </a:fld>
             <a:endParaRPr lang="es-MX" dirty="0"/>
           </a:p>
@@ -1024,7 +1447,7 @@
           <a:p>
             <a:fld id="{B3F3E716-CACC-4490-AD07-F24B6A68DE47}" type="datetimeFigureOut">
               <a:rPr lang="es-MX" smtClean="0"/>
-              <a:t>14/10/2022</a:t>
+              <a:t>24/08/2026</a:t>
             </a:fld>
             <a:endParaRPr lang="es-MX" dirty="0"/>
           </a:p>
@@ -1194,7 +1617,7 @@
           <a:p>
             <a:fld id="{B3F3E716-CACC-4490-AD07-F24B6A68DE47}" type="datetimeFigureOut">
               <a:rPr lang="es-MX" smtClean="0"/>
-              <a:t>14/10/2022</a:t>
+              <a:t>24/08/2026</a:t>
             </a:fld>
             <a:endParaRPr lang="es-MX" dirty="0"/>
           </a:p>
@@ -1440,7 +1863,7 @@
           <a:p>
             <a:fld id="{B3F3E716-CACC-4490-AD07-F24B6A68DE47}" type="datetimeFigureOut">
               <a:rPr lang="es-MX" smtClean="0"/>
-              <a:t>14/10/2022</a:t>
+              <a:t>24/08/2026</a:t>
             </a:fld>
             <a:endParaRPr lang="es-MX" dirty="0"/>
           </a:p>
@@ -1728,7 +2151,7 @@
           <a:p>
             <a:fld id="{B3F3E716-CACC-4490-AD07-F24B6A68DE47}" type="datetimeFigureOut">
               <a:rPr lang="es-MX" smtClean="0"/>
-              <a:t>14/10/2022</a:t>
+              <a:t>24/08/2026</a:t>
             </a:fld>
             <a:endParaRPr lang="es-MX" dirty="0"/>
           </a:p>
@@ -2150,7 +2573,7 @@
           <a:p>
             <a:fld id="{B3F3E716-CACC-4490-AD07-F24B6A68DE47}" type="datetimeFigureOut">
               <a:rPr lang="es-MX" smtClean="0"/>
-              <a:t>14/10/2022</a:t>
+              <a:t>24/08/2026</a:t>
             </a:fld>
             <a:endParaRPr lang="es-MX" dirty="0"/>
           </a:p>
@@ -2268,7 +2691,7 @@
           <a:p>
             <a:fld id="{B3F3E716-CACC-4490-AD07-F24B6A68DE47}" type="datetimeFigureOut">
               <a:rPr lang="es-MX" smtClean="0"/>
-              <a:t>14/10/2022</a:t>
+              <a:t>24/08/2026</a:t>
             </a:fld>
             <a:endParaRPr lang="es-MX" dirty="0"/>
           </a:p>
@@ -2363,7 +2786,7 @@
           <a:p>
             <a:fld id="{B3F3E716-CACC-4490-AD07-F24B6A68DE47}" type="datetimeFigureOut">
               <a:rPr lang="es-MX" smtClean="0"/>
-              <a:t>14/10/2022</a:t>
+              <a:t>24/08/2026</a:t>
             </a:fld>
             <a:endParaRPr lang="es-MX" dirty="0"/>
           </a:p>
@@ -2640,7 +3063,7 @@
           <a:p>
             <a:fld id="{B3F3E716-CACC-4490-AD07-F24B6A68DE47}" type="datetimeFigureOut">
               <a:rPr lang="es-MX" smtClean="0"/>
-              <a:t>14/10/2022</a:t>
+              <a:t>24/08/2026</a:t>
             </a:fld>
             <a:endParaRPr lang="es-MX" dirty="0"/>
           </a:p>
@@ -2893,7 +3316,7 @@
           <a:p>
             <a:fld id="{B3F3E716-CACC-4490-AD07-F24B6A68DE47}" type="datetimeFigureOut">
               <a:rPr lang="es-MX" smtClean="0"/>
-              <a:t>14/10/2022</a:t>
+              <a:t>24/08/2026</a:t>
             </a:fld>
             <a:endParaRPr lang="es-MX" dirty="0"/>
           </a:p>
@@ -3106,7 +3529,7 @@
           <a:p>
             <a:fld id="{B3F3E716-CACC-4490-AD07-F24B6A68DE47}" type="datetimeFigureOut">
               <a:rPr lang="es-MX" smtClean="0"/>
-              <a:t>14/10/2022</a:t>
+              <a:t>24/08/2026</a:t>
             </a:fld>
             <a:endParaRPr lang="es-MX" dirty="0"/>
           </a:p>
@@ -3517,7 +3940,7 @@
                   </a:schemeClr>
                 </a:solidFill>
               </a:rPr>
-              <a:t>TC1027. Programación para negocios</a:t>
+              <a:t>TC1037. Pensamiento algorítmico</a:t>
             </a:r>
           </a:p>
         </p:txBody>
@@ -3806,7 +4229,7 @@
               </a:rPr>
             </a:br>
             <a:r>
-              <a:rPr lang="es-MX" sz="3100" dirty="0">
+              <a:rPr lang="es-MX" sz="3100" b="1" dirty="0">
                 <a:solidFill>
                   <a:schemeClr val="accent6">
                     <a:lumMod val="75000"/>
@@ -3886,1371 +4309,6 @@
       </p:grpSpPr>
       <p:sp>
         <p:nvSpPr>
-          <p:cNvPr id="184324" name="Rectangle 4"/>
-          <p:cNvSpPr>
-            <a:spLocks noGrp="1" noChangeArrowheads="1"/>
-          </p:cNvSpPr>
-          <p:nvPr>
-            <p:ph type="title"/>
-          </p:nvPr>
-        </p:nvSpPr>
-        <p:spPr>
-          <a:xfrm>
-            <a:off x="457199" y="404664"/>
-            <a:ext cx="8229600" cy="1143000"/>
-          </a:xfrm>
-        </p:spPr>
-        <p:txBody>
-          <a:bodyPr>
-            <a:normAutofit fontScale="90000"/>
-          </a:bodyPr>
-          <a:lstStyle/>
-          <a:p>
-            <a:pPr eaLnBrk="1" hangingPunct="1">
-              <a:defRPr/>
-            </a:pPr>
-            <a:r>
-              <a:rPr lang="es-MX" b="1" dirty="0">
-                <a:solidFill>
-                  <a:schemeClr val="accent4">
-                    <a:lumMod val="50000"/>
-                  </a:schemeClr>
-                </a:solidFill>
-                <a:effectLst>
-                  <a:outerShdw blurRad="38100" dist="38100" dir="2700000" algn="tl">
-                    <a:srgbClr val="C0C0C0"/>
-                  </a:outerShdw>
-                </a:effectLst>
-                <a:latin typeface="Dom Casual" charset="0"/>
-              </a:rPr>
-              <a:t>Situación problema</a:t>
-            </a:r>
-            <a:br>
-              <a:rPr lang="es-MX" b="1" dirty="0">
-                <a:solidFill>
-                  <a:schemeClr val="accent4">
-                    <a:lumMod val="50000"/>
-                  </a:schemeClr>
-                </a:solidFill>
-                <a:effectLst>
-                  <a:outerShdw blurRad="38100" dist="38100" dir="2700000" algn="tl">
-                    <a:srgbClr val="C0C0C0"/>
-                  </a:outerShdw>
-                </a:effectLst>
-                <a:latin typeface="Dom Casual" charset="0"/>
-              </a:rPr>
-            </a:br>
-            <a:r>
-              <a:rPr lang="es-MX" sz="3100" dirty="0">
-                <a:solidFill>
-                  <a:schemeClr val="accent6">
-                    <a:lumMod val="75000"/>
-                  </a:schemeClr>
-                </a:solidFill>
-                <a:effectLst>
-                  <a:outerShdw blurRad="38100" dist="38100" dir="2700000" algn="tl">
-                    <a:srgbClr val="C0C0C0"/>
-                  </a:outerShdw>
-                </a:effectLst>
-                <a:latin typeface="Dom Casual" charset="0"/>
-              </a:rPr>
-              <a:t>Menú con letras</a:t>
-            </a:r>
-          </a:p>
-        </p:txBody>
-      </p:sp>
-      <p:pic>
-        <p:nvPicPr>
-          <p:cNvPr id="4" name="Imagen 3">
-            <a:extLst>
-              <a:ext uri="{FF2B5EF4-FFF2-40B4-BE49-F238E27FC236}">
-                <a16:creationId xmlns:a16="http://schemas.microsoft.com/office/drawing/2014/main" id="{6AAF229E-6ECB-4EB9-81CB-1CC86949100D}"/>
-              </a:ext>
-            </a:extLst>
-          </p:cNvPr>
-          <p:cNvPicPr>
-            <a:picLocks noChangeAspect="1"/>
-          </p:cNvPicPr>
-          <p:nvPr/>
-        </p:nvPicPr>
-        <p:blipFill>
-          <a:blip r:embed="rId2"/>
-          <a:stretch>
-            <a:fillRect/>
-          </a:stretch>
-        </p:blipFill>
-        <p:spPr>
-          <a:xfrm>
-            <a:off x="2497855" y="1988840"/>
-            <a:ext cx="4148287" cy="3816424"/>
-          </a:xfrm>
-          <a:prstGeom prst="rect">
-            <a:avLst/>
-          </a:prstGeom>
-        </p:spPr>
-      </p:pic>
-    </p:spTree>
-    <p:extLst>
-      <p:ext uri="{BB962C8B-B14F-4D97-AF65-F5344CB8AC3E}">
-        <p14:creationId xmlns:p14="http://schemas.microsoft.com/office/powerpoint/2010/main" val="772380651"/>
-      </p:ext>
-    </p:extLst>
-  </p:cSld>
-  <p:clrMapOvr>
-    <a:masterClrMapping/>
-  </p:clrMapOvr>
-</p:sld>
-</file>
-
-<file path=ppt/slides/slide12.xml><?xml version="1.0" encoding="utf-8"?>
-<p:sld xmlns:a="http://schemas.openxmlformats.org/drawingml/2006/main" xmlns:r="http://schemas.openxmlformats.org/officeDocument/2006/relationships" xmlns:p="http://schemas.openxmlformats.org/presentationml/2006/main">
-  <p:cSld>
-    <p:spTree>
-      <p:nvGrpSpPr>
-        <p:cNvPr id="1" name=""/>
-        <p:cNvGrpSpPr/>
-        <p:nvPr/>
-      </p:nvGrpSpPr>
-      <p:grpSpPr>
-        <a:xfrm>
-          <a:off x="0" y="0"/>
-          <a:ext cx="0" cy="0"/>
-          <a:chOff x="0" y="0"/>
-          <a:chExt cx="0" cy="0"/>
-        </a:xfrm>
-      </p:grpSpPr>
-      <p:pic>
-        <p:nvPicPr>
-          <p:cNvPr id="3" name="Imagen 2">
-            <a:extLst>
-              <a:ext uri="{FF2B5EF4-FFF2-40B4-BE49-F238E27FC236}">
-                <a16:creationId xmlns:a16="http://schemas.microsoft.com/office/drawing/2014/main" id="{4DC4A1ED-26E5-4C66-9D78-7B11CEAEC686}"/>
-              </a:ext>
-            </a:extLst>
-          </p:cNvPr>
-          <p:cNvPicPr>
-            <a:picLocks noChangeAspect="1"/>
-          </p:cNvPicPr>
-          <p:nvPr/>
-        </p:nvPicPr>
-        <p:blipFill>
-          <a:blip r:embed="rId2"/>
-          <a:stretch>
-            <a:fillRect/>
-          </a:stretch>
-        </p:blipFill>
-        <p:spPr>
-          <a:xfrm>
-            <a:off x="1239206" y="3284984"/>
-            <a:ext cx="6840760" cy="2381126"/>
-          </a:xfrm>
-          <a:prstGeom prst="rect">
-            <a:avLst/>
-          </a:prstGeom>
-        </p:spPr>
-      </p:pic>
-      <p:sp>
-        <p:nvSpPr>
-          <p:cNvPr id="184324" name="Rectangle 4"/>
-          <p:cNvSpPr>
-            <a:spLocks noGrp="1" noChangeArrowheads="1"/>
-          </p:cNvSpPr>
-          <p:nvPr>
-            <p:ph type="title"/>
-          </p:nvPr>
-        </p:nvSpPr>
-        <p:spPr>
-          <a:xfrm>
-            <a:off x="516238" y="337220"/>
-            <a:ext cx="8111523" cy="1143000"/>
-          </a:xfrm>
-        </p:spPr>
-        <p:txBody>
-          <a:bodyPr>
-            <a:normAutofit fontScale="90000"/>
-          </a:bodyPr>
-          <a:lstStyle/>
-          <a:p>
-            <a:pPr eaLnBrk="1" hangingPunct="1">
-              <a:defRPr/>
-            </a:pPr>
-            <a:r>
-              <a:rPr lang="es-MX" b="1" dirty="0">
-                <a:solidFill>
-                  <a:schemeClr val="accent4">
-                    <a:lumMod val="50000"/>
-                  </a:schemeClr>
-                </a:solidFill>
-                <a:effectLst>
-                  <a:outerShdw blurRad="38100" dist="38100" dir="2700000" algn="tl">
-                    <a:srgbClr val="C0C0C0"/>
-                  </a:outerShdw>
-                </a:effectLst>
-                <a:latin typeface="Dom Casual" charset="0"/>
-              </a:rPr>
-              <a:t>Situación problema</a:t>
-            </a:r>
-            <a:br>
-              <a:rPr lang="es-MX" b="1" dirty="0">
-                <a:solidFill>
-                  <a:schemeClr val="accent4">
-                    <a:lumMod val="50000"/>
-                  </a:schemeClr>
-                </a:solidFill>
-                <a:effectLst>
-                  <a:outerShdw blurRad="38100" dist="38100" dir="2700000" algn="tl">
-                    <a:srgbClr val="C0C0C0"/>
-                  </a:outerShdw>
-                </a:effectLst>
-                <a:latin typeface="Dom Casual" charset="0"/>
-              </a:rPr>
-            </a:br>
-            <a:r>
-              <a:rPr lang="es-MX" sz="3100" dirty="0">
-                <a:solidFill>
-                  <a:schemeClr val="accent6">
-                    <a:lumMod val="75000"/>
-                  </a:schemeClr>
-                </a:solidFill>
-                <a:effectLst>
-                  <a:outerShdw blurRad="38100" dist="38100" dir="2700000" algn="tl">
-                    <a:srgbClr val="C0C0C0"/>
-                  </a:outerShdw>
-                </a:effectLst>
-                <a:latin typeface="Dom Casual" charset="0"/>
-              </a:rPr>
-              <a:t>Programa</a:t>
-            </a:r>
-          </a:p>
-        </p:txBody>
-      </p:sp>
-      <p:pic>
-        <p:nvPicPr>
-          <p:cNvPr id="8" name="Imagen 7" descr="Imagen que contiene pequeño, computadora, tabla&#10;&#10;Descripción generada automáticamente">
-            <a:extLst>
-              <a:ext uri="{FF2B5EF4-FFF2-40B4-BE49-F238E27FC236}">
-                <a16:creationId xmlns:a16="http://schemas.microsoft.com/office/drawing/2014/main" id="{B70A3D8A-8A2D-47FA-95C7-B2BC51C96F85}"/>
-              </a:ext>
-            </a:extLst>
-          </p:cNvPr>
-          <p:cNvPicPr>
-            <a:picLocks noChangeAspect="1"/>
-          </p:cNvPicPr>
-          <p:nvPr/>
-        </p:nvPicPr>
-        <p:blipFill>
-          <a:blip r:embed="rId3">
-            <a:extLst>
-              <a:ext uri="{28A0092B-C50C-407E-A947-70E740481C1C}">
-                <a14:useLocalDpi xmlns:a14="http://schemas.microsoft.com/office/drawing/2010/main" val="0"/>
-              </a:ext>
-            </a:extLst>
-          </a:blip>
-          <a:stretch>
-            <a:fillRect/>
-          </a:stretch>
-        </p:blipFill>
-        <p:spPr>
-          <a:xfrm>
-            <a:off x="7164288" y="1090528"/>
-            <a:ext cx="1095375" cy="1114425"/>
-          </a:xfrm>
-          <a:prstGeom prst="rect">
-            <a:avLst/>
-          </a:prstGeom>
-        </p:spPr>
-      </p:pic>
-      <p:sp>
-        <p:nvSpPr>
-          <p:cNvPr id="9" name="Rectangle 2">
-            <a:extLst>
-              <a:ext uri="{FF2B5EF4-FFF2-40B4-BE49-F238E27FC236}">
-                <a16:creationId xmlns:a16="http://schemas.microsoft.com/office/drawing/2014/main" id="{4142A75B-4638-434B-8BF4-013ED83C118A}"/>
-              </a:ext>
-            </a:extLst>
-          </p:cNvPr>
-          <p:cNvSpPr txBox="1">
-            <a:spLocks noChangeArrowheads="1"/>
-          </p:cNvSpPr>
-          <p:nvPr/>
-        </p:nvSpPr>
-        <p:spPr>
-          <a:xfrm>
-            <a:off x="375110" y="2276872"/>
-            <a:ext cx="7704856" cy="3888432"/>
-          </a:xfrm>
-          <a:prstGeom prst="rect">
-            <a:avLst/>
-          </a:prstGeom>
-        </p:spPr>
-        <p:txBody>
-          <a:bodyPr vert="horz" lIns="91440" tIns="45720" rIns="91440" bIns="45720" rtlCol="0">
-            <a:noAutofit/>
-          </a:bodyPr>
-          <a:lstStyle>
-            <a:lvl1pPr marL="342900" indent="-342900" algn="l" defTabSz="914400" rtl="0" eaLnBrk="1" latinLnBrk="0" hangingPunct="1">
-              <a:spcBef>
-                <a:spcPct val="20000"/>
-              </a:spcBef>
-              <a:buFont typeface="Arial" pitchFamily="34" charset="0"/>
-              <a:buChar char="•"/>
-              <a:defRPr sz="3200" kern="1200">
-                <a:solidFill>
-                  <a:schemeClr val="tx1"/>
-                </a:solidFill>
-                <a:latin typeface="+mn-lt"/>
-                <a:ea typeface="+mn-ea"/>
-                <a:cs typeface="+mn-cs"/>
-              </a:defRPr>
-            </a:lvl1pPr>
-            <a:lvl2pPr marL="742950" indent="-285750" algn="l" defTabSz="914400" rtl="0" eaLnBrk="1" latinLnBrk="0" hangingPunct="1">
-              <a:spcBef>
-                <a:spcPct val="20000"/>
-              </a:spcBef>
-              <a:buFont typeface="Arial" pitchFamily="34" charset="0"/>
-              <a:buChar char="–"/>
-              <a:defRPr sz="2800" kern="1200">
-                <a:solidFill>
-                  <a:schemeClr val="tx1"/>
-                </a:solidFill>
-                <a:latin typeface="+mn-lt"/>
-                <a:ea typeface="+mn-ea"/>
-                <a:cs typeface="+mn-cs"/>
-              </a:defRPr>
-            </a:lvl2pPr>
-            <a:lvl3pPr marL="1143000" indent="-228600" algn="l" defTabSz="914400" rtl="0" eaLnBrk="1" latinLnBrk="0" hangingPunct="1">
-              <a:spcBef>
-                <a:spcPct val="20000"/>
-              </a:spcBef>
-              <a:buFont typeface="Arial" pitchFamily="34" charset="0"/>
-              <a:buChar char="•"/>
-              <a:defRPr sz="2400" kern="1200">
-                <a:solidFill>
-                  <a:schemeClr val="tx1"/>
-                </a:solidFill>
-                <a:latin typeface="+mn-lt"/>
-                <a:ea typeface="+mn-ea"/>
-                <a:cs typeface="+mn-cs"/>
-              </a:defRPr>
-            </a:lvl3pPr>
-            <a:lvl4pPr marL="1600200" indent="-228600" algn="l" defTabSz="914400" rtl="0" eaLnBrk="1" latinLnBrk="0" hangingPunct="1">
-              <a:spcBef>
-                <a:spcPct val="20000"/>
-              </a:spcBef>
-              <a:buFont typeface="Arial" pitchFamily="34" charset="0"/>
-              <a:buChar char="–"/>
-              <a:defRPr sz="2000" kern="1200">
-                <a:solidFill>
-                  <a:schemeClr val="tx1"/>
-                </a:solidFill>
-                <a:latin typeface="+mn-lt"/>
-                <a:ea typeface="+mn-ea"/>
-                <a:cs typeface="+mn-cs"/>
-              </a:defRPr>
-            </a:lvl4pPr>
-            <a:lvl5pPr marL="2057400" indent="-228600" algn="l" defTabSz="914400" rtl="0" eaLnBrk="1" latinLnBrk="0" hangingPunct="1">
-              <a:spcBef>
-                <a:spcPct val="20000"/>
-              </a:spcBef>
-              <a:buFont typeface="Arial" pitchFamily="34" charset="0"/>
-              <a:buChar char="»"/>
-              <a:defRPr sz="2000" kern="1200">
-                <a:solidFill>
-                  <a:schemeClr val="tx1"/>
-                </a:solidFill>
-                <a:latin typeface="+mn-lt"/>
-                <a:ea typeface="+mn-ea"/>
-                <a:cs typeface="+mn-cs"/>
-              </a:defRPr>
-            </a:lvl5pPr>
-            <a:lvl6pPr marL="2514600" indent="-228600" algn="l" defTabSz="914400" rtl="0" eaLnBrk="1" latinLnBrk="0" hangingPunct="1">
-              <a:spcBef>
-                <a:spcPct val="20000"/>
-              </a:spcBef>
-              <a:buFont typeface="Arial" pitchFamily="34" charset="0"/>
-              <a:buChar char="•"/>
-              <a:defRPr sz="2000" kern="1200">
-                <a:solidFill>
-                  <a:schemeClr val="tx1"/>
-                </a:solidFill>
-                <a:latin typeface="+mn-lt"/>
-                <a:ea typeface="+mn-ea"/>
-                <a:cs typeface="+mn-cs"/>
-              </a:defRPr>
-            </a:lvl6pPr>
-            <a:lvl7pPr marL="2971800" indent="-228600" algn="l" defTabSz="914400" rtl="0" eaLnBrk="1" latinLnBrk="0" hangingPunct="1">
-              <a:spcBef>
-                <a:spcPct val="20000"/>
-              </a:spcBef>
-              <a:buFont typeface="Arial" pitchFamily="34" charset="0"/>
-              <a:buChar char="•"/>
-              <a:defRPr sz="2000" kern="1200">
-                <a:solidFill>
-                  <a:schemeClr val="tx1"/>
-                </a:solidFill>
-                <a:latin typeface="+mn-lt"/>
-                <a:ea typeface="+mn-ea"/>
-                <a:cs typeface="+mn-cs"/>
-              </a:defRPr>
-            </a:lvl7pPr>
-            <a:lvl8pPr marL="3429000" indent="-228600" algn="l" defTabSz="914400" rtl="0" eaLnBrk="1" latinLnBrk="0" hangingPunct="1">
-              <a:spcBef>
-                <a:spcPct val="20000"/>
-              </a:spcBef>
-              <a:buFont typeface="Arial" pitchFamily="34" charset="0"/>
-              <a:buChar char="•"/>
-              <a:defRPr sz="2000" kern="1200">
-                <a:solidFill>
-                  <a:schemeClr val="tx1"/>
-                </a:solidFill>
-                <a:latin typeface="+mn-lt"/>
-                <a:ea typeface="+mn-ea"/>
-                <a:cs typeface="+mn-cs"/>
-              </a:defRPr>
-            </a:lvl8pPr>
-            <a:lvl9pPr marL="3886200" indent="-228600" algn="l" defTabSz="914400" rtl="0" eaLnBrk="1" latinLnBrk="0" hangingPunct="1">
-              <a:spcBef>
-                <a:spcPct val="20000"/>
-              </a:spcBef>
-              <a:buFont typeface="Arial" pitchFamily="34" charset="0"/>
-              <a:buChar char="•"/>
-              <a:defRPr sz="2000" kern="1200">
-                <a:solidFill>
-                  <a:schemeClr val="tx1"/>
-                </a:solidFill>
-                <a:latin typeface="+mn-lt"/>
-                <a:ea typeface="+mn-ea"/>
-                <a:cs typeface="+mn-cs"/>
-              </a:defRPr>
-            </a:lvl9pPr>
-          </a:lstStyle>
-          <a:p>
-            <a:pPr marL="857250" lvl="1" indent="-457200" algn="just">
-              <a:lnSpc>
-                <a:spcPct val="120000"/>
-              </a:lnSpc>
-              <a:spcBef>
-                <a:spcPct val="0"/>
-              </a:spcBef>
-              <a:buFont typeface="+mj-lt"/>
-              <a:buAutoNum type="arabicPeriod" startAt="2"/>
-            </a:pPr>
-            <a:r>
-              <a:rPr lang="es-ES" sz="1800" dirty="0">
-                <a:solidFill>
-                  <a:schemeClr val="bg2">
-                    <a:lumMod val="25000"/>
-                  </a:schemeClr>
-                </a:solidFill>
-                <a:cs typeface="Arial" panose="020B0604020202020204" pitchFamily="34" charset="0"/>
-              </a:rPr>
-              <a:t>La función </a:t>
-            </a:r>
-            <a:r>
-              <a:rPr lang="es-ES" sz="1800" b="1" dirty="0" err="1">
-                <a:solidFill>
-                  <a:srgbClr val="FF0000"/>
-                </a:solidFill>
-                <a:cs typeface="Arial" panose="020B0604020202020204" pitchFamily="34" charset="0"/>
-              </a:rPr>
-              <a:t>main</a:t>
-            </a:r>
-            <a:r>
-              <a:rPr lang="es-ES" sz="1800" b="1" dirty="0">
-                <a:solidFill>
-                  <a:srgbClr val="FF0000"/>
-                </a:solidFill>
-                <a:cs typeface="Arial" panose="020B0604020202020204" pitchFamily="34" charset="0"/>
-              </a:rPr>
-              <a:t> </a:t>
-            </a:r>
-            <a:r>
-              <a:rPr lang="es-ES" sz="1800" dirty="0">
-                <a:solidFill>
-                  <a:schemeClr val="bg2">
-                    <a:lumMod val="25000"/>
-                  </a:schemeClr>
-                </a:solidFill>
-                <a:cs typeface="Arial" panose="020B0604020202020204" pitchFamily="34" charset="0"/>
-              </a:rPr>
-              <a:t>debe:</a:t>
-            </a:r>
-          </a:p>
-          <a:p>
-            <a:pPr marL="1257300" lvl="2" indent="-457200" algn="just">
-              <a:lnSpc>
-                <a:spcPct val="120000"/>
-              </a:lnSpc>
-              <a:spcBef>
-                <a:spcPct val="0"/>
-              </a:spcBef>
-            </a:pPr>
-            <a:r>
-              <a:rPr lang="es-ES" sz="1800" dirty="0">
-                <a:solidFill>
-                  <a:schemeClr val="bg2">
-                    <a:lumMod val="25000"/>
-                  </a:schemeClr>
-                </a:solidFill>
-                <a:cs typeface="Arial" panose="020B0604020202020204" pitchFamily="34" charset="0"/>
-              </a:rPr>
-              <a:t>Utilizar la función </a:t>
-            </a:r>
-            <a:r>
-              <a:rPr lang="es-ES" sz="1800" b="1" dirty="0" err="1">
-                <a:solidFill>
-                  <a:srgbClr val="FF0000"/>
-                </a:solidFill>
-                <a:cs typeface="Arial" panose="020B0604020202020204" pitchFamily="34" charset="0"/>
-              </a:rPr>
-              <a:t>comprueba_clave</a:t>
-            </a:r>
-            <a:r>
-              <a:rPr lang="es-ES" sz="1800" b="1" dirty="0">
-                <a:solidFill>
-                  <a:srgbClr val="FF0000"/>
-                </a:solidFill>
-                <a:cs typeface="Arial" panose="020B0604020202020204" pitchFamily="34" charset="0"/>
-              </a:rPr>
-              <a:t> </a:t>
-            </a:r>
-            <a:r>
-              <a:rPr lang="es-ES" sz="1800" dirty="0">
-                <a:solidFill>
-                  <a:schemeClr val="bg2">
-                    <a:lumMod val="25000"/>
-                  </a:schemeClr>
-                </a:solidFill>
-                <a:cs typeface="Arial" panose="020B0604020202020204" pitchFamily="34" charset="0"/>
-              </a:rPr>
-              <a:t>antes de ejecutar el </a:t>
-            </a:r>
-            <a:r>
-              <a:rPr lang="es-ES" sz="1800" dirty="0" err="1">
-                <a:solidFill>
-                  <a:schemeClr val="bg2">
-                    <a:lumMod val="25000"/>
-                  </a:schemeClr>
-                </a:solidFill>
-                <a:cs typeface="Arial" panose="020B0604020202020204" pitchFamily="34" charset="0"/>
-              </a:rPr>
-              <a:t>while</a:t>
-            </a:r>
-            <a:r>
-              <a:rPr lang="es-ES" sz="1800" dirty="0">
-                <a:solidFill>
-                  <a:schemeClr val="bg2">
-                    <a:lumMod val="25000"/>
-                  </a:schemeClr>
-                </a:solidFill>
-                <a:cs typeface="Arial" panose="020B0604020202020204" pitchFamily="34" charset="0"/>
-              </a:rPr>
-              <a:t>.</a:t>
-            </a:r>
-            <a:endParaRPr lang="es-MX" sz="1800" dirty="0">
-              <a:solidFill>
-                <a:schemeClr val="bg2">
-                  <a:lumMod val="25000"/>
-                </a:schemeClr>
-              </a:solidFill>
-              <a:cs typeface="Arial" panose="020B0604020202020204" pitchFamily="34" charset="0"/>
-            </a:endParaRPr>
-          </a:p>
-        </p:txBody>
-      </p:sp>
-      <p:sp>
-        <p:nvSpPr>
-          <p:cNvPr id="4" name="Rectángulo 3">
-            <a:extLst>
-              <a:ext uri="{FF2B5EF4-FFF2-40B4-BE49-F238E27FC236}">
-                <a16:creationId xmlns:a16="http://schemas.microsoft.com/office/drawing/2014/main" id="{46A05029-210E-4B5F-9B92-CBFAF670F8BF}"/>
-              </a:ext>
-            </a:extLst>
-          </p:cNvPr>
-          <p:cNvSpPr/>
-          <p:nvPr/>
-        </p:nvSpPr>
-        <p:spPr>
-          <a:xfrm>
-            <a:off x="1691680" y="4331531"/>
-            <a:ext cx="3024336" cy="288032"/>
-          </a:xfrm>
-          <a:prstGeom prst="rect">
-            <a:avLst/>
-          </a:prstGeom>
-          <a:noFill/>
-          <a:ln>
-            <a:solidFill>
-              <a:srgbClr val="FF0000"/>
-            </a:solidFill>
-          </a:ln>
-        </p:spPr>
-        <p:style>
-          <a:lnRef idx="2">
-            <a:schemeClr val="accent1">
-              <a:shade val="50000"/>
-            </a:schemeClr>
-          </a:lnRef>
-          <a:fillRef idx="1">
-            <a:schemeClr val="accent1"/>
-          </a:fillRef>
-          <a:effectRef idx="0">
-            <a:schemeClr val="accent1"/>
-          </a:effectRef>
-          <a:fontRef idx="minor">
-            <a:schemeClr val="lt1"/>
-          </a:fontRef>
-        </p:style>
-        <p:txBody>
-          <a:bodyPr rtlCol="0" anchor="ctr"/>
-          <a:lstStyle/>
-          <a:p>
-            <a:pPr algn="ctr"/>
-            <a:endParaRPr lang="es-MX"/>
-          </a:p>
-        </p:txBody>
-      </p:sp>
-    </p:spTree>
-    <p:extLst>
-      <p:ext uri="{BB962C8B-B14F-4D97-AF65-F5344CB8AC3E}">
-        <p14:creationId xmlns:p14="http://schemas.microsoft.com/office/powerpoint/2010/main" val="3526004009"/>
-      </p:ext>
-    </p:extLst>
-  </p:cSld>
-  <p:clrMapOvr>
-    <a:masterClrMapping/>
-  </p:clrMapOvr>
-</p:sld>
-</file>
-
-<file path=ppt/slides/slide13.xml><?xml version="1.0" encoding="utf-8"?>
-<p:sld xmlns:a="http://schemas.openxmlformats.org/drawingml/2006/main" xmlns:r="http://schemas.openxmlformats.org/officeDocument/2006/relationships" xmlns:p="http://schemas.openxmlformats.org/presentationml/2006/main">
-  <p:cSld>
-    <p:spTree>
-      <p:nvGrpSpPr>
-        <p:cNvPr id="1" name=""/>
-        <p:cNvGrpSpPr/>
-        <p:nvPr/>
-      </p:nvGrpSpPr>
-      <p:grpSpPr>
-        <a:xfrm>
-          <a:off x="0" y="0"/>
-          <a:ext cx="0" cy="0"/>
-          <a:chOff x="0" y="0"/>
-          <a:chExt cx="0" cy="0"/>
-        </a:xfrm>
-      </p:grpSpPr>
-      <p:pic>
-        <p:nvPicPr>
-          <p:cNvPr id="7" name="Imagen 6">
-            <a:extLst>
-              <a:ext uri="{FF2B5EF4-FFF2-40B4-BE49-F238E27FC236}">
-                <a16:creationId xmlns:a16="http://schemas.microsoft.com/office/drawing/2014/main" id="{2486E100-1E06-4599-A3D1-AB589175A86A}"/>
-              </a:ext>
-            </a:extLst>
-          </p:cNvPr>
-          <p:cNvPicPr>
-            <a:picLocks noChangeAspect="1"/>
-          </p:cNvPicPr>
-          <p:nvPr/>
-        </p:nvPicPr>
-        <p:blipFill>
-          <a:blip r:embed="rId2"/>
-          <a:stretch>
-            <a:fillRect/>
-          </a:stretch>
-        </p:blipFill>
-        <p:spPr>
-          <a:xfrm>
-            <a:off x="5796136" y="4221088"/>
-            <a:ext cx="2266950" cy="1876425"/>
-          </a:xfrm>
-          <a:prstGeom prst="rect">
-            <a:avLst/>
-          </a:prstGeom>
-        </p:spPr>
-      </p:pic>
-      <p:sp>
-        <p:nvSpPr>
-          <p:cNvPr id="184324" name="Rectangle 4"/>
-          <p:cNvSpPr>
-            <a:spLocks noGrp="1" noChangeArrowheads="1"/>
-          </p:cNvSpPr>
-          <p:nvPr>
-            <p:ph type="title"/>
-          </p:nvPr>
-        </p:nvSpPr>
-        <p:spPr>
-          <a:xfrm>
-            <a:off x="457200" y="234119"/>
-            <a:ext cx="8229600" cy="1143000"/>
-          </a:xfrm>
-        </p:spPr>
-        <p:txBody>
-          <a:bodyPr>
-            <a:normAutofit fontScale="90000"/>
-          </a:bodyPr>
-          <a:lstStyle/>
-          <a:p>
-            <a:pPr eaLnBrk="1" hangingPunct="1">
-              <a:defRPr/>
-            </a:pPr>
-            <a:r>
-              <a:rPr lang="es-MX" b="1" dirty="0">
-                <a:solidFill>
-                  <a:schemeClr val="accent4">
-                    <a:lumMod val="50000"/>
-                  </a:schemeClr>
-                </a:solidFill>
-                <a:effectLst>
-                  <a:outerShdw blurRad="38100" dist="38100" dir="2700000" algn="tl">
-                    <a:srgbClr val="C0C0C0"/>
-                  </a:outerShdw>
-                </a:effectLst>
-                <a:latin typeface="Dom Casual" charset="0"/>
-              </a:rPr>
-              <a:t>Situación problema</a:t>
-            </a:r>
-            <a:br>
-              <a:rPr lang="es-MX" b="1" dirty="0">
-                <a:solidFill>
-                  <a:schemeClr val="accent4">
-                    <a:lumMod val="50000"/>
-                  </a:schemeClr>
-                </a:solidFill>
-                <a:effectLst>
-                  <a:outerShdw blurRad="38100" dist="38100" dir="2700000" algn="tl">
-                    <a:srgbClr val="C0C0C0"/>
-                  </a:outerShdw>
-                </a:effectLst>
-                <a:latin typeface="Dom Casual" charset="0"/>
-              </a:rPr>
-            </a:br>
-            <a:r>
-              <a:rPr lang="es-MX" sz="3100" dirty="0">
-                <a:solidFill>
-                  <a:schemeClr val="accent6">
-                    <a:lumMod val="75000"/>
-                  </a:schemeClr>
-                </a:solidFill>
-                <a:effectLst>
-                  <a:outerShdw blurRad="38100" dist="38100" dir="2700000" algn="tl">
-                    <a:srgbClr val="C0C0C0"/>
-                  </a:outerShdw>
-                </a:effectLst>
-                <a:latin typeface="Dom Casual" charset="0"/>
-              </a:rPr>
-              <a:t>Función comprueba clave</a:t>
-            </a:r>
-          </a:p>
-        </p:txBody>
-      </p:sp>
-      <p:sp>
-        <p:nvSpPr>
-          <p:cNvPr id="5" name="Rectangle 2">
-            <a:extLst>
-              <a:ext uri="{FF2B5EF4-FFF2-40B4-BE49-F238E27FC236}">
-                <a16:creationId xmlns:a16="http://schemas.microsoft.com/office/drawing/2014/main" id="{320E9E94-35B1-4964-BB02-8EA246862BDF}"/>
-              </a:ext>
-            </a:extLst>
-          </p:cNvPr>
-          <p:cNvSpPr txBox="1">
-            <a:spLocks noChangeArrowheads="1"/>
-          </p:cNvSpPr>
-          <p:nvPr/>
-        </p:nvSpPr>
-        <p:spPr>
-          <a:xfrm>
-            <a:off x="671911" y="1916832"/>
-            <a:ext cx="7800178" cy="3789548"/>
-          </a:xfrm>
-          <a:prstGeom prst="rect">
-            <a:avLst/>
-          </a:prstGeom>
-        </p:spPr>
-        <p:txBody>
-          <a:bodyPr vert="horz" lIns="91440" tIns="45720" rIns="91440" bIns="45720" rtlCol="0">
-            <a:noAutofit/>
-          </a:bodyPr>
-          <a:lstStyle>
-            <a:lvl1pPr marL="342900" indent="-342900" algn="l" defTabSz="914400" rtl="0" eaLnBrk="1" latinLnBrk="0" hangingPunct="1">
-              <a:spcBef>
-                <a:spcPct val="20000"/>
-              </a:spcBef>
-              <a:buFont typeface="Arial" pitchFamily="34" charset="0"/>
-              <a:buChar char="•"/>
-              <a:defRPr sz="3200" kern="1200">
-                <a:solidFill>
-                  <a:schemeClr val="tx1"/>
-                </a:solidFill>
-                <a:latin typeface="+mn-lt"/>
-                <a:ea typeface="+mn-ea"/>
-                <a:cs typeface="+mn-cs"/>
-              </a:defRPr>
-            </a:lvl1pPr>
-            <a:lvl2pPr marL="742950" indent="-285750" algn="l" defTabSz="914400" rtl="0" eaLnBrk="1" latinLnBrk="0" hangingPunct="1">
-              <a:spcBef>
-                <a:spcPct val="20000"/>
-              </a:spcBef>
-              <a:buFont typeface="Arial" pitchFamily="34" charset="0"/>
-              <a:buChar char="–"/>
-              <a:defRPr sz="2800" kern="1200">
-                <a:solidFill>
-                  <a:schemeClr val="tx1"/>
-                </a:solidFill>
-                <a:latin typeface="+mn-lt"/>
-                <a:ea typeface="+mn-ea"/>
-                <a:cs typeface="+mn-cs"/>
-              </a:defRPr>
-            </a:lvl2pPr>
-            <a:lvl3pPr marL="1143000" indent="-228600" algn="l" defTabSz="914400" rtl="0" eaLnBrk="1" latinLnBrk="0" hangingPunct="1">
-              <a:spcBef>
-                <a:spcPct val="20000"/>
-              </a:spcBef>
-              <a:buFont typeface="Arial" pitchFamily="34" charset="0"/>
-              <a:buChar char="•"/>
-              <a:defRPr sz="2400" kern="1200">
-                <a:solidFill>
-                  <a:schemeClr val="tx1"/>
-                </a:solidFill>
-                <a:latin typeface="+mn-lt"/>
-                <a:ea typeface="+mn-ea"/>
-                <a:cs typeface="+mn-cs"/>
-              </a:defRPr>
-            </a:lvl3pPr>
-            <a:lvl4pPr marL="1600200" indent="-228600" algn="l" defTabSz="914400" rtl="0" eaLnBrk="1" latinLnBrk="0" hangingPunct="1">
-              <a:spcBef>
-                <a:spcPct val="20000"/>
-              </a:spcBef>
-              <a:buFont typeface="Arial" pitchFamily="34" charset="0"/>
-              <a:buChar char="–"/>
-              <a:defRPr sz="2000" kern="1200">
-                <a:solidFill>
-                  <a:schemeClr val="tx1"/>
-                </a:solidFill>
-                <a:latin typeface="+mn-lt"/>
-                <a:ea typeface="+mn-ea"/>
-                <a:cs typeface="+mn-cs"/>
-              </a:defRPr>
-            </a:lvl4pPr>
-            <a:lvl5pPr marL="2057400" indent="-228600" algn="l" defTabSz="914400" rtl="0" eaLnBrk="1" latinLnBrk="0" hangingPunct="1">
-              <a:spcBef>
-                <a:spcPct val="20000"/>
-              </a:spcBef>
-              <a:buFont typeface="Arial" pitchFamily="34" charset="0"/>
-              <a:buChar char="»"/>
-              <a:defRPr sz="2000" kern="1200">
-                <a:solidFill>
-                  <a:schemeClr val="tx1"/>
-                </a:solidFill>
-                <a:latin typeface="+mn-lt"/>
-                <a:ea typeface="+mn-ea"/>
-                <a:cs typeface="+mn-cs"/>
-              </a:defRPr>
-            </a:lvl5pPr>
-            <a:lvl6pPr marL="2514600" indent="-228600" algn="l" defTabSz="914400" rtl="0" eaLnBrk="1" latinLnBrk="0" hangingPunct="1">
-              <a:spcBef>
-                <a:spcPct val="20000"/>
-              </a:spcBef>
-              <a:buFont typeface="Arial" pitchFamily="34" charset="0"/>
-              <a:buChar char="•"/>
-              <a:defRPr sz="2000" kern="1200">
-                <a:solidFill>
-                  <a:schemeClr val="tx1"/>
-                </a:solidFill>
-                <a:latin typeface="+mn-lt"/>
-                <a:ea typeface="+mn-ea"/>
-                <a:cs typeface="+mn-cs"/>
-              </a:defRPr>
-            </a:lvl6pPr>
-            <a:lvl7pPr marL="2971800" indent="-228600" algn="l" defTabSz="914400" rtl="0" eaLnBrk="1" latinLnBrk="0" hangingPunct="1">
-              <a:spcBef>
-                <a:spcPct val="20000"/>
-              </a:spcBef>
-              <a:buFont typeface="Arial" pitchFamily="34" charset="0"/>
-              <a:buChar char="•"/>
-              <a:defRPr sz="2000" kern="1200">
-                <a:solidFill>
-                  <a:schemeClr val="tx1"/>
-                </a:solidFill>
-                <a:latin typeface="+mn-lt"/>
-                <a:ea typeface="+mn-ea"/>
-                <a:cs typeface="+mn-cs"/>
-              </a:defRPr>
-            </a:lvl7pPr>
-            <a:lvl8pPr marL="3429000" indent="-228600" algn="l" defTabSz="914400" rtl="0" eaLnBrk="1" latinLnBrk="0" hangingPunct="1">
-              <a:spcBef>
-                <a:spcPct val="20000"/>
-              </a:spcBef>
-              <a:buFont typeface="Arial" pitchFamily="34" charset="0"/>
-              <a:buChar char="•"/>
-              <a:defRPr sz="2000" kern="1200">
-                <a:solidFill>
-                  <a:schemeClr val="tx1"/>
-                </a:solidFill>
-                <a:latin typeface="+mn-lt"/>
-                <a:ea typeface="+mn-ea"/>
-                <a:cs typeface="+mn-cs"/>
-              </a:defRPr>
-            </a:lvl8pPr>
-            <a:lvl9pPr marL="3886200" indent="-228600" algn="l" defTabSz="914400" rtl="0" eaLnBrk="1" latinLnBrk="0" hangingPunct="1">
-              <a:spcBef>
-                <a:spcPct val="20000"/>
-              </a:spcBef>
-              <a:buFont typeface="Arial" pitchFamily="34" charset="0"/>
-              <a:buChar char="•"/>
-              <a:defRPr sz="2000" kern="1200">
-                <a:solidFill>
-                  <a:schemeClr val="tx1"/>
-                </a:solidFill>
-                <a:latin typeface="+mn-lt"/>
-                <a:ea typeface="+mn-ea"/>
-                <a:cs typeface="+mn-cs"/>
-              </a:defRPr>
-            </a:lvl9pPr>
-          </a:lstStyle>
-          <a:p>
-            <a:pPr marL="0" lvl="1" indent="0" algn="just">
-              <a:lnSpc>
-                <a:spcPct val="150000"/>
-              </a:lnSpc>
-              <a:spcBef>
-                <a:spcPct val="0"/>
-              </a:spcBef>
-              <a:buNone/>
-            </a:pPr>
-            <a:r>
-              <a:rPr lang="es-MX" sz="1600" dirty="0">
-                <a:solidFill>
-                  <a:schemeClr val="bg2">
-                    <a:lumMod val="25000"/>
-                  </a:schemeClr>
-                </a:solidFill>
-                <a:latin typeface="Arial" pitchFamily="34" charset="0"/>
-                <a:cs typeface="Arial" pitchFamily="34" charset="0"/>
-              </a:rPr>
-              <a:t>Escribe la función </a:t>
-            </a:r>
-            <a:r>
-              <a:rPr lang="es-MX" sz="1600" b="1" dirty="0" err="1">
-                <a:solidFill>
-                  <a:srgbClr val="FF0000"/>
-                </a:solidFill>
-                <a:latin typeface="Arial" pitchFamily="34" charset="0"/>
-                <a:cs typeface="Arial" pitchFamily="34" charset="0"/>
-              </a:rPr>
-              <a:t>comprueba_clave</a:t>
-            </a:r>
-            <a:r>
-              <a:rPr lang="es-MX" sz="1600" b="1" dirty="0">
-                <a:solidFill>
-                  <a:srgbClr val="FF0000"/>
-                </a:solidFill>
-                <a:latin typeface="Arial" pitchFamily="34" charset="0"/>
-                <a:cs typeface="Arial" pitchFamily="34" charset="0"/>
-              </a:rPr>
-              <a:t>(</a:t>
-            </a:r>
-            <a:r>
-              <a:rPr lang="es-MX" sz="1600" b="1" dirty="0" err="1">
-                <a:solidFill>
-                  <a:srgbClr val="FF0000"/>
-                </a:solidFill>
-                <a:latin typeface="Arial" pitchFamily="34" charset="0"/>
-                <a:cs typeface="Arial" pitchFamily="34" charset="0"/>
-              </a:rPr>
-              <a:t>password</a:t>
-            </a:r>
-            <a:r>
-              <a:rPr lang="es-MX" sz="1600" b="1" dirty="0">
-                <a:solidFill>
-                  <a:srgbClr val="FF0000"/>
-                </a:solidFill>
-                <a:latin typeface="Arial" pitchFamily="34" charset="0"/>
-                <a:cs typeface="Arial" pitchFamily="34" charset="0"/>
-              </a:rPr>
-              <a:t>)</a:t>
-            </a:r>
-            <a:r>
-              <a:rPr lang="es-MX" sz="1600" dirty="0">
-                <a:solidFill>
-                  <a:schemeClr val="bg2">
-                    <a:lumMod val="25000"/>
-                  </a:schemeClr>
-                </a:solidFill>
-                <a:latin typeface="Arial" pitchFamily="34" charset="0"/>
-                <a:cs typeface="Arial" pitchFamily="34" charset="0"/>
-              </a:rPr>
-              <a:t>, que recibe el </a:t>
-            </a:r>
-            <a:r>
-              <a:rPr lang="es-MX" sz="1600" dirty="0" err="1">
-                <a:solidFill>
-                  <a:schemeClr val="bg2">
-                    <a:lumMod val="25000"/>
-                  </a:schemeClr>
-                </a:solidFill>
-                <a:latin typeface="Arial" pitchFamily="34" charset="0"/>
-                <a:cs typeface="Arial" pitchFamily="34" charset="0"/>
-              </a:rPr>
-              <a:t>password</a:t>
-            </a:r>
-            <a:r>
-              <a:rPr lang="es-MX" sz="1600" dirty="0">
-                <a:solidFill>
-                  <a:schemeClr val="bg2">
-                    <a:lumMod val="25000"/>
-                  </a:schemeClr>
-                </a:solidFill>
-                <a:latin typeface="Arial" pitchFamily="34" charset="0"/>
-                <a:cs typeface="Arial" pitchFamily="34" charset="0"/>
-              </a:rPr>
-              <a:t> permitido.</a:t>
-            </a:r>
-          </a:p>
-          <a:p>
-            <a:pPr marL="0" lvl="1" indent="0" algn="just">
-              <a:lnSpc>
-                <a:spcPct val="150000"/>
-              </a:lnSpc>
-              <a:spcBef>
-                <a:spcPct val="0"/>
-              </a:spcBef>
-              <a:buNone/>
-            </a:pPr>
-            <a:r>
-              <a:rPr lang="es-MX" sz="1600" dirty="0">
-                <a:solidFill>
-                  <a:schemeClr val="bg2">
-                    <a:lumMod val="25000"/>
-                  </a:schemeClr>
-                </a:solidFill>
-                <a:latin typeface="Arial" pitchFamily="34" charset="0"/>
-                <a:cs typeface="Arial" pitchFamily="34" charset="0"/>
-              </a:rPr>
-              <a:t>La función debe:</a:t>
-            </a:r>
-          </a:p>
-          <a:p>
-            <a:pPr marL="342900" lvl="1" indent="-342900" algn="just">
-              <a:lnSpc>
-                <a:spcPct val="150000"/>
-              </a:lnSpc>
-              <a:spcBef>
-                <a:spcPct val="0"/>
-              </a:spcBef>
-              <a:buFont typeface="+mj-lt"/>
-              <a:buAutoNum type="arabicPeriod"/>
-            </a:pPr>
-            <a:r>
-              <a:rPr lang="es-MX" sz="1600" dirty="0">
-                <a:solidFill>
-                  <a:schemeClr val="bg2">
-                    <a:lumMod val="25000"/>
-                  </a:schemeClr>
-                </a:solidFill>
-                <a:latin typeface="Arial" pitchFamily="34" charset="0"/>
-                <a:cs typeface="Arial" pitchFamily="34" charset="0"/>
-              </a:rPr>
-              <a:t>Pedir la </a:t>
-            </a:r>
-            <a:r>
-              <a:rPr lang="es-MX" sz="1600" b="1" dirty="0">
-                <a:solidFill>
-                  <a:schemeClr val="accent6">
-                    <a:lumMod val="75000"/>
-                  </a:schemeClr>
-                </a:solidFill>
-                <a:latin typeface="Arial" pitchFamily="34" charset="0"/>
-                <a:cs typeface="Arial" pitchFamily="34" charset="0"/>
-              </a:rPr>
-              <a:t>clave</a:t>
-            </a:r>
-            <a:r>
-              <a:rPr lang="es-MX" sz="1600" dirty="0">
-                <a:solidFill>
-                  <a:schemeClr val="bg2">
-                    <a:lumMod val="25000"/>
-                  </a:schemeClr>
-                </a:solidFill>
-                <a:latin typeface="Arial" pitchFamily="34" charset="0"/>
-                <a:cs typeface="Arial" pitchFamily="34" charset="0"/>
-              </a:rPr>
-              <a:t>.</a:t>
-            </a:r>
-          </a:p>
-          <a:p>
-            <a:pPr marL="342900" lvl="1" indent="-342900" algn="just">
-              <a:lnSpc>
-                <a:spcPct val="150000"/>
-              </a:lnSpc>
-              <a:spcBef>
-                <a:spcPct val="0"/>
-              </a:spcBef>
-              <a:buFont typeface="+mj-lt"/>
-              <a:buAutoNum type="arabicPeriod"/>
-            </a:pPr>
-            <a:r>
-              <a:rPr lang="es-MX" sz="1600" dirty="0">
-                <a:solidFill>
-                  <a:schemeClr val="bg2">
-                    <a:lumMod val="25000"/>
-                  </a:schemeClr>
-                </a:solidFill>
-                <a:latin typeface="Arial" pitchFamily="34" charset="0"/>
-                <a:cs typeface="Arial" pitchFamily="34" charset="0"/>
-              </a:rPr>
-              <a:t>Mediante un ciclo </a:t>
-            </a:r>
-            <a:r>
-              <a:rPr lang="es-MX" sz="1600" dirty="0" err="1">
-                <a:solidFill>
-                  <a:schemeClr val="bg2">
-                    <a:lumMod val="25000"/>
-                  </a:schemeClr>
-                </a:solidFill>
-                <a:latin typeface="Arial" pitchFamily="34" charset="0"/>
-                <a:cs typeface="Arial" pitchFamily="34" charset="0"/>
-              </a:rPr>
-              <a:t>while</a:t>
-            </a:r>
-            <a:r>
-              <a:rPr lang="es-MX" sz="1600" dirty="0">
-                <a:solidFill>
-                  <a:schemeClr val="bg2">
-                    <a:lumMod val="25000"/>
-                  </a:schemeClr>
-                </a:solidFill>
-                <a:latin typeface="Arial" pitchFamily="34" charset="0"/>
-                <a:cs typeface="Arial" pitchFamily="34" charset="0"/>
-              </a:rPr>
-              <a:t>, mientras la </a:t>
-            </a:r>
-            <a:r>
-              <a:rPr lang="es-MX" sz="1600" b="1" dirty="0">
-                <a:solidFill>
-                  <a:schemeClr val="accent6">
-                    <a:lumMod val="75000"/>
-                  </a:schemeClr>
-                </a:solidFill>
-                <a:latin typeface="Arial" pitchFamily="34" charset="0"/>
-                <a:cs typeface="Arial" pitchFamily="34" charset="0"/>
-              </a:rPr>
-              <a:t>clave </a:t>
-            </a:r>
-            <a:r>
-              <a:rPr lang="es-MX" sz="1600" dirty="0">
-                <a:solidFill>
-                  <a:schemeClr val="bg2">
-                    <a:lumMod val="25000"/>
-                  </a:schemeClr>
-                </a:solidFill>
-                <a:latin typeface="Arial" pitchFamily="34" charset="0"/>
-                <a:cs typeface="Arial" pitchFamily="34" charset="0"/>
-              </a:rPr>
-              <a:t>sea diferente al </a:t>
-            </a:r>
-            <a:r>
-              <a:rPr lang="es-MX" sz="1600" b="1" dirty="0" err="1">
-                <a:solidFill>
-                  <a:schemeClr val="accent6">
-                    <a:lumMod val="75000"/>
-                  </a:schemeClr>
-                </a:solidFill>
-                <a:latin typeface="Arial" pitchFamily="34" charset="0"/>
-                <a:cs typeface="Arial" pitchFamily="34" charset="0"/>
-              </a:rPr>
-              <a:t>password</a:t>
-            </a:r>
-            <a:r>
-              <a:rPr lang="es-MX" sz="1600" dirty="0">
-                <a:solidFill>
-                  <a:schemeClr val="bg2">
-                    <a:lumMod val="25000"/>
-                  </a:schemeClr>
-                </a:solidFill>
-                <a:latin typeface="Arial" pitchFamily="34" charset="0"/>
-                <a:cs typeface="Arial" pitchFamily="34" charset="0"/>
-              </a:rPr>
-              <a:t>: </a:t>
-            </a:r>
-          </a:p>
-          <a:p>
-            <a:pPr marL="742950" lvl="2" indent="-342900" algn="just">
-              <a:lnSpc>
-                <a:spcPct val="150000"/>
-              </a:lnSpc>
-              <a:spcBef>
-                <a:spcPct val="0"/>
-              </a:spcBef>
-            </a:pPr>
-            <a:r>
-              <a:rPr lang="es-MX" sz="1600" dirty="0">
-                <a:solidFill>
-                  <a:schemeClr val="bg2">
-                    <a:lumMod val="25000"/>
-                  </a:schemeClr>
-                </a:solidFill>
-                <a:latin typeface="Arial" pitchFamily="34" charset="0"/>
-                <a:cs typeface="Arial" pitchFamily="34" charset="0"/>
-              </a:rPr>
-              <a:t>Imprimir </a:t>
-            </a:r>
-            <a:r>
-              <a:rPr lang="es-MX" sz="1600" b="1" dirty="0">
-                <a:solidFill>
-                  <a:schemeClr val="bg2">
-                    <a:lumMod val="25000"/>
-                  </a:schemeClr>
-                </a:solidFill>
-                <a:latin typeface="Arial" pitchFamily="34" charset="0"/>
-                <a:cs typeface="Arial" pitchFamily="34" charset="0"/>
-              </a:rPr>
-              <a:t>"Intenta de nuevo, introduce tu clave de acceso".</a:t>
-            </a:r>
-          </a:p>
-          <a:p>
-            <a:pPr marL="742950" lvl="2" indent="-342900" algn="just">
-              <a:lnSpc>
-                <a:spcPct val="150000"/>
-              </a:lnSpc>
-              <a:spcBef>
-                <a:spcPct val="0"/>
-              </a:spcBef>
-            </a:pPr>
-            <a:r>
-              <a:rPr lang="es-MX" sz="1600" dirty="0">
-                <a:solidFill>
-                  <a:schemeClr val="bg2">
-                    <a:lumMod val="25000"/>
-                  </a:schemeClr>
-                </a:solidFill>
-                <a:latin typeface="Arial" pitchFamily="34" charset="0"/>
-                <a:cs typeface="Arial" pitchFamily="34" charset="0"/>
-              </a:rPr>
-              <a:t>Pedir la </a:t>
-            </a:r>
-            <a:r>
-              <a:rPr lang="es-MX" sz="1600" b="1" dirty="0">
-                <a:solidFill>
-                  <a:schemeClr val="accent6">
-                    <a:lumMod val="75000"/>
-                  </a:schemeClr>
-                </a:solidFill>
-                <a:latin typeface="Arial" pitchFamily="34" charset="0"/>
-                <a:cs typeface="Arial" pitchFamily="34" charset="0"/>
-              </a:rPr>
-              <a:t>clave</a:t>
-            </a:r>
-            <a:r>
-              <a:rPr lang="es-MX" sz="1600" dirty="0">
-                <a:solidFill>
-                  <a:schemeClr val="bg2">
-                    <a:lumMod val="25000"/>
-                  </a:schemeClr>
-                </a:solidFill>
-                <a:latin typeface="Arial" pitchFamily="34" charset="0"/>
-                <a:cs typeface="Arial" pitchFamily="34" charset="0"/>
-              </a:rPr>
-              <a:t>.</a:t>
-            </a:r>
-          </a:p>
-          <a:p>
-            <a:pPr marL="342900" lvl="1" indent="-342900" algn="just">
-              <a:lnSpc>
-                <a:spcPct val="150000"/>
-              </a:lnSpc>
-              <a:spcBef>
-                <a:spcPct val="0"/>
-              </a:spcBef>
-              <a:buFont typeface="+mj-lt"/>
-              <a:buAutoNum type="arabicPeriod"/>
-            </a:pPr>
-            <a:r>
-              <a:rPr lang="es-MX" sz="1600" dirty="0">
-                <a:solidFill>
-                  <a:schemeClr val="bg2">
-                    <a:lumMod val="25000"/>
-                  </a:schemeClr>
-                </a:solidFill>
-                <a:latin typeface="Arial" pitchFamily="34" charset="0"/>
-                <a:cs typeface="Arial" pitchFamily="34" charset="0"/>
-              </a:rPr>
-              <a:t>Al final de tu función, imprime </a:t>
-            </a:r>
-            <a:r>
-              <a:rPr lang="es-MX" sz="1600" b="1" dirty="0">
-                <a:solidFill>
-                  <a:schemeClr val="bg2">
-                    <a:lumMod val="25000"/>
-                  </a:schemeClr>
-                </a:solidFill>
-                <a:latin typeface="Arial" pitchFamily="34" charset="0"/>
-                <a:cs typeface="Arial" pitchFamily="34" charset="0"/>
-              </a:rPr>
-              <a:t>“Bienvenido”.</a:t>
-            </a:r>
-            <a:endParaRPr lang="es-MX" sz="1600" dirty="0">
-              <a:solidFill>
-                <a:schemeClr val="bg2">
-                  <a:lumMod val="25000"/>
-                </a:schemeClr>
-              </a:solidFill>
-              <a:latin typeface="Arial" pitchFamily="34" charset="0"/>
-              <a:cs typeface="Arial" pitchFamily="34" charset="0"/>
-            </a:endParaRPr>
-          </a:p>
-          <a:p>
-            <a:pPr marL="400050" lvl="1" indent="0" algn="just">
-              <a:spcBef>
-                <a:spcPct val="0"/>
-              </a:spcBef>
-              <a:buFont typeface="Arial" pitchFamily="34" charset="0"/>
-              <a:buNone/>
-            </a:pPr>
-            <a:endParaRPr lang="es-MX" sz="2400" dirty="0">
-              <a:solidFill>
-                <a:schemeClr val="bg2">
-                  <a:lumMod val="25000"/>
-                </a:schemeClr>
-              </a:solidFill>
-              <a:cs typeface="Arial" panose="020B0604020202020204" pitchFamily="34" charset="0"/>
-            </a:endParaRPr>
-          </a:p>
-        </p:txBody>
-      </p:sp>
-    </p:spTree>
-    <p:extLst>
-      <p:ext uri="{BB962C8B-B14F-4D97-AF65-F5344CB8AC3E}">
-        <p14:creationId xmlns:p14="http://schemas.microsoft.com/office/powerpoint/2010/main" val="2650679"/>
-      </p:ext>
-    </p:extLst>
-  </p:cSld>
-  <p:clrMapOvr>
-    <a:masterClrMapping/>
-  </p:clrMapOvr>
-</p:sld>
-</file>
-
-<file path=ppt/slides/slide14.xml><?xml version="1.0" encoding="utf-8"?>
-<p:sld xmlns:a="http://schemas.openxmlformats.org/drawingml/2006/main" xmlns:r="http://schemas.openxmlformats.org/officeDocument/2006/relationships" xmlns:p="http://schemas.openxmlformats.org/presentationml/2006/main">
-  <p:cSld>
-    <p:spTree>
-      <p:nvGrpSpPr>
-        <p:cNvPr id="1" name=""/>
-        <p:cNvGrpSpPr/>
-        <p:nvPr/>
-      </p:nvGrpSpPr>
-      <p:grpSpPr>
-        <a:xfrm>
-          <a:off x="0" y="0"/>
-          <a:ext cx="0" cy="0"/>
-          <a:chOff x="0" y="0"/>
-          <a:chExt cx="0" cy="0"/>
-        </a:xfrm>
-      </p:grpSpPr>
-      <p:sp>
-        <p:nvSpPr>
           <p:cNvPr id="4098" name="Rectangle 2"/>
           <p:cNvSpPr>
             <a:spLocks noGrp="1" noChangeArrowheads="1"/>
@@ -5271,15 +4329,14 @@
           </a:bodyPr>
           <a:lstStyle/>
           <a:p>
-            <a:pPr marL="857250" lvl="1" indent="-457200" algn="just">
+            <a:pPr marL="400050" lvl="1" indent="0" algn="just">
               <a:lnSpc>
-                <a:spcPct val="120000"/>
+                <a:spcPct val="150000"/>
               </a:lnSpc>
               <a:spcBef>
                 <a:spcPct val="0"/>
               </a:spcBef>
-              <a:buFont typeface="+mj-lt"/>
-              <a:buAutoNum type="arabicPeriod" startAt="2"/>
+              <a:buNone/>
             </a:pPr>
             <a:r>
               <a:rPr lang="es-ES" sz="1800" dirty="0">
@@ -5314,9 +4371,9 @@
             </a:r>
           </a:p>
           <a:p>
-            <a:pPr marL="1257300" lvl="2" indent="-457200" algn="just">
+            <a:pPr marL="685800" lvl="1" algn="just">
               <a:lnSpc>
-                <a:spcPct val="120000"/>
+                <a:spcPct val="150000"/>
               </a:lnSpc>
               <a:spcBef>
                 <a:spcPct val="0"/>
@@ -5357,9 +4414,9 @@
             </a:r>
           </a:p>
           <a:p>
-            <a:pPr marL="1257300" lvl="2" indent="-457200" algn="just">
+            <a:pPr marL="685800" lvl="1" algn="just">
               <a:lnSpc>
-                <a:spcPct val="120000"/>
+                <a:spcPct val="150000"/>
               </a:lnSpc>
               <a:spcBef>
                 <a:spcPct val="0"/>
@@ -5400,9 +4457,9 @@
             </a:r>
           </a:p>
           <a:p>
-            <a:pPr marL="1257300" lvl="2" indent="-457200" algn="just">
+            <a:pPr marL="685800" lvl="1" algn="just">
               <a:lnSpc>
-                <a:spcPct val="120000"/>
+                <a:spcPct val="150000"/>
               </a:lnSpc>
               <a:spcBef>
                 <a:spcPct val="0"/>
@@ -5509,7 +4566,7 @@
               </a:rPr>
             </a:br>
             <a:r>
-              <a:rPr lang="es-MX" sz="3100" dirty="0">
+              <a:rPr lang="es-MX" sz="3100" b="1" dirty="0">
                 <a:solidFill>
                   <a:schemeClr val="accent6">
                     <a:lumMod val="75000"/>
@@ -5555,7 +4612,7 @@
         </p:blipFill>
         <p:spPr>
           <a:xfrm>
-            <a:off x="6012160" y="3573016"/>
+            <a:off x="6228184" y="4005064"/>
             <a:ext cx="1698650" cy="1728192"/>
           </a:xfrm>
           <a:prstGeom prst="rect">
@@ -5576,7 +4633,7 @@
 </p:sld>
 </file>
 
-<file path=ppt/slides/slide15.xml><?xml version="1.0" encoding="utf-8"?>
+<file path=ppt/slides/slide12.xml><?xml version="1.0" encoding="utf-8"?>
 <p:sld xmlns:a="http://schemas.openxmlformats.org/drawingml/2006/main" xmlns:r="http://schemas.openxmlformats.org/officeDocument/2006/relationships" xmlns:p="http://schemas.openxmlformats.org/presentationml/2006/main">
   <p:cSld>
     <p:spTree>
@@ -5650,7 +4707,7 @@
               </a:rPr>
             </a:br>
             <a:r>
-              <a:rPr lang="es-MX" sz="3100" dirty="0">
+              <a:rPr lang="es-MX" sz="3100" b="1" dirty="0">
                 <a:solidFill>
                   <a:schemeClr val="accent6">
                     <a:lumMod val="75000"/>
@@ -5663,37 +4720,8 @@
                 </a:effectLst>
                 <a:latin typeface="Dom Casual" charset="0"/>
               </a:rPr>
-              <a:t>Individual: Función </a:t>
-            </a:r>
-            <a:r>
-              <a:rPr lang="es-MX" sz="3100" dirty="0" err="1">
-                <a:solidFill>
-                  <a:schemeClr val="accent6">
-                    <a:lumMod val="75000"/>
-                  </a:schemeClr>
-                </a:solidFill>
-                <a:effectLst>
-                  <a:outerShdw blurRad="38100" dist="38100" dir="2700000" algn="tl">
-                    <a:srgbClr val="C0C0C0"/>
-                  </a:outerShdw>
-                </a:effectLst>
-                <a:latin typeface="Dom Casual" charset="0"/>
-              </a:rPr>
-              <a:t>estadística_descriptiva</a:t>
-            </a:r>
-            <a:endParaRPr lang="es-MX" sz="3100" dirty="0">
-              <a:solidFill>
-                <a:schemeClr val="accent6">
-                  <a:lumMod val="75000"/>
-                </a:schemeClr>
-              </a:solidFill>
-              <a:effectLst>
-                <a:outerShdw blurRad="38100" dist="38100" dir="2700000" algn="tl">
-                  <a:srgbClr val="C0C0C0"/>
-                </a:outerShdw>
-              </a:effectLst>
-              <a:latin typeface="Dom Casual" charset="0"/>
-            </a:endParaRPr>
+              <a:t>Función estadística descriptiva</a:t>
+            </a:r>
           </a:p>
         </p:txBody>
       </p:sp>
@@ -5713,8 +4741,8 @@
         </p:nvSpPr>
         <p:spPr>
           <a:xfrm>
-            <a:off x="1043608" y="1844824"/>
-            <a:ext cx="7056784" cy="3600400"/>
+            <a:off x="827584" y="1772816"/>
+            <a:ext cx="7632848" cy="3600400"/>
           </a:xfrm>
           <a:prstGeom prst="rect">
             <a:avLst/>
@@ -6059,7 +5087,7 @@
 </p:sld>
 </file>
 
-<file path=ppt/slides/slide16.xml><?xml version="1.0" encoding="utf-8"?>
+<file path=ppt/slides/slide13.xml><?xml version="1.0" encoding="utf-8"?>
 <p:sld xmlns:a="http://schemas.openxmlformats.org/drawingml/2006/main" xmlns:r="http://schemas.openxmlformats.org/officeDocument/2006/relationships" xmlns:p="http://schemas.openxmlformats.org/presentationml/2006/main">
   <p:cSld>
     <p:spTree>
@@ -6133,7 +5161,7 @@
               </a:rPr>
             </a:br>
             <a:r>
-              <a:rPr lang="es-MX" sz="3100" dirty="0">
+              <a:rPr lang="es-MX" sz="3100" b="1" dirty="0">
                 <a:solidFill>
                   <a:schemeClr val="accent6">
                     <a:lumMod val="75000"/>
@@ -6146,7 +5174,7 @@
                 </a:effectLst>
                 <a:latin typeface="Dom Casual" charset="0"/>
               </a:rPr>
-              <a:t>Individual : Función grafica1</a:t>
+              <a:t>Función grafica1</a:t>
             </a:r>
           </a:p>
         </p:txBody>
@@ -6702,7 +5730,7 @@
 </p:sld>
 </file>
 
-<file path=ppt/slides/slide17.xml><?xml version="1.0" encoding="utf-8"?>
+<file path=ppt/slides/slide14.xml><?xml version="1.0" encoding="utf-8"?>
 <p:sld xmlns:a="http://schemas.openxmlformats.org/drawingml/2006/main" xmlns:r="http://schemas.openxmlformats.org/officeDocument/2006/relationships" xmlns:p="http://schemas.openxmlformats.org/presentationml/2006/main">
   <p:cSld>
     <p:spTree>
@@ -6776,7 +5804,7 @@
               </a:rPr>
             </a:br>
             <a:r>
-              <a:rPr lang="es-MX" sz="3100" dirty="0">
+              <a:rPr lang="es-MX" sz="3100" b="1" dirty="0">
                 <a:solidFill>
                   <a:schemeClr val="accent6">
                     <a:lumMod val="75000"/>
@@ -6789,7 +5817,7 @@
                 </a:effectLst>
                 <a:latin typeface="Dom Casual" charset="0"/>
               </a:rPr>
-              <a:t>Individual: Función grafica2</a:t>
+              <a:t>Función grafica2</a:t>
             </a:r>
           </a:p>
         </p:txBody>
@@ -7028,18 +6056,6 @@
                 <a:cs typeface="Arial" pitchFamily="34" charset="0"/>
               </a:rPr>
               <a:t>. La función deberá generar una gráfica con </a:t>
-            </a:r>
-            <a:r>
-              <a:rPr lang="es-ES" sz="1800" dirty="0">
-                <a:solidFill>
-                  <a:schemeClr val="bg2">
-                    <a:lumMod val="25000"/>
-                  </a:schemeClr>
-                </a:solidFill>
-                <a:latin typeface="Arial" pitchFamily="34" charset="0"/>
-                <a:cs typeface="Arial" pitchFamily="34" charset="0"/>
-              </a:rPr>
-              <a:t> </a:t>
             </a:r>
             <a:r>
               <a:rPr lang="es-ES" sz="1800" b="1" dirty="0">
@@ -7134,7 +6150,7 @@
 </p:sld>
 </file>
 
-<file path=ppt/slides/slide18.xml><?xml version="1.0" encoding="utf-8"?>
+<file path=ppt/slides/slide15.xml><?xml version="1.0" encoding="utf-8"?>
 <p:sld xmlns:a="http://schemas.openxmlformats.org/drawingml/2006/main" xmlns:r="http://schemas.openxmlformats.org/officeDocument/2006/relationships" xmlns:p="http://schemas.openxmlformats.org/presentationml/2006/main">
   <p:cSld>
     <p:spTree>
@@ -7208,7 +6224,7 @@
               </a:rPr>
             </a:br>
             <a:r>
-              <a:rPr lang="es-MX" sz="3100" dirty="0">
+              <a:rPr lang="es-MX" sz="3100" b="1" dirty="0">
                 <a:solidFill>
                   <a:schemeClr val="accent6">
                     <a:lumMod val="75000"/>
@@ -7221,7 +6237,7 @@
                 </a:effectLst>
                 <a:latin typeface="Dom Casual" charset="0"/>
               </a:rPr>
-              <a:t>Individual: Función grafica2</a:t>
+              <a:t>Función grafica2</a:t>
             </a:r>
           </a:p>
         </p:txBody>
@@ -7626,7 +6642,11 @@
                 <a:latin typeface="Arial" pitchFamily="34" charset="0"/>
                 <a:cs typeface="Arial" pitchFamily="34" charset="0"/>
               </a:rPr>
-              <a:t>El objetivo que se persigue en esta Situación Problema, es que el alumno aplique los conceptos, herramientas de búsqueda y análisis de datos para resolver una problemática de una empresa planteada por el mismo estudiante, a través de la programación con Python.</a:t>
+              <a:t>El objetivo que se persigue en esta situación problema es que el alumno aplique los conceptos, herramientas de búsqueda y análisis de datos para resolver una problemática de una empresa planteada por el mismo estudiante, a través de la programación con Python.</a:t>
+            </a:r>
+            <a:r>
+              <a:rPr lang="es-MX" sz="2000" dirty="0"/>
+              <a:t> </a:t>
             </a:r>
             <a:endParaRPr lang="es-MX" sz="2000" dirty="0">
               <a:solidFill>
@@ -7697,7 +6717,7 @@
               </a:rPr>
             </a:br>
             <a:r>
-              <a:rPr lang="es-MX" sz="3100" dirty="0">
+              <a:rPr lang="es-MX" sz="3100" b="1" dirty="0">
                 <a:solidFill>
                   <a:schemeClr val="accent6">
                     <a:lumMod val="75000"/>
@@ -7765,6 +6785,617 @@
 </file>
 
 <file path=ppt/slides/slide3.xml><?xml version="1.0" encoding="utf-8"?>
+<p:sld xmlns:a="http://schemas.openxmlformats.org/drawingml/2006/main" xmlns:r="http://schemas.openxmlformats.org/officeDocument/2006/relationships" xmlns:p="http://schemas.openxmlformats.org/presentationml/2006/main">
+  <p:cSld>
+    <p:spTree>
+      <p:nvGrpSpPr>
+        <p:cNvPr id="1" name="">
+          <a:extLst>
+            <a:ext uri="{FF2B5EF4-FFF2-40B4-BE49-F238E27FC236}">
+              <a16:creationId xmlns:a16="http://schemas.microsoft.com/office/drawing/2014/main" id="{90339A81-D33B-9C20-9D54-3F08E0419DF8}"/>
+            </a:ext>
+          </a:extLst>
+        </p:cNvPr>
+        <p:cNvGrpSpPr/>
+        <p:nvPr/>
+      </p:nvGrpSpPr>
+      <p:grpSpPr>
+        <a:xfrm>
+          <a:off x="0" y="0"/>
+          <a:ext cx="0" cy="0"/>
+          <a:chOff x="0" y="0"/>
+          <a:chExt cx="0" cy="0"/>
+        </a:xfrm>
+      </p:grpSpPr>
+      <p:pic>
+        <p:nvPicPr>
+          <p:cNvPr id="3" name="Imagen 2">
+            <a:extLst>
+              <a:ext uri="{FF2B5EF4-FFF2-40B4-BE49-F238E27FC236}">
+                <a16:creationId xmlns:a16="http://schemas.microsoft.com/office/drawing/2014/main" id="{F5E2AD1C-3A7A-F34F-6590-778EC7C38747}"/>
+              </a:ext>
+            </a:extLst>
+          </p:cNvPr>
+          <p:cNvPicPr>
+            <a:picLocks noChangeAspect="1"/>
+          </p:cNvPicPr>
+          <p:nvPr/>
+        </p:nvPicPr>
+        <p:blipFill>
+          <a:blip r:embed="rId2"/>
+          <a:stretch>
+            <a:fillRect/>
+          </a:stretch>
+        </p:blipFill>
+        <p:spPr>
+          <a:xfrm>
+            <a:off x="6300192" y="4509756"/>
+            <a:ext cx="2162463" cy="1870936"/>
+          </a:xfrm>
+          <a:prstGeom prst="rect">
+            <a:avLst/>
+          </a:prstGeom>
+        </p:spPr>
+      </p:pic>
+      <p:sp>
+        <p:nvSpPr>
+          <p:cNvPr id="4098" name="Rectangle 2">
+            <a:extLst>
+              <a:ext uri="{FF2B5EF4-FFF2-40B4-BE49-F238E27FC236}">
+                <a16:creationId xmlns:a16="http://schemas.microsoft.com/office/drawing/2014/main" id="{5977D660-C00F-10E7-8FEB-D08DDA13BEFE}"/>
+              </a:ext>
+            </a:extLst>
+          </p:cNvPr>
+          <p:cNvSpPr>
+            <a:spLocks noGrp="1" noChangeArrowheads="1"/>
+          </p:cNvSpPr>
+          <p:nvPr>
+            <p:ph type="body" idx="1"/>
+          </p:nvPr>
+        </p:nvSpPr>
+        <p:spPr>
+          <a:xfrm>
+            <a:off x="588952" y="4653136"/>
+            <a:ext cx="5423208" cy="1304528"/>
+          </a:xfrm>
+        </p:spPr>
+        <p:txBody>
+          <a:bodyPr>
+            <a:noAutofit/>
+          </a:bodyPr>
+          <a:lstStyle/>
+          <a:p>
+            <a:pPr marL="228600" indent="-228600" algn="just">
+              <a:lnSpc>
+                <a:spcPct val="150000"/>
+              </a:lnSpc>
+              <a:spcBef>
+                <a:spcPct val="0"/>
+              </a:spcBef>
+              <a:spcAft>
+                <a:spcPts val="600"/>
+              </a:spcAft>
+              <a:buFont typeface="+mj-lt"/>
+              <a:buAutoNum type="arabicPeriod" startAt="5"/>
+            </a:pPr>
+            <a:r>
+              <a:rPr lang="es-MX" sz="1200" b="1" dirty="0">
+                <a:solidFill>
+                  <a:srgbClr val="FF0000"/>
+                </a:solidFill>
+                <a:latin typeface="Arial" pitchFamily="34" charset="0"/>
+                <a:cs typeface="Arial" pitchFamily="34" charset="0"/>
+              </a:rPr>
+              <a:t>Conclusión. </a:t>
+            </a:r>
+            <a:r>
+              <a:rPr lang="es-MX" sz="1200" dirty="0">
+                <a:solidFill>
+                  <a:schemeClr val="bg2">
+                    <a:lumMod val="25000"/>
+                  </a:schemeClr>
+                </a:solidFill>
+                <a:latin typeface="Arial" pitchFamily="34" charset="0"/>
+                <a:cs typeface="Arial" pitchFamily="34" charset="0"/>
+              </a:rPr>
+              <a:t>Interpreta los resultados del análisis, identifica patrones o anomalías, y conecta estos hallazgos con las preguntas originales. Extrae conclusiones claras y proporciona recomendaciones o ideas para futuras investigaciones basadas en los datos procesados. </a:t>
+            </a:r>
+          </a:p>
+        </p:txBody>
+      </p:sp>
+      <p:sp>
+        <p:nvSpPr>
+          <p:cNvPr id="184324" name="Rectangle 4">
+            <a:extLst>
+              <a:ext uri="{FF2B5EF4-FFF2-40B4-BE49-F238E27FC236}">
+                <a16:creationId xmlns:a16="http://schemas.microsoft.com/office/drawing/2014/main" id="{6541A636-2EE5-36E5-3B7B-20C3BD9BAFD7}"/>
+              </a:ext>
+            </a:extLst>
+          </p:cNvPr>
+          <p:cNvSpPr>
+            <a:spLocks noGrp="1" noChangeArrowheads="1"/>
+          </p:cNvSpPr>
+          <p:nvPr>
+            <p:ph type="title"/>
+          </p:nvPr>
+        </p:nvSpPr>
+        <p:spPr>
+          <a:xfrm>
+            <a:off x="457200" y="121196"/>
+            <a:ext cx="8229600" cy="1143000"/>
+          </a:xfrm>
+        </p:spPr>
+        <p:txBody>
+          <a:bodyPr>
+            <a:normAutofit fontScale="90000"/>
+          </a:bodyPr>
+          <a:lstStyle/>
+          <a:p>
+            <a:pPr eaLnBrk="1" hangingPunct="1">
+              <a:defRPr/>
+            </a:pPr>
+            <a:r>
+              <a:rPr lang="es-MX" b="1" dirty="0">
+                <a:solidFill>
+                  <a:schemeClr val="accent4">
+                    <a:lumMod val="50000"/>
+                  </a:schemeClr>
+                </a:solidFill>
+                <a:effectLst>
+                  <a:outerShdw blurRad="38100" dist="38100" dir="2700000" algn="tl">
+                    <a:srgbClr val="C0C0C0"/>
+                  </a:outerShdw>
+                </a:effectLst>
+                <a:latin typeface="Dom Casual" charset="0"/>
+              </a:rPr>
+              <a:t>Situación problema</a:t>
+            </a:r>
+            <a:br>
+              <a:rPr lang="es-MX" b="1" dirty="0">
+                <a:solidFill>
+                  <a:schemeClr val="accent4">
+                    <a:lumMod val="50000"/>
+                  </a:schemeClr>
+                </a:solidFill>
+                <a:effectLst>
+                  <a:outerShdw blurRad="38100" dist="38100" dir="2700000" algn="tl">
+                    <a:srgbClr val="C0C0C0"/>
+                  </a:outerShdw>
+                </a:effectLst>
+                <a:latin typeface="Dom Casual" charset="0"/>
+              </a:rPr>
+            </a:br>
+            <a:r>
+              <a:rPr lang="es-MX" sz="3100" b="1" dirty="0">
+                <a:solidFill>
+                  <a:schemeClr val="accent6">
+                    <a:lumMod val="75000"/>
+                  </a:schemeClr>
+                </a:solidFill>
+                <a:effectLst>
+                  <a:outerShdw blurRad="38100" dist="38100" dir="2700000" algn="tl">
+                    <a:srgbClr val="C0C0C0"/>
+                  </a:outerShdw>
+                </a:effectLst>
+                <a:latin typeface="Dom Casual" charset="0"/>
+              </a:rPr>
+              <a:t>Metodología</a:t>
+            </a:r>
+          </a:p>
+        </p:txBody>
+      </p:sp>
+      <p:sp>
+        <p:nvSpPr>
+          <p:cNvPr id="4" name="Rectangle 2">
+            <a:extLst>
+              <a:ext uri="{FF2B5EF4-FFF2-40B4-BE49-F238E27FC236}">
+                <a16:creationId xmlns:a16="http://schemas.microsoft.com/office/drawing/2014/main" id="{E6F561E5-5123-CF02-955A-17FA5E904910}"/>
+              </a:ext>
+            </a:extLst>
+          </p:cNvPr>
+          <p:cNvSpPr txBox="1">
+            <a:spLocks noChangeArrowheads="1"/>
+          </p:cNvSpPr>
+          <p:nvPr/>
+        </p:nvSpPr>
+        <p:spPr>
+          <a:xfrm>
+            <a:off x="624390" y="1412776"/>
+            <a:ext cx="7895220" cy="4176464"/>
+          </a:xfrm>
+          <a:prstGeom prst="rect">
+            <a:avLst/>
+          </a:prstGeom>
+        </p:spPr>
+        <p:txBody>
+          <a:bodyPr vert="horz" lIns="91440" tIns="45720" rIns="91440" bIns="45720" rtlCol="0">
+            <a:normAutofit fontScale="32500" lnSpcReduction="20000"/>
+          </a:bodyPr>
+          <a:lstStyle>
+            <a:lvl1pPr marL="342900" indent="-342900" algn="l" defTabSz="914400" rtl="0" eaLnBrk="1" latinLnBrk="0" hangingPunct="1">
+              <a:spcBef>
+                <a:spcPct val="20000"/>
+              </a:spcBef>
+              <a:buFont typeface="Arial" pitchFamily="34" charset="0"/>
+              <a:buChar char="•"/>
+              <a:defRPr sz="3200" kern="1200">
+                <a:solidFill>
+                  <a:schemeClr val="tx1"/>
+                </a:solidFill>
+                <a:latin typeface="+mn-lt"/>
+                <a:ea typeface="+mn-ea"/>
+                <a:cs typeface="+mn-cs"/>
+              </a:defRPr>
+            </a:lvl1pPr>
+            <a:lvl2pPr marL="742950" indent="-285750" algn="l" defTabSz="914400" rtl="0" eaLnBrk="1" latinLnBrk="0" hangingPunct="1">
+              <a:spcBef>
+                <a:spcPct val="20000"/>
+              </a:spcBef>
+              <a:buFont typeface="Arial" pitchFamily="34" charset="0"/>
+              <a:buChar char="–"/>
+              <a:defRPr sz="2800" kern="1200">
+                <a:solidFill>
+                  <a:schemeClr val="tx1"/>
+                </a:solidFill>
+                <a:latin typeface="+mn-lt"/>
+                <a:ea typeface="+mn-ea"/>
+                <a:cs typeface="+mn-cs"/>
+              </a:defRPr>
+            </a:lvl2pPr>
+            <a:lvl3pPr marL="1143000" indent="-228600" algn="l" defTabSz="914400" rtl="0" eaLnBrk="1" latinLnBrk="0" hangingPunct="1">
+              <a:spcBef>
+                <a:spcPct val="20000"/>
+              </a:spcBef>
+              <a:buFont typeface="Arial" pitchFamily="34" charset="0"/>
+              <a:buChar char="•"/>
+              <a:defRPr sz="2400" kern="1200">
+                <a:solidFill>
+                  <a:schemeClr val="tx1"/>
+                </a:solidFill>
+                <a:latin typeface="+mn-lt"/>
+                <a:ea typeface="+mn-ea"/>
+                <a:cs typeface="+mn-cs"/>
+              </a:defRPr>
+            </a:lvl3pPr>
+            <a:lvl4pPr marL="1600200" indent="-228600" algn="l" defTabSz="914400" rtl="0" eaLnBrk="1" latinLnBrk="0" hangingPunct="1">
+              <a:spcBef>
+                <a:spcPct val="20000"/>
+              </a:spcBef>
+              <a:buFont typeface="Arial" pitchFamily="34" charset="0"/>
+              <a:buChar char="–"/>
+              <a:defRPr sz="2000" kern="1200">
+                <a:solidFill>
+                  <a:schemeClr val="tx1"/>
+                </a:solidFill>
+                <a:latin typeface="+mn-lt"/>
+                <a:ea typeface="+mn-ea"/>
+                <a:cs typeface="+mn-cs"/>
+              </a:defRPr>
+            </a:lvl4pPr>
+            <a:lvl5pPr marL="2057400" indent="-228600" algn="l" defTabSz="914400" rtl="0" eaLnBrk="1" latinLnBrk="0" hangingPunct="1">
+              <a:spcBef>
+                <a:spcPct val="20000"/>
+              </a:spcBef>
+              <a:buFont typeface="Arial" pitchFamily="34" charset="0"/>
+              <a:buChar char="»"/>
+              <a:defRPr sz="2000" kern="1200">
+                <a:solidFill>
+                  <a:schemeClr val="tx1"/>
+                </a:solidFill>
+                <a:latin typeface="+mn-lt"/>
+                <a:ea typeface="+mn-ea"/>
+                <a:cs typeface="+mn-cs"/>
+              </a:defRPr>
+            </a:lvl5pPr>
+            <a:lvl6pPr marL="2514600" indent="-228600" algn="l" defTabSz="914400" rtl="0" eaLnBrk="1" latinLnBrk="0" hangingPunct="1">
+              <a:spcBef>
+                <a:spcPct val="20000"/>
+              </a:spcBef>
+              <a:buFont typeface="Arial" pitchFamily="34" charset="0"/>
+              <a:buChar char="•"/>
+              <a:defRPr sz="2000" kern="1200">
+                <a:solidFill>
+                  <a:schemeClr val="tx1"/>
+                </a:solidFill>
+                <a:latin typeface="+mn-lt"/>
+                <a:ea typeface="+mn-ea"/>
+                <a:cs typeface="+mn-cs"/>
+              </a:defRPr>
+            </a:lvl6pPr>
+            <a:lvl7pPr marL="2971800" indent="-228600" algn="l" defTabSz="914400" rtl="0" eaLnBrk="1" latinLnBrk="0" hangingPunct="1">
+              <a:spcBef>
+                <a:spcPct val="20000"/>
+              </a:spcBef>
+              <a:buFont typeface="Arial" pitchFamily="34" charset="0"/>
+              <a:buChar char="•"/>
+              <a:defRPr sz="2000" kern="1200">
+                <a:solidFill>
+                  <a:schemeClr val="tx1"/>
+                </a:solidFill>
+                <a:latin typeface="+mn-lt"/>
+                <a:ea typeface="+mn-ea"/>
+                <a:cs typeface="+mn-cs"/>
+              </a:defRPr>
+            </a:lvl7pPr>
+            <a:lvl8pPr marL="3429000" indent="-228600" algn="l" defTabSz="914400" rtl="0" eaLnBrk="1" latinLnBrk="0" hangingPunct="1">
+              <a:spcBef>
+                <a:spcPct val="20000"/>
+              </a:spcBef>
+              <a:buFont typeface="Arial" pitchFamily="34" charset="0"/>
+              <a:buChar char="•"/>
+              <a:defRPr sz="2000" kern="1200">
+                <a:solidFill>
+                  <a:schemeClr val="tx1"/>
+                </a:solidFill>
+                <a:latin typeface="+mn-lt"/>
+                <a:ea typeface="+mn-ea"/>
+                <a:cs typeface="+mn-cs"/>
+              </a:defRPr>
+            </a:lvl8pPr>
+            <a:lvl9pPr marL="3886200" indent="-228600" algn="l" defTabSz="914400" rtl="0" eaLnBrk="1" latinLnBrk="0" hangingPunct="1">
+              <a:spcBef>
+                <a:spcPct val="20000"/>
+              </a:spcBef>
+              <a:buFont typeface="Arial" pitchFamily="34" charset="0"/>
+              <a:buChar char="•"/>
+              <a:defRPr sz="2000" kern="1200">
+                <a:solidFill>
+                  <a:schemeClr val="tx1"/>
+                </a:solidFill>
+                <a:latin typeface="+mn-lt"/>
+                <a:ea typeface="+mn-ea"/>
+                <a:cs typeface="+mn-cs"/>
+              </a:defRPr>
+            </a:lvl9pPr>
+          </a:lstStyle>
+          <a:p>
+            <a:pPr marL="0" indent="0" algn="just">
+              <a:lnSpc>
+                <a:spcPct val="150000"/>
+              </a:lnSpc>
+              <a:spcBef>
+                <a:spcPct val="0"/>
+              </a:spcBef>
+              <a:spcAft>
+                <a:spcPts val="600"/>
+              </a:spcAft>
+              <a:buFont typeface="Arial" pitchFamily="34" charset="0"/>
+              <a:buNone/>
+            </a:pPr>
+            <a:r>
+              <a:rPr lang="es-MX" sz="3700" dirty="0">
+                <a:solidFill>
+                  <a:schemeClr val="bg2">
+                    <a:lumMod val="25000"/>
+                  </a:schemeClr>
+                </a:solidFill>
+                <a:latin typeface="Arial" pitchFamily="34" charset="0"/>
+                <a:cs typeface="Arial" pitchFamily="34" charset="0"/>
+              </a:rPr>
+              <a:t>Primero que todo debemos seguir una metodología para este proceso. </a:t>
+            </a:r>
+          </a:p>
+          <a:p>
+            <a:pPr marL="177800" indent="-177800" algn="just">
+              <a:lnSpc>
+                <a:spcPct val="150000"/>
+              </a:lnSpc>
+              <a:spcBef>
+                <a:spcPct val="0"/>
+              </a:spcBef>
+              <a:spcAft>
+                <a:spcPts val="600"/>
+              </a:spcAft>
+              <a:buFont typeface="+mj-lt"/>
+              <a:buAutoNum type="arabicPeriod"/>
+            </a:pPr>
+            <a:r>
+              <a:rPr lang="es-MX" sz="3700" b="1" dirty="0">
+                <a:solidFill>
+                  <a:srgbClr val="FF0000"/>
+                </a:solidFill>
+                <a:latin typeface="Arial" pitchFamily="34" charset="0"/>
+                <a:cs typeface="Arial" pitchFamily="34" charset="0"/>
+              </a:rPr>
+              <a:t>Definición del problema. </a:t>
+            </a:r>
+            <a:r>
+              <a:rPr lang="es-MX" sz="3700" dirty="0">
+                <a:solidFill>
+                  <a:schemeClr val="bg2">
+                    <a:lumMod val="25000"/>
+                  </a:schemeClr>
+                </a:solidFill>
+                <a:latin typeface="Arial" pitchFamily="34" charset="0"/>
+                <a:cs typeface="Arial" pitchFamily="34" charset="0"/>
+              </a:rPr>
+              <a:t>Identifica el tema y el enfoque de tu estudio, eligiendo un área que te interese explorar. El objetivo es desarrollar un programa capaz de procesar grandes volúmenes de datos rápidamente. </a:t>
+            </a:r>
+          </a:p>
+          <a:p>
+            <a:pPr marL="177800" indent="-177800" algn="just">
+              <a:lnSpc>
+                <a:spcPct val="150000"/>
+              </a:lnSpc>
+              <a:spcBef>
+                <a:spcPct val="0"/>
+              </a:spcBef>
+              <a:spcAft>
+                <a:spcPts val="600"/>
+              </a:spcAft>
+              <a:buFont typeface="+mj-lt"/>
+              <a:buAutoNum type="arabicPeriod"/>
+            </a:pPr>
+            <a:r>
+              <a:rPr lang="es-MX" sz="3700" b="1" dirty="0">
+                <a:solidFill>
+                  <a:srgbClr val="FF0000"/>
+                </a:solidFill>
+                <a:latin typeface="Arial" pitchFamily="34" charset="0"/>
+                <a:cs typeface="Arial" pitchFamily="34" charset="0"/>
+              </a:rPr>
+              <a:t>Recolección de datos. </a:t>
+            </a:r>
+            <a:r>
+              <a:rPr lang="es-MX" sz="3700" dirty="0">
+                <a:solidFill>
+                  <a:schemeClr val="bg2">
+                    <a:lumMod val="25000"/>
+                  </a:schemeClr>
+                </a:solidFill>
+                <a:latin typeface="Arial" pitchFamily="34" charset="0"/>
+                <a:cs typeface="Arial" pitchFamily="34" charset="0"/>
+              </a:rPr>
+              <a:t>Busca </a:t>
+            </a:r>
+            <a:r>
+              <a:rPr lang="es-MX" sz="3700" dirty="0" err="1">
+                <a:solidFill>
+                  <a:schemeClr val="bg2">
+                    <a:lumMod val="25000"/>
+                  </a:schemeClr>
+                </a:solidFill>
+                <a:latin typeface="Arial" pitchFamily="34" charset="0"/>
+                <a:cs typeface="Arial" pitchFamily="34" charset="0"/>
+              </a:rPr>
+              <a:t>Datasets</a:t>
+            </a:r>
+            <a:r>
+              <a:rPr lang="es-MX" sz="3700" dirty="0">
+                <a:solidFill>
+                  <a:schemeClr val="bg2">
+                    <a:lumMod val="25000"/>
+                  </a:schemeClr>
+                </a:solidFill>
+                <a:latin typeface="Arial" pitchFamily="34" charset="0"/>
+                <a:cs typeface="Arial" pitchFamily="34" charset="0"/>
+              </a:rPr>
+              <a:t> en formato CSV (preferentemente con columnas cuantitativas y cualitativas) que te permitan analizar información relevante. Asegúrate de que los datos sean completos y variados para obtener resultados más ricos.</a:t>
+            </a:r>
+          </a:p>
+          <a:p>
+            <a:pPr marL="177800" indent="-177800" algn="just">
+              <a:lnSpc>
+                <a:spcPct val="150000"/>
+              </a:lnSpc>
+              <a:spcBef>
+                <a:spcPct val="0"/>
+              </a:spcBef>
+              <a:spcAft>
+                <a:spcPts val="600"/>
+              </a:spcAft>
+              <a:buFont typeface="+mj-lt"/>
+              <a:buAutoNum type="arabicPeriod"/>
+            </a:pPr>
+            <a:r>
+              <a:rPr lang="es-MX" sz="3700" b="1" dirty="0">
+                <a:solidFill>
+                  <a:srgbClr val="FF0000"/>
+                </a:solidFill>
+                <a:latin typeface="Arial" pitchFamily="34" charset="0"/>
+                <a:cs typeface="Arial" pitchFamily="34" charset="0"/>
+              </a:rPr>
+              <a:t>Depuración de datos. </a:t>
+            </a:r>
+            <a:r>
+              <a:rPr lang="es-MX" sz="3700" dirty="0">
+                <a:solidFill>
+                  <a:schemeClr val="bg2">
+                    <a:lumMod val="25000"/>
+                  </a:schemeClr>
+                </a:solidFill>
+                <a:latin typeface="Arial" pitchFamily="34" charset="0"/>
+                <a:cs typeface="Arial" pitchFamily="34" charset="0"/>
+              </a:rPr>
+              <a:t>Estandariza el formato de los datos (por ejemplo, asegurando uniformidad en fechas y números), elimina duplicados y filtra las observaciones irrelevantes o incompletas. Guarda solo los datos que sean útiles y estén bien organizados. </a:t>
+            </a:r>
+          </a:p>
+          <a:p>
+            <a:pPr marL="177800" indent="-177800" algn="just">
+              <a:lnSpc>
+                <a:spcPct val="150000"/>
+              </a:lnSpc>
+              <a:spcBef>
+                <a:spcPct val="0"/>
+              </a:spcBef>
+              <a:spcAft>
+                <a:spcPts val="600"/>
+              </a:spcAft>
+              <a:buFont typeface="+mj-lt"/>
+              <a:buAutoNum type="arabicPeriod"/>
+            </a:pPr>
+            <a:r>
+              <a:rPr lang="es-MX" sz="3700" b="1" dirty="0">
+                <a:solidFill>
+                  <a:srgbClr val="FF0000"/>
+                </a:solidFill>
+                <a:latin typeface="Arial" pitchFamily="34" charset="0"/>
+                <a:cs typeface="Arial" pitchFamily="34" charset="0"/>
+              </a:rPr>
+              <a:t>Análisis. </a:t>
+            </a:r>
+            <a:r>
+              <a:rPr lang="es-MX" sz="3700" dirty="0">
+                <a:solidFill>
+                  <a:schemeClr val="bg2">
+                    <a:lumMod val="25000"/>
+                  </a:schemeClr>
+                </a:solidFill>
+                <a:latin typeface="Arial" pitchFamily="34" charset="0"/>
+                <a:cs typeface="Arial" pitchFamily="34" charset="0"/>
+              </a:rPr>
+              <a:t>Usa herramientas estadísticas y gráficas en Python para explorar los datos. La estadística descriptiva te ayudará a identificar patrones, y herramientas como </a:t>
+            </a:r>
+            <a:r>
+              <a:rPr lang="es-MX" sz="3700" dirty="0" err="1">
+                <a:solidFill>
+                  <a:schemeClr val="bg2">
+                    <a:lumMod val="25000"/>
+                  </a:schemeClr>
+                </a:solidFill>
+                <a:latin typeface="Arial" pitchFamily="34" charset="0"/>
+                <a:cs typeface="Arial" pitchFamily="34" charset="0"/>
+              </a:rPr>
+              <a:t>Matplotlib</a:t>
+            </a:r>
+            <a:r>
+              <a:rPr lang="es-MX" sz="3700" dirty="0">
+                <a:solidFill>
+                  <a:schemeClr val="bg2">
+                    <a:lumMod val="25000"/>
+                  </a:schemeClr>
+                </a:solidFill>
+                <a:latin typeface="Arial" pitchFamily="34" charset="0"/>
+                <a:cs typeface="Arial" pitchFamily="34" charset="0"/>
+              </a:rPr>
+              <a:t> te permitirán crear gráficos para ilustrar tus hallazgos. </a:t>
+            </a:r>
+            <a:endParaRPr lang="es-MX" sz="2000" dirty="0">
+              <a:solidFill>
+                <a:schemeClr val="bg2">
+                  <a:lumMod val="25000"/>
+                </a:schemeClr>
+              </a:solidFill>
+              <a:latin typeface="Arial" pitchFamily="34" charset="0"/>
+              <a:cs typeface="Arial" pitchFamily="34" charset="0"/>
+            </a:endParaRPr>
+          </a:p>
+        </p:txBody>
+      </p:sp>
+    </p:spTree>
+    <p:extLst>
+      <p:ext uri="{BB962C8B-B14F-4D97-AF65-F5344CB8AC3E}">
+        <p14:creationId xmlns:p14="http://schemas.microsoft.com/office/powerpoint/2010/main" val="1289742310"/>
+      </p:ext>
+    </p:extLst>
+  </p:cSld>
+  <p:clrMapOvr>
+    <a:masterClrMapping/>
+  </p:clrMapOvr>
+</p:sld>
+</file>
+
+<file path=ppt/slides/slide4.xml><?xml version="1.0" encoding="utf-8"?>
 <p:sld xmlns:a="http://schemas.openxmlformats.org/drawingml/2006/main" xmlns:r="http://schemas.openxmlformats.org/officeDocument/2006/relationships" xmlns:p="http://schemas.openxmlformats.org/presentationml/2006/main">
   <p:cSld>
     <p:spTree>
@@ -7850,6 +7481,18 @@
               <a:buAutoNum type="arabicPeriod"/>
             </a:pPr>
             <a:r>
+              <a:rPr lang="es-ES" sz="1600" b="1" dirty="0">
+                <a:solidFill>
+                  <a:schemeClr val="bg2">
+                    <a:lumMod val="25000"/>
+                  </a:schemeClr>
+                </a:solidFill>
+                <a:latin typeface="Arial" pitchFamily="34" charset="0"/>
+                <a:cs typeface="Arial" pitchFamily="34" charset="0"/>
+              </a:rPr>
+              <a:t>Investigar</a:t>
+            </a:r>
+            <a:r>
               <a:rPr lang="es-ES" sz="1600" dirty="0">
                 <a:solidFill>
                   <a:schemeClr val="bg2">
@@ -7859,7 +7502,7 @@
                 <a:latin typeface="Arial" pitchFamily="34" charset="0"/>
                 <a:cs typeface="Arial" pitchFamily="34" charset="0"/>
               </a:rPr>
-              <a:t>Investigar y solicitar a una empresa en la que te autoricen a utilizar sus datos. Deberás enfocarte en una problemática en general (puede ser una empresa familiar o una investigación de bases de datos reales).</a:t>
+              <a:t> y solicitar a una empresa en la que te autoricen a utilizar sus datos. Deberás enfocarte en una problemática en general (puede ser una empresa familiar o una investigación de bases de datos reales).</a:t>
             </a:r>
           </a:p>
           <a:p>
@@ -7874,6 +7517,18 @@
               <a:buAutoNum type="arabicPeriod"/>
             </a:pPr>
             <a:r>
+              <a:rPr lang="es-ES" sz="1600" b="1" dirty="0">
+                <a:solidFill>
+                  <a:schemeClr val="bg2">
+                    <a:lumMod val="25000"/>
+                  </a:schemeClr>
+                </a:solidFill>
+                <a:latin typeface="Arial" pitchFamily="34" charset="0"/>
+                <a:cs typeface="Arial" pitchFamily="34" charset="0"/>
+              </a:rPr>
+              <a:t>Generar una tabla </a:t>
+            </a:r>
+            <a:r>
               <a:rPr lang="es-ES" sz="1600" dirty="0">
                 <a:solidFill>
                   <a:schemeClr val="bg2">
@@ -7883,7 +7538,7 @@
                 <a:latin typeface="Arial" pitchFamily="34" charset="0"/>
                 <a:cs typeface="Arial" pitchFamily="34" charset="0"/>
               </a:rPr>
-              <a:t>Generar una tabla con los datos necesarios en Excel para extraer la información relevante de la problemática.</a:t>
+              <a:t>con los datos necesarios en Excel para extraer la información relevante de la problemática.</a:t>
             </a:r>
           </a:p>
           <a:p>
@@ -8066,7 +7721,7 @@
               </a:rPr>
             </a:br>
             <a:r>
-              <a:rPr lang="es-MX" sz="3100" dirty="0">
+              <a:rPr lang="es-MX" sz="3100" b="1" dirty="0">
                 <a:solidFill>
                   <a:schemeClr val="accent6">
                     <a:lumMod val="75000"/>
@@ -8088,383 +7743,6 @@
     <p:extLst>
       <p:ext uri="{BB962C8B-B14F-4D97-AF65-F5344CB8AC3E}">
         <p14:creationId xmlns:p14="http://schemas.microsoft.com/office/powerpoint/2010/main" val="3550217860"/>
-      </p:ext>
-    </p:extLst>
-  </p:cSld>
-  <p:clrMapOvr>
-    <a:masterClrMapping/>
-  </p:clrMapOvr>
-</p:sld>
-</file>
-
-<file path=ppt/slides/slide4.xml><?xml version="1.0" encoding="utf-8"?>
-<p:sld xmlns:a="http://schemas.openxmlformats.org/drawingml/2006/main" xmlns:r="http://schemas.openxmlformats.org/officeDocument/2006/relationships" xmlns:p="http://schemas.openxmlformats.org/presentationml/2006/main">
-  <p:cSld>
-    <p:spTree>
-      <p:nvGrpSpPr>
-        <p:cNvPr id="1" name=""/>
-        <p:cNvGrpSpPr/>
-        <p:nvPr/>
-      </p:nvGrpSpPr>
-      <p:grpSpPr>
-        <a:xfrm>
-          <a:off x="0" y="0"/>
-          <a:ext cx="0" cy="0"/>
-          <a:chOff x="0" y="0"/>
-          <a:chExt cx="0" cy="0"/>
-        </a:xfrm>
-      </p:grpSpPr>
-      <p:sp>
-        <p:nvSpPr>
-          <p:cNvPr id="4098" name="Rectangle 2"/>
-          <p:cNvSpPr>
-            <a:spLocks noGrp="1" noChangeArrowheads="1"/>
-          </p:cNvSpPr>
-          <p:nvPr>
-            <p:ph type="body" idx="1"/>
-          </p:nvPr>
-        </p:nvSpPr>
-        <p:spPr>
-          <a:xfrm>
-            <a:off x="539552" y="1448780"/>
-            <a:ext cx="7992888" cy="4932548"/>
-          </a:xfrm>
-        </p:spPr>
-        <p:txBody>
-          <a:bodyPr>
-            <a:noAutofit/>
-          </a:bodyPr>
-          <a:lstStyle/>
-          <a:p>
-            <a:pPr marL="354013" indent="-296863" algn="just">
-              <a:lnSpc>
-                <a:spcPct val="170000"/>
-              </a:lnSpc>
-              <a:spcBef>
-                <a:spcPts val="0"/>
-              </a:spcBef>
-              <a:buFont typeface="+mj-lt"/>
-              <a:buAutoNum type="arabicPeriod" startAt="3"/>
-            </a:pPr>
-            <a:r>
-              <a:rPr lang="es-ES" sz="1600" dirty="0">
-                <a:solidFill>
-                  <a:schemeClr val="bg2">
-                    <a:lumMod val="25000"/>
-                  </a:schemeClr>
-                </a:solidFill>
-                <a:latin typeface="Arial" pitchFamily="34" charset="0"/>
-                <a:cs typeface="Arial" pitchFamily="34" charset="0"/>
-              </a:rPr>
-              <a:t>Importar tu archivo de Excel a Python para iniciar a trabajar.</a:t>
-            </a:r>
-          </a:p>
-          <a:p>
-            <a:pPr indent="-285750" algn="just">
-              <a:lnSpc>
-                <a:spcPct val="170000"/>
-              </a:lnSpc>
-              <a:spcBef>
-                <a:spcPts val="0"/>
-              </a:spcBef>
-              <a:buFont typeface="+mj-lt"/>
-              <a:buAutoNum type="arabicPeriod" startAt="3"/>
-            </a:pPr>
-            <a:r>
-              <a:rPr lang="es-ES" sz="1600" dirty="0">
-                <a:solidFill>
-                  <a:schemeClr val="bg2">
-                    <a:lumMod val="25000"/>
-                  </a:schemeClr>
-                </a:solidFill>
-                <a:latin typeface="Arial" pitchFamily="34" charset="0"/>
-                <a:cs typeface="Arial" pitchFamily="34" charset="0"/>
-              </a:rPr>
-              <a:t>Deberás generar al menos </a:t>
-            </a:r>
-            <a:r>
-              <a:rPr lang="es-ES" sz="1600" b="1" dirty="0">
-                <a:solidFill>
-                  <a:schemeClr val="bg2">
-                    <a:lumMod val="25000"/>
-                  </a:schemeClr>
-                </a:solidFill>
-                <a:latin typeface="Arial" pitchFamily="34" charset="0"/>
-                <a:cs typeface="Arial" pitchFamily="34" charset="0"/>
-              </a:rPr>
-              <a:t>4 preguntas </a:t>
-            </a:r>
-            <a:r>
-              <a:rPr lang="es-ES" sz="1600" dirty="0">
-                <a:solidFill>
-                  <a:schemeClr val="bg2">
-                    <a:lumMod val="25000"/>
-                  </a:schemeClr>
-                </a:solidFill>
-                <a:latin typeface="Arial" pitchFamily="34" charset="0"/>
-                <a:cs typeface="Arial" pitchFamily="34" charset="0"/>
-              </a:rPr>
-              <a:t>que detonen tu análisis, recuerda que cada integrante debe generar al menos una pregunta.</a:t>
-            </a:r>
-          </a:p>
-          <a:p>
-            <a:pPr indent="-285750" algn="just">
-              <a:lnSpc>
-                <a:spcPct val="170000"/>
-              </a:lnSpc>
-              <a:spcBef>
-                <a:spcPts val="0"/>
-              </a:spcBef>
-              <a:buFont typeface="+mj-lt"/>
-              <a:buAutoNum type="arabicPeriod" startAt="3"/>
-            </a:pPr>
-            <a:r>
-              <a:rPr lang="es-ES" sz="1600" dirty="0">
-                <a:solidFill>
-                  <a:schemeClr val="bg2">
-                    <a:lumMod val="25000"/>
-                  </a:schemeClr>
-                </a:solidFill>
-                <a:latin typeface="Arial" pitchFamily="34" charset="0"/>
-                <a:cs typeface="Arial" pitchFamily="34" charset="0"/>
-              </a:rPr>
-              <a:t>Por ejemplo, si tus datos son de ventas y tienes esta información, podrían ser:</a:t>
-            </a:r>
-          </a:p>
-          <a:p>
-            <a:pPr lvl="1" algn="just">
-              <a:lnSpc>
-                <a:spcPct val="170000"/>
-              </a:lnSpc>
-              <a:spcBef>
-                <a:spcPts val="0"/>
-              </a:spcBef>
-              <a:buFont typeface="+mj-lt"/>
-              <a:buAutoNum type="arabicPeriod" startAt="3"/>
-            </a:pPr>
-            <a:r>
-              <a:rPr lang="es-ES" sz="1200" dirty="0">
-                <a:solidFill>
-                  <a:schemeClr val="bg2">
-                    <a:lumMod val="25000"/>
-                  </a:schemeClr>
-                </a:solidFill>
-                <a:latin typeface="Arial" pitchFamily="34" charset="0"/>
-                <a:cs typeface="Arial" pitchFamily="34" charset="0"/>
-              </a:rPr>
-              <a:t>¿Cuáles son las sucursales que más venden?</a:t>
-            </a:r>
-          </a:p>
-          <a:p>
-            <a:pPr lvl="1" algn="just">
-              <a:lnSpc>
-                <a:spcPct val="170000"/>
-              </a:lnSpc>
-              <a:spcBef>
-                <a:spcPts val="0"/>
-              </a:spcBef>
-              <a:buFont typeface="+mj-lt"/>
-              <a:buAutoNum type="arabicPeriod" startAt="3"/>
-            </a:pPr>
-            <a:r>
-              <a:rPr lang="es-ES" sz="1200" dirty="0">
-                <a:solidFill>
-                  <a:schemeClr val="bg2">
-                    <a:lumMod val="25000"/>
-                  </a:schemeClr>
-                </a:solidFill>
-                <a:latin typeface="Arial" pitchFamily="34" charset="0"/>
-                <a:cs typeface="Arial" pitchFamily="34" charset="0"/>
-              </a:rPr>
-              <a:t>¿Cuáles son los productos más vendidos?</a:t>
-            </a:r>
-          </a:p>
-          <a:p>
-            <a:pPr lvl="1" algn="just">
-              <a:lnSpc>
-                <a:spcPct val="170000"/>
-              </a:lnSpc>
-              <a:spcBef>
-                <a:spcPts val="0"/>
-              </a:spcBef>
-              <a:buFont typeface="+mj-lt"/>
-              <a:buAutoNum type="arabicPeriod" startAt="3"/>
-            </a:pPr>
-            <a:r>
-              <a:rPr lang="es-ES" sz="1200" dirty="0">
-                <a:solidFill>
-                  <a:schemeClr val="bg2">
-                    <a:lumMod val="25000"/>
-                  </a:schemeClr>
-                </a:solidFill>
-                <a:latin typeface="Arial" pitchFamily="34" charset="0"/>
-                <a:cs typeface="Arial" pitchFamily="34" charset="0"/>
-              </a:rPr>
-              <a:t>¿Quiénes son mis mejores clientes?</a:t>
-            </a:r>
-          </a:p>
-          <a:p>
-            <a:pPr lvl="1" algn="just">
-              <a:lnSpc>
-                <a:spcPct val="170000"/>
-              </a:lnSpc>
-              <a:spcBef>
-                <a:spcPts val="0"/>
-              </a:spcBef>
-              <a:buFont typeface="+mj-lt"/>
-              <a:buAutoNum type="arabicPeriod" startAt="3"/>
-            </a:pPr>
-            <a:r>
-              <a:rPr lang="es-ES" sz="1200" dirty="0">
-                <a:solidFill>
-                  <a:schemeClr val="bg2">
-                    <a:lumMod val="25000"/>
-                  </a:schemeClr>
-                </a:solidFill>
-                <a:latin typeface="Arial" pitchFamily="34" charset="0"/>
-                <a:cs typeface="Arial" pitchFamily="34" charset="0"/>
-              </a:rPr>
-              <a:t>¿Cuál de mis proveedores tiene el mejor precio?</a:t>
-            </a:r>
-          </a:p>
-          <a:p>
-            <a:pPr indent="-285750" algn="just">
-              <a:lnSpc>
-                <a:spcPct val="170000"/>
-              </a:lnSpc>
-              <a:spcBef>
-                <a:spcPts val="0"/>
-              </a:spcBef>
-              <a:buFont typeface="+mj-lt"/>
-              <a:buAutoNum type="arabicPeriod" startAt="3"/>
-            </a:pPr>
-            <a:r>
-              <a:rPr lang="es-ES" sz="1600" dirty="0">
-                <a:solidFill>
-                  <a:schemeClr val="bg2">
-                    <a:lumMod val="25000"/>
-                  </a:schemeClr>
-                </a:solidFill>
-                <a:latin typeface="Arial" pitchFamily="34" charset="0"/>
-                <a:cs typeface="Arial" pitchFamily="34" charset="0"/>
-              </a:rPr>
-              <a:t>Con base a las preguntas que generaste, extraer la información suficiente y necesaria para dar respuesta a tus preguntas.</a:t>
-            </a:r>
-          </a:p>
-          <a:p>
-            <a:pPr indent="-285750" algn="just">
-              <a:lnSpc>
-                <a:spcPct val="170000"/>
-              </a:lnSpc>
-              <a:spcBef>
-                <a:spcPts val="0"/>
-              </a:spcBef>
-              <a:buFont typeface="+mj-lt"/>
-              <a:buAutoNum type="arabicPeriod" startAt="3"/>
-            </a:pPr>
-            <a:r>
-              <a:rPr lang="es-ES" sz="1600" dirty="0">
-                <a:solidFill>
-                  <a:schemeClr val="bg2">
-                    <a:lumMod val="25000"/>
-                  </a:schemeClr>
-                </a:solidFill>
-                <a:latin typeface="Arial" pitchFamily="34" charset="0"/>
-                <a:cs typeface="Arial" pitchFamily="34" charset="0"/>
-              </a:rPr>
-              <a:t>Aplicar la estadística descriptiva utilizando las herramientas de Python, para “ver la información” que no puedes ver a simple vista.</a:t>
-            </a:r>
-            <a:endParaRPr lang="es-MX" sz="1600" dirty="0">
-              <a:solidFill>
-                <a:schemeClr val="bg2">
-                  <a:lumMod val="25000"/>
-                </a:schemeClr>
-              </a:solidFill>
-              <a:latin typeface="Arial" pitchFamily="34" charset="0"/>
-              <a:cs typeface="Arial" pitchFamily="34" charset="0"/>
-            </a:endParaRPr>
-          </a:p>
-        </p:txBody>
-      </p:sp>
-      <p:sp>
-        <p:nvSpPr>
-          <p:cNvPr id="184324" name="Rectangle 4"/>
-          <p:cNvSpPr>
-            <a:spLocks noGrp="1" noChangeArrowheads="1"/>
-          </p:cNvSpPr>
-          <p:nvPr>
-            <p:ph type="title"/>
-          </p:nvPr>
-        </p:nvSpPr>
-        <p:spPr>
-          <a:xfrm>
-            <a:off x="457200" y="116632"/>
-            <a:ext cx="8229600" cy="1143000"/>
-          </a:xfrm>
-        </p:spPr>
-        <p:txBody>
-          <a:bodyPr>
-            <a:normAutofit fontScale="90000"/>
-          </a:bodyPr>
-          <a:lstStyle/>
-          <a:p>
-            <a:pPr eaLnBrk="1" hangingPunct="1">
-              <a:defRPr/>
-            </a:pPr>
-            <a:r>
-              <a:rPr lang="es-MX" b="1" dirty="0">
-                <a:solidFill>
-                  <a:schemeClr val="accent4">
-                    <a:lumMod val="50000"/>
-                  </a:schemeClr>
-                </a:solidFill>
-                <a:effectLst>
-                  <a:outerShdw blurRad="38100" dist="38100" dir="2700000" algn="tl">
-                    <a:srgbClr val="C0C0C0"/>
-                  </a:outerShdw>
-                </a:effectLst>
-                <a:latin typeface="Dom Casual" charset="0"/>
-              </a:rPr>
-              <a:t>Situación problema</a:t>
-            </a:r>
-            <a:br>
-              <a:rPr lang="es-MX" b="1" dirty="0">
-                <a:solidFill>
-                  <a:schemeClr val="accent4">
-                    <a:lumMod val="50000"/>
-                  </a:schemeClr>
-                </a:solidFill>
-                <a:effectLst>
-                  <a:outerShdw blurRad="38100" dist="38100" dir="2700000" algn="tl">
-                    <a:srgbClr val="C0C0C0"/>
-                  </a:outerShdw>
-                </a:effectLst>
-                <a:latin typeface="Dom Casual" charset="0"/>
-              </a:rPr>
-            </a:br>
-            <a:r>
-              <a:rPr lang="es-MX" sz="3100" dirty="0">
-                <a:solidFill>
-                  <a:schemeClr val="accent6">
-                    <a:lumMod val="75000"/>
-                  </a:schemeClr>
-                </a:solidFill>
-                <a:effectLst>
-                  <a:outerShdw blurRad="38100" dist="38100" dir="2700000" algn="tl">
-                    <a:srgbClr val="C0C0C0"/>
-                  </a:outerShdw>
-                </a:effectLst>
-                <a:latin typeface="Dom Casual" charset="0"/>
-              </a:rPr>
-              <a:t>Segunda entrega</a:t>
-            </a:r>
-          </a:p>
-        </p:txBody>
-      </p:sp>
-    </p:spTree>
-    <p:extLst>
-      <p:ext uri="{BB962C8B-B14F-4D97-AF65-F5344CB8AC3E}">
-        <p14:creationId xmlns:p14="http://schemas.microsoft.com/office/powerpoint/2010/main" val="2680330102"/>
       </p:ext>
     </p:extLst>
   </p:cSld>
@@ -8491,6 +7769,36 @@
           <a:chExt cx="0" cy="0"/>
         </a:xfrm>
       </p:grpSpPr>
+      <p:pic>
+        <p:nvPicPr>
+          <p:cNvPr id="3" name="Imagen 2">
+            <a:extLst>
+              <a:ext uri="{FF2B5EF4-FFF2-40B4-BE49-F238E27FC236}">
+                <a16:creationId xmlns:a16="http://schemas.microsoft.com/office/drawing/2014/main" id="{DEEDC082-4811-8F4F-7D5C-C7E129D3E487}"/>
+              </a:ext>
+            </a:extLst>
+          </p:cNvPr>
+          <p:cNvPicPr>
+            <a:picLocks noChangeAspect="1"/>
+          </p:cNvPicPr>
+          <p:nvPr/>
+        </p:nvPicPr>
+        <p:blipFill>
+          <a:blip r:embed="rId2"/>
+          <a:stretch>
+            <a:fillRect/>
+          </a:stretch>
+        </p:blipFill>
+        <p:spPr>
+          <a:xfrm>
+            <a:off x="6408204" y="5013176"/>
+            <a:ext cx="2160240" cy="1617466"/>
+          </a:xfrm>
+          <a:prstGeom prst="rect">
+            <a:avLst/>
+          </a:prstGeom>
+        </p:spPr>
+      </p:pic>
       <p:sp>
         <p:nvSpPr>
           <p:cNvPr id="4098" name="Rectangle 2"/>
@@ -8503,8 +7811,8 @@
         </p:nvSpPr>
         <p:spPr>
           <a:xfrm>
-            <a:off x="457200" y="1484784"/>
-            <a:ext cx="8147248" cy="5076564"/>
+            <a:off x="575556" y="1412776"/>
+            <a:ext cx="8316924" cy="4284476"/>
           </a:xfrm>
         </p:spPr>
         <p:txBody>
@@ -8513,286 +7821,247 @@
           </a:bodyPr>
           <a:lstStyle/>
           <a:p>
-            <a:pPr marL="354013" indent="-296863" algn="just">
+            <a:pPr lvl="0">
               <a:lnSpc>
-                <a:spcPct val="170000"/>
+                <a:spcPct val="150000"/>
               </a:lnSpc>
-              <a:spcBef>
-                <a:spcPts val="0"/>
-              </a:spcBef>
               <a:buFont typeface="+mj-lt"/>
-              <a:buAutoNum type="arabicPeriod" startAt="8"/>
+              <a:buAutoNum type="arabicPeriod"/>
             </a:pPr>
             <a:r>
-              <a:rPr lang="es-ES" sz="1600" dirty="0">
-                <a:solidFill>
-                  <a:schemeClr val="bg2">
-                    <a:lumMod val="25000"/>
-                  </a:schemeClr>
-                </a:solidFill>
-                <a:latin typeface="Arial" pitchFamily="34" charset="0"/>
-                <a:cs typeface="Arial" pitchFamily="34" charset="0"/>
-              </a:rPr>
-              <a:t>Representa la solución de tus preguntas detonadoras a través de gráficos. Sé creativo y muestra al menos 4 indicadores relevantes de los datos analizados.</a:t>
-            </a:r>
-          </a:p>
-          <a:p>
-            <a:pPr indent="-285750" algn="just">
+              <a:rPr lang="es-MX" sz="1600" b="1" dirty="0">
+                <a:solidFill>
+                  <a:schemeClr val="bg2">
+                    <a:lumMod val="25000"/>
+                  </a:schemeClr>
+                </a:solidFill>
+                <a:latin typeface="Arial" pitchFamily="34" charset="0"/>
+                <a:cs typeface="Arial" pitchFamily="34" charset="0"/>
+              </a:rPr>
+              <a:t>Definir de cuatro a seis preguntas detonadoras </a:t>
+            </a:r>
+            <a:r>
+              <a:rPr lang="es-MX" sz="1600" dirty="0">
+                <a:solidFill>
+                  <a:schemeClr val="bg2">
+                    <a:lumMod val="25000"/>
+                  </a:schemeClr>
+                </a:solidFill>
+                <a:latin typeface="Arial" pitchFamily="34" charset="0"/>
+                <a:cs typeface="Arial" pitchFamily="34" charset="0"/>
+              </a:rPr>
+              <a:t>entre los miembros del equipo. Por ejemplo, si los datos son de ventas, algunas preguntas podrían ser: </a:t>
+            </a:r>
+          </a:p>
+          <a:p>
+            <a:pPr lvl="1">
               <a:lnSpc>
-                <a:spcPct val="170000"/>
+                <a:spcPct val="150000"/>
               </a:lnSpc>
-              <a:spcBef>
-                <a:spcPts val="0"/>
-              </a:spcBef>
+            </a:pPr>
+            <a:r>
+              <a:rPr lang="es-MX" sz="1400" dirty="0">
+                <a:solidFill>
+                  <a:schemeClr val="bg2">
+                    <a:lumMod val="25000"/>
+                  </a:schemeClr>
+                </a:solidFill>
+                <a:latin typeface="Arial" pitchFamily="34" charset="0"/>
+                <a:cs typeface="Arial" pitchFamily="34" charset="0"/>
+              </a:rPr>
+              <a:t>¿Cuáles son las sucursales que más venden? </a:t>
+            </a:r>
+          </a:p>
+          <a:p>
+            <a:pPr lvl="1">
+              <a:lnSpc>
+                <a:spcPct val="150000"/>
+              </a:lnSpc>
+            </a:pPr>
+            <a:r>
+              <a:rPr lang="es-MX" sz="1400" dirty="0">
+                <a:solidFill>
+                  <a:schemeClr val="bg2">
+                    <a:lumMod val="25000"/>
+                  </a:schemeClr>
+                </a:solidFill>
+                <a:latin typeface="Arial" pitchFamily="34" charset="0"/>
+                <a:cs typeface="Arial" pitchFamily="34" charset="0"/>
+              </a:rPr>
+              <a:t>¿Cuáles son los productos más vendidos? </a:t>
+            </a:r>
+          </a:p>
+          <a:p>
+            <a:pPr lvl="1">
+              <a:lnSpc>
+                <a:spcPct val="150000"/>
+              </a:lnSpc>
+            </a:pPr>
+            <a:r>
+              <a:rPr lang="es-MX" sz="1400" dirty="0">
+                <a:solidFill>
+                  <a:schemeClr val="bg2">
+                    <a:lumMod val="25000"/>
+                  </a:schemeClr>
+                </a:solidFill>
+                <a:latin typeface="Arial" pitchFamily="34" charset="0"/>
+                <a:cs typeface="Arial" pitchFamily="34" charset="0"/>
+              </a:rPr>
+              <a:t>¿Quiénes son mis mejores clientes? </a:t>
+            </a:r>
+          </a:p>
+          <a:p>
+            <a:pPr lvl="1">
+              <a:lnSpc>
+                <a:spcPct val="150000"/>
+              </a:lnSpc>
+            </a:pPr>
+            <a:r>
+              <a:rPr lang="es-MX" sz="1400" dirty="0">
+                <a:solidFill>
+                  <a:schemeClr val="bg2">
+                    <a:lumMod val="25000"/>
+                  </a:schemeClr>
+                </a:solidFill>
+                <a:latin typeface="Arial" pitchFamily="34" charset="0"/>
+                <a:cs typeface="Arial" pitchFamily="34" charset="0"/>
+              </a:rPr>
+              <a:t>¿Cuál de mis proveedores tiene el mejor precio? </a:t>
+            </a:r>
+          </a:p>
+          <a:p>
+            <a:pPr lvl="0">
+              <a:lnSpc>
+                <a:spcPct val="150000"/>
+              </a:lnSpc>
               <a:buFont typeface="+mj-lt"/>
-              <a:buAutoNum type="arabicPeriod" startAt="8"/>
+              <a:buAutoNum type="arabicPeriod"/>
             </a:pPr>
             <a:r>
-              <a:rPr lang="es-ES" sz="1600" dirty="0">
-                <a:solidFill>
-                  <a:schemeClr val="bg2">
-                    <a:lumMod val="25000"/>
-                  </a:schemeClr>
-                </a:solidFill>
-                <a:latin typeface="Arial" pitchFamily="34" charset="0"/>
-                <a:cs typeface="Arial" pitchFamily="34" charset="0"/>
-              </a:rPr>
-              <a:t>Genera tu propuesta de acciones que aporten valor a las estrategias que deberá tomar el negocio, esto de acuerdo a la problemática planteada.</a:t>
-            </a:r>
-          </a:p>
-          <a:p>
-            <a:pPr indent="-285750" algn="just">
+              <a:rPr lang="es-MX" sz="1600" b="1" dirty="0">
+                <a:solidFill>
+                  <a:schemeClr val="bg2">
+                    <a:lumMod val="25000"/>
+                  </a:schemeClr>
+                </a:solidFill>
+                <a:latin typeface="Arial" pitchFamily="34" charset="0"/>
+                <a:cs typeface="Arial" pitchFamily="34" charset="0"/>
+              </a:rPr>
+              <a:t>Selección de preguntas: </a:t>
+            </a:r>
+            <a:r>
+              <a:rPr lang="es-MX" sz="1600" dirty="0">
+                <a:solidFill>
+                  <a:schemeClr val="bg2">
+                    <a:lumMod val="25000"/>
+                  </a:schemeClr>
+                </a:solidFill>
+                <a:latin typeface="Arial" pitchFamily="34" charset="0"/>
+                <a:cs typeface="Arial" pitchFamily="34" charset="0"/>
+              </a:rPr>
+              <a:t>Cada integrante del equipo seleccionará dos o tres preguntas detonadoras con las que trabajará en la situación problema. </a:t>
+            </a:r>
+          </a:p>
+          <a:p>
+            <a:pPr lvl="0">
               <a:lnSpc>
-                <a:spcPct val="170000"/>
+                <a:spcPct val="150000"/>
               </a:lnSpc>
-              <a:spcBef>
-                <a:spcPts val="0"/>
-              </a:spcBef>
               <a:buFont typeface="+mj-lt"/>
-              <a:buAutoNum type="arabicPeriod" startAt="8"/>
+              <a:buAutoNum type="arabicPeriod"/>
             </a:pPr>
             <a:r>
-              <a:rPr lang="es-ES" sz="1600" dirty="0">
-                <a:solidFill>
-                  <a:schemeClr val="bg2">
-                    <a:lumMod val="25000"/>
-                  </a:schemeClr>
-                </a:solidFill>
-                <a:latin typeface="Arial" pitchFamily="34" charset="0"/>
-                <a:cs typeface="Arial" pitchFamily="34" charset="0"/>
-              </a:rPr>
-              <a:t>Deberás especificar las acciones del código de Ética que aplicarás en la solución planteada.</a:t>
-            </a:r>
-          </a:p>
-          <a:p>
-            <a:pPr lvl="1" algn="just">
+              <a:rPr lang="es-MX" sz="1600" b="1" dirty="0">
+                <a:solidFill>
+                  <a:schemeClr val="bg2">
+                    <a:lumMod val="25000"/>
+                  </a:schemeClr>
+                </a:solidFill>
+                <a:latin typeface="Arial" pitchFamily="34" charset="0"/>
+                <a:cs typeface="Arial" pitchFamily="34" charset="0"/>
+              </a:rPr>
+              <a:t>Cargar la información: </a:t>
+            </a:r>
+            <a:r>
+              <a:rPr lang="es-MX" sz="1600" dirty="0">
+                <a:solidFill>
+                  <a:schemeClr val="bg2">
+                    <a:lumMod val="25000"/>
+                  </a:schemeClr>
+                </a:solidFill>
+                <a:latin typeface="Arial" pitchFamily="34" charset="0"/>
+                <a:cs typeface="Arial" pitchFamily="34" charset="0"/>
+              </a:rPr>
+              <a:t>Importar el archivo de Excel (entrega1.xlsx) en Python y cargar los datos en un </a:t>
+            </a:r>
+            <a:r>
+              <a:rPr lang="es-MX" sz="1600" dirty="0" err="1">
+                <a:solidFill>
+                  <a:schemeClr val="bg2">
+                    <a:lumMod val="25000"/>
+                  </a:schemeClr>
+                </a:solidFill>
+                <a:latin typeface="Arial" pitchFamily="34" charset="0"/>
+                <a:cs typeface="Arial" pitchFamily="34" charset="0"/>
+              </a:rPr>
+              <a:t>Dataframe</a:t>
+            </a:r>
+            <a:r>
+              <a:rPr lang="es-MX" sz="1600" dirty="0">
+                <a:solidFill>
+                  <a:schemeClr val="bg2">
+                    <a:lumMod val="25000"/>
+                  </a:schemeClr>
+                </a:solidFill>
+                <a:latin typeface="Arial" pitchFamily="34" charset="0"/>
+                <a:cs typeface="Arial" pitchFamily="34" charset="0"/>
+              </a:rPr>
+              <a:t> para comenzar a trabajar. </a:t>
+            </a:r>
+          </a:p>
+          <a:p>
+            <a:pPr lvl="0">
               <a:lnSpc>
-                <a:spcPct val="170000"/>
+                <a:spcPct val="150000"/>
               </a:lnSpc>
-              <a:spcBef>
-                <a:spcPts val="0"/>
-              </a:spcBef>
+              <a:buFont typeface="+mj-lt"/>
+              <a:buAutoNum type="arabicPeriod"/>
             </a:pPr>
             <a:r>
-              <a:rPr lang="es-ES" sz="1600" dirty="0">
-                <a:solidFill>
-                  <a:schemeClr val="bg2">
-                    <a:lumMod val="25000"/>
-                  </a:schemeClr>
-                </a:solidFill>
-                <a:latin typeface="Arial" pitchFamily="34" charset="0"/>
-                <a:cs typeface="Arial" pitchFamily="34" charset="0"/>
-              </a:rPr>
-              <a:t>Código de ética CACEI: </a:t>
-            </a:r>
-            <a:r>
-              <a:rPr lang="es-ES" sz="1600" dirty="0">
-                <a:solidFill>
-                  <a:schemeClr val="bg2">
-                    <a:lumMod val="25000"/>
-                  </a:schemeClr>
-                </a:solidFill>
-                <a:latin typeface="Arial" pitchFamily="34" charset="0"/>
-                <a:cs typeface="Arial" pitchFamily="34" charset="0"/>
-                <a:hlinkClick r:id="rId2"/>
-              </a:rPr>
-              <a:t>http://www.cacei.org/docs/codigo_etica.pdf</a:t>
-            </a:r>
-            <a:endParaRPr lang="es-ES" sz="1600" dirty="0">
-              <a:solidFill>
-                <a:schemeClr val="bg2">
-                  <a:lumMod val="25000"/>
-                </a:schemeClr>
-              </a:solidFill>
-              <a:latin typeface="Arial" pitchFamily="34" charset="0"/>
-              <a:cs typeface="Arial" pitchFamily="34" charset="0"/>
-            </a:endParaRPr>
-          </a:p>
-          <a:p>
-            <a:pPr lvl="1" algn="just">
-              <a:lnSpc>
-                <a:spcPct val="170000"/>
-              </a:lnSpc>
-              <a:spcBef>
-                <a:spcPts val="0"/>
-              </a:spcBef>
-            </a:pPr>
-            <a:r>
-              <a:rPr lang="es-ES" sz="1600" dirty="0" err="1">
-                <a:solidFill>
-                  <a:schemeClr val="bg2">
-                    <a:lumMod val="25000"/>
-                  </a:schemeClr>
-                </a:solidFill>
-                <a:latin typeface="Arial" pitchFamily="34" charset="0"/>
-                <a:cs typeface="Arial" pitchFamily="34" charset="0"/>
-              </a:rPr>
-              <a:t>The</a:t>
-            </a:r>
-            <a:r>
-              <a:rPr lang="es-ES" sz="1600" dirty="0">
-                <a:solidFill>
-                  <a:schemeClr val="bg2">
-                    <a:lumMod val="25000"/>
-                  </a:schemeClr>
-                </a:solidFill>
-                <a:latin typeface="Arial" pitchFamily="34" charset="0"/>
-                <a:cs typeface="Arial" pitchFamily="34" charset="0"/>
-              </a:rPr>
-              <a:t> Software </a:t>
-            </a:r>
-            <a:r>
-              <a:rPr lang="es-ES" sz="1600" dirty="0" err="1">
-                <a:solidFill>
-                  <a:schemeClr val="bg2">
-                    <a:lumMod val="25000"/>
-                  </a:schemeClr>
-                </a:solidFill>
-                <a:latin typeface="Arial" pitchFamily="34" charset="0"/>
-                <a:cs typeface="Arial" pitchFamily="34" charset="0"/>
-              </a:rPr>
-              <a:t>Engineering</a:t>
-            </a:r>
-            <a:r>
-              <a:rPr lang="es-ES" sz="1600" dirty="0">
-                <a:solidFill>
-                  <a:schemeClr val="bg2">
-                    <a:lumMod val="25000"/>
-                  </a:schemeClr>
-                </a:solidFill>
-                <a:latin typeface="Arial" pitchFamily="34" charset="0"/>
-                <a:cs typeface="Arial" pitchFamily="34" charset="0"/>
-              </a:rPr>
-              <a:t> </a:t>
-            </a:r>
-            <a:r>
-              <a:rPr lang="es-ES" sz="1600" dirty="0" err="1">
-                <a:solidFill>
-                  <a:schemeClr val="bg2">
-                    <a:lumMod val="25000"/>
-                  </a:schemeClr>
-                </a:solidFill>
-                <a:latin typeface="Arial" pitchFamily="34" charset="0"/>
-                <a:cs typeface="Arial" pitchFamily="34" charset="0"/>
-              </a:rPr>
-              <a:t>Code</a:t>
-            </a:r>
-            <a:r>
-              <a:rPr lang="es-ES" sz="1600" dirty="0">
-                <a:solidFill>
-                  <a:schemeClr val="bg2">
-                    <a:lumMod val="25000"/>
-                  </a:schemeClr>
-                </a:solidFill>
-                <a:latin typeface="Arial" pitchFamily="34" charset="0"/>
-                <a:cs typeface="Arial" pitchFamily="34" charset="0"/>
-              </a:rPr>
-              <a:t> </a:t>
-            </a:r>
-            <a:r>
-              <a:rPr lang="es-ES" sz="1600" dirty="0" err="1">
-                <a:solidFill>
-                  <a:schemeClr val="bg2">
-                    <a:lumMod val="25000"/>
-                  </a:schemeClr>
-                </a:solidFill>
-                <a:latin typeface="Arial" pitchFamily="34" charset="0"/>
-                <a:cs typeface="Arial" pitchFamily="34" charset="0"/>
-              </a:rPr>
-              <a:t>of</a:t>
-            </a:r>
-            <a:r>
-              <a:rPr lang="es-ES" sz="1600" dirty="0">
-                <a:solidFill>
-                  <a:schemeClr val="bg2">
-                    <a:lumMod val="25000"/>
-                  </a:schemeClr>
-                </a:solidFill>
-                <a:latin typeface="Arial" pitchFamily="34" charset="0"/>
-                <a:cs typeface="Arial" pitchFamily="34" charset="0"/>
-              </a:rPr>
-              <a:t> </a:t>
-            </a:r>
-            <a:r>
-              <a:rPr lang="es-ES" sz="1600" dirty="0" err="1">
-                <a:solidFill>
-                  <a:schemeClr val="bg2">
-                    <a:lumMod val="25000"/>
-                  </a:schemeClr>
-                </a:solidFill>
-                <a:latin typeface="Arial" pitchFamily="34" charset="0"/>
-                <a:cs typeface="Arial" pitchFamily="34" charset="0"/>
-              </a:rPr>
-              <a:t>Ethics</a:t>
-            </a:r>
-            <a:r>
-              <a:rPr lang="es-ES" sz="1600" dirty="0">
-                <a:solidFill>
-                  <a:schemeClr val="bg2">
-                    <a:lumMod val="25000"/>
-                  </a:schemeClr>
-                </a:solidFill>
-                <a:latin typeface="Arial" pitchFamily="34" charset="0"/>
-                <a:cs typeface="Arial" pitchFamily="34" charset="0"/>
-              </a:rPr>
-              <a:t> and Professional </a:t>
-            </a:r>
-            <a:r>
-              <a:rPr lang="es-ES" sz="1600" dirty="0" err="1">
-                <a:solidFill>
-                  <a:schemeClr val="bg2">
-                    <a:lumMod val="25000"/>
-                  </a:schemeClr>
-                </a:solidFill>
-                <a:latin typeface="Arial" pitchFamily="34" charset="0"/>
-                <a:cs typeface="Arial" pitchFamily="34" charset="0"/>
-              </a:rPr>
-              <a:t>Practice</a:t>
-            </a:r>
-            <a:r>
-              <a:rPr lang="es-ES" sz="1600" dirty="0">
-                <a:solidFill>
-                  <a:schemeClr val="bg2">
-                    <a:lumMod val="25000"/>
-                  </a:schemeClr>
-                </a:solidFill>
-                <a:latin typeface="Arial" pitchFamily="34" charset="0"/>
-                <a:cs typeface="Arial" pitchFamily="34" charset="0"/>
-              </a:rPr>
-              <a:t> - ACM/IEEE-CS:  </a:t>
-            </a:r>
-            <a:r>
-              <a:rPr lang="es-ES" sz="1600" dirty="0">
-                <a:solidFill>
-                  <a:schemeClr val="bg2">
-                    <a:lumMod val="25000"/>
-                  </a:schemeClr>
-                </a:solidFill>
-                <a:latin typeface="Arial" pitchFamily="34" charset="0"/>
-                <a:cs typeface="Arial" pitchFamily="34" charset="0"/>
-                <a:hlinkClick r:id="rId3"/>
-              </a:rPr>
-              <a:t>https://ethics.acm.org/code-of-ethics/software-engineering-code/</a:t>
+              <a:rPr lang="es-MX" sz="1600" b="1" dirty="0">
+                <a:solidFill>
+                  <a:schemeClr val="bg2">
+                    <a:lumMod val="25000"/>
+                  </a:schemeClr>
+                </a:solidFill>
+                <a:latin typeface="Arial" pitchFamily="34" charset="0"/>
+                <a:cs typeface="Arial" pitchFamily="34" charset="0"/>
+              </a:rPr>
+              <a:t>Imprimir el </a:t>
+            </a:r>
+            <a:r>
+              <a:rPr lang="es-MX" sz="1600" b="1" dirty="0" err="1">
+                <a:solidFill>
+                  <a:schemeClr val="bg2">
+                    <a:lumMod val="25000"/>
+                  </a:schemeClr>
+                </a:solidFill>
+                <a:latin typeface="Arial" pitchFamily="34" charset="0"/>
+                <a:cs typeface="Arial" pitchFamily="34" charset="0"/>
+              </a:rPr>
+              <a:t>Dataframe</a:t>
+            </a:r>
+            <a:r>
+              <a:rPr lang="es-MX" sz="1600" b="1" dirty="0">
+                <a:solidFill>
+                  <a:schemeClr val="bg2">
+                    <a:lumMod val="25000"/>
+                  </a:schemeClr>
+                </a:solidFill>
+                <a:latin typeface="Arial" pitchFamily="34" charset="0"/>
+                <a:cs typeface="Arial" pitchFamily="34" charset="0"/>
+              </a:rPr>
+              <a:t>.</a:t>
             </a:r>
             <a:endParaRPr lang="es-MX" sz="1600" dirty="0">
               <a:solidFill>
@@ -8863,7 +8132,7 @@
               </a:rPr>
             </a:br>
             <a:r>
-              <a:rPr lang="es-MX" sz="3100" dirty="0">
+              <a:rPr lang="es-MX" sz="3100" b="1" dirty="0">
                 <a:solidFill>
                   <a:schemeClr val="accent6">
                     <a:lumMod val="75000"/>
@@ -8884,7 +8153,7 @@
     </p:spTree>
     <p:extLst>
       <p:ext uri="{BB962C8B-B14F-4D97-AF65-F5344CB8AC3E}">
-        <p14:creationId xmlns:p14="http://schemas.microsoft.com/office/powerpoint/2010/main" val="3734763544"/>
+        <p14:creationId xmlns:p14="http://schemas.microsoft.com/office/powerpoint/2010/main" val="2680330102"/>
       </p:ext>
     </p:extLst>
   </p:cSld>
@@ -8895,6 +8164,314 @@
 </file>
 
 <file path=ppt/slides/slide6.xml><?xml version="1.0" encoding="utf-8"?>
+<p:sld xmlns:a="http://schemas.openxmlformats.org/drawingml/2006/main" xmlns:r="http://schemas.openxmlformats.org/officeDocument/2006/relationships" xmlns:p="http://schemas.openxmlformats.org/presentationml/2006/main">
+  <p:cSld>
+    <p:spTree>
+      <p:nvGrpSpPr>
+        <p:cNvPr id="1" name="">
+          <a:extLst>
+            <a:ext uri="{FF2B5EF4-FFF2-40B4-BE49-F238E27FC236}">
+              <a16:creationId xmlns:a16="http://schemas.microsoft.com/office/drawing/2014/main" id="{EB7F8B43-C383-2B25-3172-E613FD17971F}"/>
+            </a:ext>
+          </a:extLst>
+        </p:cNvPr>
+        <p:cNvGrpSpPr/>
+        <p:nvPr/>
+      </p:nvGrpSpPr>
+      <p:grpSpPr>
+        <a:xfrm>
+          <a:off x="0" y="0"/>
+          <a:ext cx="0" cy="0"/>
+          <a:chOff x="0" y="0"/>
+          <a:chExt cx="0" cy="0"/>
+        </a:xfrm>
+      </p:grpSpPr>
+      <p:sp>
+        <p:nvSpPr>
+          <p:cNvPr id="4098" name="Rectangle 2">
+            <a:extLst>
+              <a:ext uri="{FF2B5EF4-FFF2-40B4-BE49-F238E27FC236}">
+                <a16:creationId xmlns:a16="http://schemas.microsoft.com/office/drawing/2014/main" id="{6363BDEF-826F-35BA-7B9E-8E60FC54A4E6}"/>
+              </a:ext>
+            </a:extLst>
+          </p:cNvPr>
+          <p:cNvSpPr>
+            <a:spLocks noGrp="1" noChangeArrowheads="1"/>
+          </p:cNvSpPr>
+          <p:nvPr>
+            <p:ph type="body" idx="1"/>
+          </p:nvPr>
+        </p:nvSpPr>
+        <p:spPr>
+          <a:xfrm>
+            <a:off x="575556" y="1628800"/>
+            <a:ext cx="8028892" cy="2952328"/>
+          </a:xfrm>
+        </p:spPr>
+        <p:txBody>
+          <a:bodyPr>
+            <a:noAutofit/>
+          </a:bodyPr>
+          <a:lstStyle/>
+          <a:p>
+            <a:pPr lvl="0">
+              <a:lnSpc>
+                <a:spcPct val="150000"/>
+              </a:lnSpc>
+              <a:buFont typeface="+mj-lt"/>
+              <a:buAutoNum type="arabicPeriod"/>
+            </a:pPr>
+            <a:r>
+              <a:rPr lang="es-MX" sz="1600" b="1" dirty="0">
+                <a:solidFill>
+                  <a:schemeClr val="bg2">
+                    <a:lumMod val="25000"/>
+                  </a:schemeClr>
+                </a:solidFill>
+                <a:latin typeface="Arial" pitchFamily="34" charset="0"/>
+                <a:cs typeface="Arial" pitchFamily="34" charset="0"/>
+              </a:rPr>
+              <a:t>Extraer </a:t>
+            </a:r>
+            <a:r>
+              <a:rPr lang="es-MX" sz="1600" dirty="0">
+                <a:solidFill>
+                  <a:schemeClr val="bg2">
+                    <a:lumMod val="25000"/>
+                  </a:schemeClr>
+                </a:solidFill>
+                <a:latin typeface="Arial" pitchFamily="34" charset="0"/>
+                <a:cs typeface="Arial" pitchFamily="34" charset="0"/>
+              </a:rPr>
+              <a:t>la información necesaria y suficiente para dar respuesta a tus preguntas. </a:t>
+            </a:r>
+          </a:p>
+          <a:p>
+            <a:pPr lvl="0">
+              <a:lnSpc>
+                <a:spcPct val="150000"/>
+              </a:lnSpc>
+              <a:buFont typeface="+mj-lt"/>
+              <a:buAutoNum type="arabicPeriod"/>
+            </a:pPr>
+            <a:r>
+              <a:rPr lang="es-MX" sz="1600" b="1" dirty="0">
+                <a:solidFill>
+                  <a:schemeClr val="bg2">
+                    <a:lumMod val="25000"/>
+                  </a:schemeClr>
+                </a:solidFill>
+                <a:latin typeface="Arial" pitchFamily="34" charset="0"/>
+                <a:cs typeface="Arial" pitchFamily="34" charset="0"/>
+              </a:rPr>
+              <a:t>Aplicar </a:t>
+            </a:r>
+            <a:r>
+              <a:rPr lang="es-MX" sz="1600" dirty="0">
+                <a:solidFill>
+                  <a:schemeClr val="bg2">
+                    <a:lumMod val="25000"/>
+                  </a:schemeClr>
+                </a:solidFill>
+                <a:latin typeface="Arial" pitchFamily="34" charset="0"/>
+                <a:cs typeface="Arial" pitchFamily="34" charset="0"/>
+              </a:rPr>
+              <a:t>estadística descriptiva mediante herramientas de Python para visibilizar datos que no se perciben a simple vista. </a:t>
+            </a:r>
+          </a:p>
+          <a:p>
+            <a:pPr lvl="0">
+              <a:lnSpc>
+                <a:spcPct val="150000"/>
+              </a:lnSpc>
+              <a:buFont typeface="+mj-lt"/>
+              <a:buAutoNum type="arabicPeriod"/>
+            </a:pPr>
+            <a:r>
+              <a:rPr lang="es-MX" sz="1600" b="1" dirty="0">
+                <a:solidFill>
+                  <a:schemeClr val="bg2">
+                    <a:lumMod val="25000"/>
+                  </a:schemeClr>
+                </a:solidFill>
+                <a:latin typeface="Arial" pitchFamily="34" charset="0"/>
+                <a:cs typeface="Arial" pitchFamily="34" charset="0"/>
+              </a:rPr>
+              <a:t>Representar </a:t>
+            </a:r>
+            <a:r>
+              <a:rPr lang="es-MX" sz="1600" dirty="0">
+                <a:solidFill>
+                  <a:schemeClr val="bg2">
+                    <a:lumMod val="25000"/>
+                  </a:schemeClr>
+                </a:solidFill>
+                <a:latin typeface="Arial" pitchFamily="34" charset="0"/>
+                <a:cs typeface="Arial" pitchFamily="34" charset="0"/>
+              </a:rPr>
+              <a:t>las respuestas a tus preguntas detonadoras a través de gráficas. </a:t>
+            </a:r>
+          </a:p>
+          <a:p>
+            <a:pPr lvl="0">
+              <a:lnSpc>
+                <a:spcPct val="150000"/>
+              </a:lnSpc>
+              <a:buFont typeface="+mj-lt"/>
+              <a:buAutoNum type="arabicPeriod"/>
+            </a:pPr>
+            <a:r>
+              <a:rPr lang="es-MX" sz="1600" b="1" dirty="0">
+                <a:solidFill>
+                  <a:schemeClr val="bg2">
+                    <a:lumMod val="25000"/>
+                  </a:schemeClr>
+                </a:solidFill>
+                <a:latin typeface="Arial" pitchFamily="34" charset="0"/>
+                <a:cs typeface="Arial" pitchFamily="34" charset="0"/>
+              </a:rPr>
+              <a:t>Explicar </a:t>
+            </a:r>
+            <a:r>
+              <a:rPr lang="es-MX" sz="1600" dirty="0">
+                <a:solidFill>
+                  <a:schemeClr val="bg2">
+                    <a:lumMod val="25000"/>
+                  </a:schemeClr>
+                </a:solidFill>
+                <a:latin typeface="Arial" pitchFamily="34" charset="0"/>
+                <a:cs typeface="Arial" pitchFamily="34" charset="0"/>
+              </a:rPr>
+              <a:t>los resultados mostrados en tus gráficas y generar una propuesta de acciones que aporte valor a las decisiones estratégicas del negocio, de acuerdo con la problemática planteada. </a:t>
+            </a:r>
+          </a:p>
+        </p:txBody>
+      </p:sp>
+      <p:sp>
+        <p:nvSpPr>
+          <p:cNvPr id="184324" name="Rectangle 4">
+            <a:extLst>
+              <a:ext uri="{FF2B5EF4-FFF2-40B4-BE49-F238E27FC236}">
+                <a16:creationId xmlns:a16="http://schemas.microsoft.com/office/drawing/2014/main" id="{14E02352-C507-6518-7E5B-492B2742BB8F}"/>
+              </a:ext>
+            </a:extLst>
+          </p:cNvPr>
+          <p:cNvSpPr>
+            <a:spLocks noGrp="1" noChangeArrowheads="1"/>
+          </p:cNvSpPr>
+          <p:nvPr>
+            <p:ph type="title"/>
+          </p:nvPr>
+        </p:nvSpPr>
+        <p:spPr>
+          <a:xfrm>
+            <a:off x="457200" y="116632"/>
+            <a:ext cx="8229600" cy="1143000"/>
+          </a:xfrm>
+        </p:spPr>
+        <p:txBody>
+          <a:bodyPr>
+            <a:normAutofit fontScale="90000"/>
+          </a:bodyPr>
+          <a:lstStyle/>
+          <a:p>
+            <a:pPr eaLnBrk="1" hangingPunct="1">
+              <a:defRPr/>
+            </a:pPr>
+            <a:r>
+              <a:rPr lang="es-MX" b="1" dirty="0">
+                <a:solidFill>
+                  <a:schemeClr val="accent4">
+                    <a:lumMod val="50000"/>
+                  </a:schemeClr>
+                </a:solidFill>
+                <a:effectLst>
+                  <a:outerShdw blurRad="38100" dist="38100" dir="2700000" algn="tl">
+                    <a:srgbClr val="C0C0C0"/>
+                  </a:outerShdw>
+                </a:effectLst>
+                <a:latin typeface="Dom Casual" charset="0"/>
+              </a:rPr>
+              <a:t>Situación problema</a:t>
+            </a:r>
+            <a:br>
+              <a:rPr lang="es-MX" b="1" dirty="0">
+                <a:solidFill>
+                  <a:schemeClr val="accent4">
+                    <a:lumMod val="50000"/>
+                  </a:schemeClr>
+                </a:solidFill>
+                <a:effectLst>
+                  <a:outerShdw blurRad="38100" dist="38100" dir="2700000" algn="tl">
+                    <a:srgbClr val="C0C0C0"/>
+                  </a:outerShdw>
+                </a:effectLst>
+                <a:latin typeface="Dom Casual" charset="0"/>
+              </a:rPr>
+            </a:br>
+            <a:r>
+              <a:rPr lang="es-MX" sz="3100" b="1" dirty="0">
+                <a:solidFill>
+                  <a:schemeClr val="accent6">
+                    <a:lumMod val="75000"/>
+                  </a:schemeClr>
+                </a:solidFill>
+                <a:effectLst>
+                  <a:outerShdw blurRad="38100" dist="38100" dir="2700000" algn="tl">
+                    <a:srgbClr val="C0C0C0"/>
+                  </a:outerShdw>
+                </a:effectLst>
+                <a:latin typeface="Dom Casual" charset="0"/>
+              </a:rPr>
+              <a:t>Entrega final</a:t>
+            </a:r>
+          </a:p>
+        </p:txBody>
+      </p:sp>
+      <p:pic>
+        <p:nvPicPr>
+          <p:cNvPr id="3" name="Imagen 2">
+            <a:extLst>
+              <a:ext uri="{FF2B5EF4-FFF2-40B4-BE49-F238E27FC236}">
+                <a16:creationId xmlns:a16="http://schemas.microsoft.com/office/drawing/2014/main" id="{61A1B667-1DD6-8716-2F16-7FE7BF30D92C}"/>
+              </a:ext>
+            </a:extLst>
+          </p:cNvPr>
+          <p:cNvPicPr>
+            <a:picLocks noChangeAspect="1"/>
+          </p:cNvPicPr>
+          <p:nvPr/>
+        </p:nvPicPr>
+        <p:blipFill>
+          <a:blip r:embed="rId2"/>
+          <a:stretch>
+            <a:fillRect/>
+          </a:stretch>
+        </p:blipFill>
+        <p:spPr>
+          <a:xfrm>
+            <a:off x="4590002" y="4214646"/>
+            <a:ext cx="3801005" cy="2029108"/>
+          </a:xfrm>
+          <a:prstGeom prst="rect">
+            <a:avLst/>
+          </a:prstGeom>
+        </p:spPr>
+      </p:pic>
+    </p:spTree>
+    <p:extLst>
+      <p:ext uri="{BB962C8B-B14F-4D97-AF65-F5344CB8AC3E}">
+        <p14:creationId xmlns:p14="http://schemas.microsoft.com/office/powerpoint/2010/main" val="427573656"/>
+      </p:ext>
+    </p:extLst>
+  </p:cSld>
+  <p:clrMapOvr>
+    <a:masterClrMapping/>
+  </p:clrMapOvr>
+</p:sld>
+</file>
+
+<file path=ppt/slides/slide7.xml><?xml version="1.0" encoding="utf-8"?>
 <p:sld xmlns:a="http://schemas.openxmlformats.org/drawingml/2006/main" xmlns:r="http://schemas.openxmlformats.org/officeDocument/2006/relationships" xmlns:p="http://schemas.openxmlformats.org/presentationml/2006/main">
   <p:cSld>
     <p:spTree>
@@ -8968,7 +8545,7 @@
               </a:rPr>
             </a:br>
             <a:r>
-              <a:rPr lang="es-MX" sz="3100" dirty="0">
+              <a:rPr lang="es-MX" sz="3100" b="1" dirty="0">
                 <a:solidFill>
                   <a:schemeClr val="accent6">
                     <a:lumMod val="75000"/>
@@ -8981,7 +8558,7 @@
                 </a:effectLst>
                 <a:latin typeface="Dom Casual" charset="0"/>
               </a:rPr>
-              <a:t>Segunda entrega</a:t>
+              <a:t>Entrega final</a:t>
             </a:r>
           </a:p>
         </p:txBody>
@@ -9002,8 +8579,8 @@
         </p:nvSpPr>
         <p:spPr>
           <a:xfrm>
-            <a:off x="251520" y="1340768"/>
-            <a:ext cx="8147248" cy="5265712"/>
+            <a:off x="251520" y="1412776"/>
+            <a:ext cx="8435280" cy="5265712"/>
           </a:xfrm>
           <a:prstGeom prst="rect">
             <a:avLst/>
@@ -9162,31 +8739,31 @@
               <a:buAutoNum type="arabicPeriod"/>
             </a:pPr>
             <a:r>
-              <a:rPr lang="es-ES" sz="1400" b="1" dirty="0">
-                <a:solidFill>
-                  <a:schemeClr val="bg2">
-                    <a:lumMod val="25000"/>
-                  </a:schemeClr>
-                </a:solidFill>
-                <a:latin typeface="Arial" pitchFamily="34" charset="0"/>
-                <a:cs typeface="Arial" pitchFamily="34" charset="0"/>
-              </a:rPr>
-              <a:t>Menú</a:t>
-            </a:r>
-            <a:r>
-              <a:rPr lang="es-ES" sz="1400" dirty="0">
-                <a:solidFill>
-                  <a:schemeClr val="bg2">
-                    <a:lumMod val="25000"/>
-                  </a:schemeClr>
-                </a:solidFill>
-                <a:latin typeface="Arial" pitchFamily="34" charset="0"/>
-                <a:cs typeface="Arial" pitchFamily="34" charset="0"/>
-              </a:rPr>
-              <a:t>. El programa presenta el menú cada vez que el usuario lo requiera. Utiliza un ciclo </a:t>
-            </a:r>
-            <a:r>
-              <a:rPr lang="es-ES" sz="1400" dirty="0" err="1">
+              <a:rPr lang="es-MX" sz="1400" b="1" dirty="0">
+                <a:solidFill>
+                  <a:schemeClr val="bg2">
+                    <a:lumMod val="25000"/>
+                  </a:schemeClr>
+                </a:solidFill>
+                <a:latin typeface="Arial" pitchFamily="34" charset="0"/>
+                <a:cs typeface="Arial" pitchFamily="34" charset="0"/>
+              </a:rPr>
+              <a:t>Menú principal:</a:t>
+            </a:r>
+            <a:r>
+              <a:rPr lang="es-MX" sz="1400" dirty="0">
+                <a:solidFill>
+                  <a:schemeClr val="bg2">
+                    <a:lumMod val="25000"/>
+                  </a:schemeClr>
+                </a:solidFill>
+                <a:latin typeface="Arial" pitchFamily="34" charset="0"/>
+                <a:cs typeface="Arial" pitchFamily="34" charset="0"/>
+              </a:rPr>
+              <a:t> El programa presenta el menú cada vez que el usuario lo requiera mediante un ciclo </a:t>
+            </a:r>
+            <a:r>
+              <a:rPr lang="es-MX" sz="1400" dirty="0" err="1">
                 <a:solidFill>
                   <a:schemeClr val="bg2">
                     <a:lumMod val="25000"/>
@@ -9198,7 +8775,7 @@
               <a:t>while</a:t>
             </a:r>
             <a:r>
-              <a:rPr lang="es-ES" sz="1400" dirty="0">
+              <a:rPr lang="es-MX" sz="1400" dirty="0">
                 <a:solidFill>
                   <a:schemeClr val="bg2">
                     <a:lumMod val="25000"/>
@@ -9222,16 +8799,28 @@
               <a:buAutoNum type="arabicPeriod"/>
             </a:pPr>
             <a:r>
-              <a:rPr lang="es-ES" sz="1400" b="1" dirty="0">
-                <a:solidFill>
-                  <a:schemeClr val="bg2">
-                    <a:lumMod val="25000"/>
-                  </a:schemeClr>
-                </a:solidFill>
-                <a:latin typeface="Arial" pitchFamily="34" charset="0"/>
-                <a:cs typeface="Arial" pitchFamily="34" charset="0"/>
-              </a:rPr>
-              <a:t>Lectura de un archivo Excel.</a:t>
+              <a:rPr lang="es-MX" sz="1400" b="1" dirty="0">
+                <a:solidFill>
+                  <a:schemeClr val="bg2">
+                    <a:lumMod val="25000"/>
+                  </a:schemeClr>
+                </a:solidFill>
+                <a:latin typeface="Arial" pitchFamily="34" charset="0"/>
+                <a:cs typeface="Arial" pitchFamily="34" charset="0"/>
+              </a:rPr>
+              <a:t>Lectura de datos:</a:t>
+            </a:r>
+            <a:r>
+              <a:rPr lang="es-MX" sz="1400" dirty="0">
+                <a:solidFill>
+                  <a:schemeClr val="bg2">
+                    <a:lumMod val="25000"/>
+                  </a:schemeClr>
+                </a:solidFill>
+                <a:latin typeface="Arial" pitchFamily="34" charset="0"/>
+                <a:cs typeface="Arial" pitchFamily="34" charset="0"/>
+              </a:rPr>
+              <a:t> Lectura del archivo de Excel. </a:t>
             </a:r>
           </a:p>
           <a:p>
@@ -9246,28 +8835,28 @@
               <a:buAutoNum type="arabicPeriod"/>
             </a:pPr>
             <a:r>
-              <a:rPr lang="es-ES" sz="1400" b="1" dirty="0">
-                <a:solidFill>
-                  <a:schemeClr val="bg2">
-                    <a:lumMod val="25000"/>
-                  </a:schemeClr>
-                </a:solidFill>
-                <a:latin typeface="Arial" pitchFamily="34" charset="0"/>
-                <a:cs typeface="Arial" pitchFamily="34" charset="0"/>
-              </a:rPr>
-              <a:t>Estadística descriptiva </a:t>
-            </a:r>
-            <a:r>
-              <a:rPr lang="es-ES" sz="1400" dirty="0">
-                <a:solidFill>
-                  <a:schemeClr val="bg2">
-                    <a:lumMod val="25000"/>
-                  </a:schemeClr>
-                </a:solidFill>
-                <a:latin typeface="Arial" pitchFamily="34" charset="0"/>
-                <a:cs typeface="Arial" pitchFamily="34" charset="0"/>
-              </a:rPr>
-              <a:t>de columnas. Cada integrante del equipo debe analizar al mínimo 4 descriptores estadísticos.</a:t>
+              <a:rPr lang="es-MX" sz="1400" b="1" dirty="0">
+                <a:solidFill>
+                  <a:schemeClr val="bg2">
+                    <a:lumMod val="25000"/>
+                  </a:schemeClr>
+                </a:solidFill>
+                <a:latin typeface="Arial" pitchFamily="34" charset="0"/>
+                <a:cs typeface="Arial" pitchFamily="34" charset="0"/>
+              </a:rPr>
+              <a:t>Estadística descriptiva:</a:t>
+            </a:r>
+            <a:r>
+              <a:rPr lang="es-MX" sz="1400" dirty="0">
+                <a:solidFill>
+                  <a:schemeClr val="bg2">
+                    <a:lumMod val="25000"/>
+                  </a:schemeClr>
+                </a:solidFill>
+                <a:latin typeface="Arial" pitchFamily="34" charset="0"/>
+                <a:cs typeface="Arial" pitchFamily="34" charset="0"/>
+              </a:rPr>
+              <a:t> Análisis de las columnas del archivo. Calcular e interpretar al menos 4 descriptores estadísticos. </a:t>
             </a:r>
           </a:p>
           <a:p>
@@ -9282,40 +8871,28 @@
               <a:buAutoNum type="arabicPeriod"/>
             </a:pPr>
             <a:r>
-              <a:rPr lang="es-ES" sz="1400" dirty="0">
-                <a:solidFill>
-                  <a:schemeClr val="bg2">
-                    <a:lumMod val="25000"/>
-                  </a:schemeClr>
-                </a:solidFill>
-                <a:latin typeface="Arial" pitchFamily="34" charset="0"/>
-                <a:cs typeface="Arial" pitchFamily="34" charset="0"/>
-              </a:rPr>
-              <a:t>Código con todas las funciones que sean necesarias (mínimo dos, el menú y el </a:t>
-            </a:r>
-            <a:r>
-              <a:rPr lang="es-ES" sz="1400" dirty="0" err="1">
-                <a:solidFill>
-                  <a:schemeClr val="bg2">
-                    <a:lumMod val="25000"/>
-                  </a:schemeClr>
-                </a:solidFill>
-                <a:latin typeface="Arial" pitchFamily="34" charset="0"/>
-                <a:cs typeface="Arial" pitchFamily="34" charset="0"/>
-              </a:rPr>
-              <a:t>main</a:t>
-            </a:r>
-            <a:r>
-              <a:rPr lang="es-ES" sz="1400" dirty="0">
-                <a:solidFill>
-                  <a:schemeClr val="bg2">
-                    <a:lumMod val="25000"/>
-                  </a:schemeClr>
-                </a:solidFill>
-                <a:latin typeface="Arial" pitchFamily="34" charset="0"/>
-                <a:cs typeface="Arial" pitchFamily="34" charset="0"/>
-              </a:rPr>
-              <a:t>).</a:t>
+              <a:rPr lang="es-MX" sz="1400" b="1" dirty="0">
+                <a:solidFill>
+                  <a:schemeClr val="bg2">
+                    <a:lumMod val="25000"/>
+                  </a:schemeClr>
+                </a:solidFill>
+                <a:latin typeface="Arial" pitchFamily="34" charset="0"/>
+                <a:cs typeface="Arial" pitchFamily="34" charset="0"/>
+              </a:rPr>
+              <a:t>Funciones: </a:t>
+            </a:r>
+            <a:r>
+              <a:rPr lang="es-MX" sz="1400" dirty="0">
+                <a:solidFill>
+                  <a:schemeClr val="bg2">
+                    <a:lumMod val="25000"/>
+                  </a:schemeClr>
+                </a:solidFill>
+                <a:latin typeface="Arial" pitchFamily="34" charset="0"/>
+                <a:cs typeface="Arial" pitchFamily="34" charset="0"/>
+              </a:rPr>
+              <a:t>Implementación de código modular que contenga al menos 3 funciones. </a:t>
             </a:r>
           </a:p>
           <a:p>
@@ -9330,16 +8907,28 @@
               <a:buAutoNum type="arabicPeriod"/>
             </a:pPr>
             <a:r>
-              <a:rPr lang="es-ES" sz="1400" dirty="0">
-                <a:solidFill>
-                  <a:schemeClr val="bg2">
-                    <a:lumMod val="25000"/>
-                  </a:schemeClr>
-                </a:solidFill>
-                <a:latin typeface="Arial" pitchFamily="34" charset="0"/>
-                <a:cs typeface="Arial" pitchFamily="34" charset="0"/>
-              </a:rPr>
-              <a:t>Estructura de control condicionales (3 condiciones). </a:t>
+              <a:rPr lang="es-MX" sz="1400" b="1" dirty="0">
+                <a:solidFill>
+                  <a:schemeClr val="bg2">
+                    <a:lumMod val="25000"/>
+                  </a:schemeClr>
+                </a:solidFill>
+                <a:latin typeface="Arial" pitchFamily="34" charset="0"/>
+                <a:cs typeface="Arial" pitchFamily="34" charset="0"/>
+              </a:rPr>
+              <a:t>Estructura de control:</a:t>
+            </a:r>
+            <a:r>
+              <a:rPr lang="es-MX" sz="1400" dirty="0">
+                <a:solidFill>
+                  <a:schemeClr val="bg2">
+                    <a:lumMod val="25000"/>
+                  </a:schemeClr>
+                </a:solidFill>
+                <a:latin typeface="Arial" pitchFamily="34" charset="0"/>
+                <a:cs typeface="Arial" pitchFamily="34" charset="0"/>
+              </a:rPr>
+              <a:t> Uso de condicionales con al menos 3 condiciones. </a:t>
             </a:r>
           </a:p>
           <a:p>
@@ -9354,40 +8943,28 @@
               <a:buAutoNum type="arabicPeriod"/>
             </a:pPr>
             <a:r>
-              <a:rPr lang="es-ES" sz="1400" dirty="0">
-                <a:solidFill>
-                  <a:schemeClr val="bg2">
-                    <a:lumMod val="25000"/>
-                  </a:schemeClr>
-                </a:solidFill>
-                <a:latin typeface="Arial" pitchFamily="34" charset="0"/>
-                <a:cs typeface="Arial" pitchFamily="34" charset="0"/>
-              </a:rPr>
-              <a:t>Incluir la generación y validación de un </a:t>
-            </a:r>
-            <a:r>
-              <a:rPr lang="es-ES" sz="1400" dirty="0" err="1">
-                <a:solidFill>
-                  <a:schemeClr val="bg2">
-                    <a:lumMod val="25000"/>
-                  </a:schemeClr>
-                </a:solidFill>
-                <a:latin typeface="Arial" pitchFamily="34" charset="0"/>
-                <a:cs typeface="Arial" pitchFamily="34" charset="0"/>
-              </a:rPr>
-              <a:t>password</a:t>
-            </a:r>
-            <a:r>
-              <a:rPr lang="es-ES" sz="1400" dirty="0">
-                <a:solidFill>
-                  <a:schemeClr val="bg2">
-                    <a:lumMod val="25000"/>
-                  </a:schemeClr>
-                </a:solidFill>
-                <a:latin typeface="Arial" pitchFamily="34" charset="0"/>
-                <a:cs typeface="Arial" pitchFamily="34" charset="0"/>
-              </a:rPr>
-              <a:t>.</a:t>
+              <a:rPr lang="es-MX" sz="1400" b="1" dirty="0">
+                <a:solidFill>
+                  <a:schemeClr val="bg2">
+                    <a:lumMod val="25000"/>
+                  </a:schemeClr>
+                </a:solidFill>
+                <a:latin typeface="Arial" pitchFamily="34" charset="0"/>
+                <a:cs typeface="Arial" pitchFamily="34" charset="0"/>
+              </a:rPr>
+              <a:t>Visualización de datos:</a:t>
+            </a:r>
+            <a:r>
+              <a:rPr lang="es-MX" sz="1400" dirty="0">
+                <a:solidFill>
+                  <a:schemeClr val="bg2">
+                    <a:lumMod val="25000"/>
+                  </a:schemeClr>
+                </a:solidFill>
+                <a:latin typeface="Arial" pitchFamily="34" charset="0"/>
+                <a:cs typeface="Arial" pitchFamily="34" charset="0"/>
+              </a:rPr>
+              <a:t> Generación de una gráfica por cada pregunta detonadora. Los gráficos deben incluir todos sus elementos (títulos, etiquetas, leyendas y nombres de ejes).</a:t>
             </a:r>
           </a:p>
           <a:p>
@@ -9402,28 +8979,28 @@
               <a:buAutoNum type="arabicPeriod"/>
             </a:pPr>
             <a:r>
-              <a:rPr lang="es-ES" sz="1400" b="1" dirty="0">
-                <a:solidFill>
-                  <a:schemeClr val="bg2">
-                    <a:lumMod val="25000"/>
-                  </a:schemeClr>
-                </a:solidFill>
-                <a:latin typeface="Arial" pitchFamily="34" charset="0"/>
-                <a:cs typeface="Arial" pitchFamily="34" charset="0"/>
-              </a:rPr>
-              <a:t>Gráficas</a:t>
-            </a:r>
-            <a:r>
-              <a:rPr lang="es-ES" sz="1400" dirty="0">
-                <a:solidFill>
-                  <a:schemeClr val="bg2">
-                    <a:lumMod val="25000"/>
-                  </a:schemeClr>
-                </a:solidFill>
-                <a:latin typeface="Arial" pitchFamily="34" charset="0"/>
-                <a:cs typeface="Arial" pitchFamily="34" charset="0"/>
-              </a:rPr>
-              <a:t>, una por cada pregunta detonadora. Los gráficos deberán contener toda la información en cuanto a ejes, títulos, etiquetas, etc.</a:t>
+              <a:rPr lang="es-MX" sz="1400" b="1" dirty="0">
+                <a:solidFill>
+                  <a:schemeClr val="bg2">
+                    <a:lumMod val="25000"/>
+                  </a:schemeClr>
+                </a:solidFill>
+                <a:latin typeface="Arial" pitchFamily="34" charset="0"/>
+                <a:cs typeface="Arial" pitchFamily="34" charset="0"/>
+              </a:rPr>
+              <a:t>Documentación del programa: </a:t>
+            </a:r>
+            <a:r>
+              <a:rPr lang="es-MX" sz="1400" dirty="0">
+                <a:solidFill>
+                  <a:schemeClr val="bg2">
+                    <a:lumMod val="25000"/>
+                  </a:schemeClr>
+                </a:solidFill>
+                <a:latin typeface="Arial" pitchFamily="34" charset="0"/>
+                <a:cs typeface="Arial" pitchFamily="34" charset="0"/>
+              </a:rPr>
+              <a:t>El código debe incluir los comentarios necesarios para facilitar su lectura y comprensión. </a:t>
             </a:r>
           </a:p>
           <a:p>
@@ -9438,28 +9015,28 @@
               <a:buAutoNum type="arabicPeriod"/>
             </a:pPr>
             <a:r>
-              <a:rPr lang="es-ES" sz="1400" b="1" dirty="0">
-                <a:solidFill>
-                  <a:schemeClr val="bg2">
-                    <a:lumMod val="25000"/>
-                  </a:schemeClr>
-                </a:solidFill>
-                <a:latin typeface="Arial" pitchFamily="34" charset="0"/>
-                <a:cs typeface="Arial" pitchFamily="34" charset="0"/>
-              </a:rPr>
-              <a:t>Documentación del programa</a:t>
-            </a:r>
-            <a:r>
-              <a:rPr lang="es-ES" sz="1400" dirty="0">
-                <a:solidFill>
-                  <a:schemeClr val="bg2">
-                    <a:lumMod val="25000"/>
-                  </a:schemeClr>
-                </a:solidFill>
-                <a:latin typeface="Arial" pitchFamily="34" charset="0"/>
-                <a:cs typeface="Arial" pitchFamily="34" charset="0"/>
-              </a:rPr>
-              <a:t>. El programa deberá contener los comentarios necesarios para una mejor comprensión del código.</a:t>
+              <a:rPr lang="es-MX" sz="1400" b="1" dirty="0">
+                <a:solidFill>
+                  <a:schemeClr val="bg2">
+                    <a:lumMod val="25000"/>
+                  </a:schemeClr>
+                </a:solidFill>
+                <a:latin typeface="Arial" pitchFamily="34" charset="0"/>
+                <a:cs typeface="Arial" pitchFamily="34" charset="0"/>
+              </a:rPr>
+              <a:t>Conclusión escrita:</a:t>
+            </a:r>
+            <a:r>
+              <a:rPr lang="es-MX" sz="1400" dirty="0">
+                <a:solidFill>
+                  <a:schemeClr val="bg2">
+                    <a:lumMod val="25000"/>
+                  </a:schemeClr>
+                </a:solidFill>
+                <a:latin typeface="Arial" pitchFamily="34" charset="0"/>
+                <a:cs typeface="Arial" pitchFamily="34" charset="0"/>
+              </a:rPr>
+              <a:t> Interpretación de los resultados del análisis, extracción de conclusiones claras y propuesta de recomendaciones fundamentadas en los datos procesados. </a:t>
             </a:r>
           </a:p>
           <a:p>
@@ -9473,66 +9050,15 @@
               <a:buFont typeface="+mj-lt"/>
               <a:buAutoNum type="arabicPeriod" startAt="9"/>
             </a:pPr>
-            <a:r>
-              <a:rPr lang="es-ES" sz="1400" dirty="0">
-                <a:solidFill>
-                  <a:schemeClr val="bg2">
-                    <a:lumMod val="25000"/>
-                  </a:schemeClr>
-                </a:solidFill>
-                <a:latin typeface="Arial" pitchFamily="34" charset="0"/>
-                <a:cs typeface="Arial" pitchFamily="34" charset="0"/>
-              </a:rPr>
-              <a:t>Entrega individual de la conclusión escrita. </a:t>
-            </a:r>
-            <a:r>
-              <a:rPr lang="es-ES" sz="1400" b="1" dirty="0">
-                <a:solidFill>
-                  <a:schemeClr val="bg2">
-                    <a:lumMod val="25000"/>
-                  </a:schemeClr>
-                </a:solidFill>
-                <a:latin typeface="Arial" pitchFamily="34" charset="0"/>
-                <a:cs typeface="Arial" pitchFamily="34" charset="0"/>
-              </a:rPr>
-              <a:t>Estrategia de Negocio </a:t>
-            </a:r>
-            <a:r>
-              <a:rPr lang="es-ES" sz="1400" dirty="0">
-                <a:solidFill>
-                  <a:schemeClr val="bg2">
-                    <a:lumMod val="25000"/>
-                  </a:schemeClr>
-                </a:solidFill>
-                <a:latin typeface="Arial" pitchFamily="34" charset="0"/>
-                <a:cs typeface="Arial" pitchFamily="34" charset="0"/>
-              </a:rPr>
-              <a:t>(mínimo una cuartilla).</a:t>
-            </a:r>
-          </a:p>
-          <a:p>
-            <a:pPr marL="800100" lvl="1" indent="-342900" algn="just">
-              <a:lnSpc>
-                <a:spcPct val="170000"/>
-              </a:lnSpc>
-              <a:spcBef>
-                <a:spcPts val="0"/>
-              </a:spcBef>
-              <a:buFont typeface="+mj-lt"/>
-              <a:buAutoNum type="arabicPeriod" startAt="9"/>
-            </a:pPr>
-            <a:r>
-              <a:rPr lang="es-ES" sz="1400" dirty="0">
-                <a:solidFill>
-                  <a:schemeClr val="bg2">
-                    <a:lumMod val="25000"/>
-                  </a:schemeClr>
-                </a:solidFill>
-                <a:latin typeface="Arial" pitchFamily="34" charset="0"/>
-                <a:cs typeface="Arial" pitchFamily="34" charset="0"/>
-              </a:rPr>
-              <a:t>Acciones del código de Ética.</a:t>
-            </a:r>
+            <a:endParaRPr lang="es-ES" sz="1400" dirty="0">
+              <a:solidFill>
+                <a:schemeClr val="bg2">
+                  <a:lumMod val="25000"/>
+                </a:schemeClr>
+              </a:solidFill>
+              <a:latin typeface="Arial" pitchFamily="34" charset="0"/>
+              <a:cs typeface="Arial" pitchFamily="34" charset="0"/>
+            </a:endParaRPr>
           </a:p>
           <a:p>
             <a:pPr marL="800100" lvl="1" indent="-342900" algn="just">
@@ -9561,270 +9087,6 @@
     <p:extLst>
       <p:ext uri="{BB962C8B-B14F-4D97-AF65-F5344CB8AC3E}">
         <p14:creationId xmlns:p14="http://schemas.microsoft.com/office/powerpoint/2010/main" val="4160736367"/>
-      </p:ext>
-    </p:extLst>
-  </p:cSld>
-  <p:clrMapOvr>
-    <a:masterClrMapping/>
-  </p:clrMapOvr>
-</p:sld>
-</file>
-
-<file path=ppt/slides/slide7.xml><?xml version="1.0" encoding="utf-8"?>
-<p:sld xmlns:a="http://schemas.openxmlformats.org/drawingml/2006/main" xmlns:r="http://schemas.openxmlformats.org/officeDocument/2006/relationships" xmlns:p="http://schemas.openxmlformats.org/presentationml/2006/main">
-  <p:cSld>
-    <p:spTree>
-      <p:nvGrpSpPr>
-        <p:cNvPr id="1" name=""/>
-        <p:cNvGrpSpPr/>
-        <p:nvPr/>
-      </p:nvGrpSpPr>
-      <p:grpSpPr>
-        <a:xfrm>
-          <a:off x="0" y="0"/>
-          <a:ext cx="0" cy="0"/>
-          <a:chOff x="0" y="0"/>
-          <a:chExt cx="0" cy="0"/>
-        </a:xfrm>
-      </p:grpSpPr>
-      <p:sp>
-        <p:nvSpPr>
-          <p:cNvPr id="4098" name="Rectangle 2"/>
-          <p:cNvSpPr>
-            <a:spLocks noGrp="1" noChangeArrowheads="1"/>
-          </p:cNvSpPr>
-          <p:nvPr>
-            <p:ph type="body" idx="1"/>
-          </p:nvPr>
-        </p:nvSpPr>
-        <p:spPr>
-          <a:xfrm>
-            <a:off x="323528" y="2060848"/>
-            <a:ext cx="8111523" cy="4104456"/>
-          </a:xfrm>
-        </p:spPr>
-        <p:txBody>
-          <a:bodyPr>
-            <a:noAutofit/>
-          </a:bodyPr>
-          <a:lstStyle/>
-          <a:p>
-            <a:pPr marL="857250" lvl="1" indent="-457200" algn="just">
-              <a:lnSpc>
-                <a:spcPct val="120000"/>
-              </a:lnSpc>
-              <a:spcBef>
-                <a:spcPct val="0"/>
-              </a:spcBef>
-              <a:buFont typeface="+mj-lt"/>
-              <a:buAutoNum type="arabicPeriod"/>
-            </a:pPr>
-            <a:r>
-              <a:rPr lang="es-MX" sz="2400" dirty="0">
-                <a:solidFill>
-                  <a:schemeClr val="bg2">
-                    <a:lumMod val="25000"/>
-                  </a:schemeClr>
-                </a:solidFill>
-                <a:cs typeface="Arial" panose="020B0604020202020204" pitchFamily="34" charset="0"/>
-              </a:rPr>
-              <a:t>Portada.</a:t>
-            </a:r>
-          </a:p>
-          <a:p>
-            <a:pPr marL="857250" lvl="1" indent="-457200" algn="just">
-              <a:lnSpc>
-                <a:spcPct val="120000"/>
-              </a:lnSpc>
-              <a:spcBef>
-                <a:spcPct val="0"/>
-              </a:spcBef>
-              <a:buFont typeface="+mj-lt"/>
-              <a:buAutoNum type="arabicPeriod"/>
-            </a:pPr>
-            <a:r>
-              <a:rPr lang="es-MX" sz="2400" dirty="0">
-                <a:solidFill>
-                  <a:schemeClr val="bg2">
-                    <a:lumMod val="25000"/>
-                  </a:schemeClr>
-                </a:solidFill>
-                <a:cs typeface="Arial" panose="020B0604020202020204" pitchFamily="34" charset="0"/>
-              </a:rPr>
-              <a:t>Describir de forma general el giro de la empresa.</a:t>
-            </a:r>
-          </a:p>
-          <a:p>
-            <a:pPr marL="857250" lvl="1" indent="-457200" algn="just">
-              <a:lnSpc>
-                <a:spcPct val="120000"/>
-              </a:lnSpc>
-              <a:spcBef>
-                <a:spcPct val="0"/>
-              </a:spcBef>
-              <a:buFont typeface="+mj-lt"/>
-              <a:buAutoNum type="arabicPeriod"/>
-            </a:pPr>
-            <a:r>
-              <a:rPr lang="es-MX" sz="2400" dirty="0">
-                <a:solidFill>
-                  <a:schemeClr val="bg2">
-                    <a:lumMod val="25000"/>
-                  </a:schemeClr>
-                </a:solidFill>
-                <a:cs typeface="Arial" panose="020B0604020202020204" pitchFamily="34" charset="0"/>
-              </a:rPr>
-              <a:t>Descripción de los campos de la tabla, como la obtuvieron y porque seleccionaron esa base de datos.</a:t>
-            </a:r>
-          </a:p>
-          <a:p>
-            <a:pPr marL="857250" lvl="1" indent="-457200" algn="just">
-              <a:lnSpc>
-                <a:spcPct val="120000"/>
-              </a:lnSpc>
-              <a:spcBef>
-                <a:spcPct val="0"/>
-              </a:spcBef>
-              <a:buFont typeface="+mj-lt"/>
-              <a:buAutoNum type="arabicPeriod"/>
-            </a:pPr>
-            <a:r>
-              <a:rPr lang="es-ES" sz="2400" dirty="0">
-                <a:solidFill>
-                  <a:schemeClr val="bg2">
-                    <a:lumMod val="25000"/>
-                  </a:schemeClr>
-                </a:solidFill>
-                <a:cs typeface="Arial" panose="020B0604020202020204" pitchFamily="34" charset="0"/>
-              </a:rPr>
-              <a:t>Acciones del código de Ética.</a:t>
-            </a:r>
-            <a:endParaRPr lang="es-MX" sz="2400" dirty="0">
-              <a:solidFill>
-                <a:schemeClr val="bg2">
-                  <a:lumMod val="25000"/>
-                </a:schemeClr>
-              </a:solidFill>
-              <a:cs typeface="Arial" panose="020B0604020202020204" pitchFamily="34" charset="0"/>
-            </a:endParaRPr>
-          </a:p>
-        </p:txBody>
-      </p:sp>
-      <p:sp>
-        <p:nvSpPr>
-          <p:cNvPr id="184324" name="Rectangle 4"/>
-          <p:cNvSpPr>
-            <a:spLocks noGrp="1" noChangeArrowheads="1"/>
-          </p:cNvSpPr>
-          <p:nvPr>
-            <p:ph type="title"/>
-          </p:nvPr>
-        </p:nvSpPr>
-        <p:spPr>
-          <a:xfrm>
-            <a:off x="486733" y="404664"/>
-            <a:ext cx="8111523" cy="1143000"/>
-          </a:xfrm>
-        </p:spPr>
-        <p:txBody>
-          <a:bodyPr>
-            <a:normAutofit fontScale="90000"/>
-          </a:bodyPr>
-          <a:lstStyle/>
-          <a:p>
-            <a:pPr eaLnBrk="1" hangingPunct="1">
-              <a:defRPr/>
-            </a:pPr>
-            <a:r>
-              <a:rPr lang="es-MX" b="1" dirty="0">
-                <a:solidFill>
-                  <a:schemeClr val="accent4">
-                    <a:lumMod val="50000"/>
-                  </a:schemeClr>
-                </a:solidFill>
-                <a:effectLst>
-                  <a:outerShdw blurRad="38100" dist="38100" dir="2700000" algn="tl">
-                    <a:srgbClr val="C0C0C0"/>
-                  </a:outerShdw>
-                </a:effectLst>
-                <a:latin typeface="Dom Casual" charset="0"/>
-              </a:rPr>
-              <a:t>Situación problema</a:t>
-            </a:r>
-            <a:br>
-              <a:rPr lang="es-MX" b="1" dirty="0">
-                <a:solidFill>
-                  <a:schemeClr val="accent4">
-                    <a:lumMod val="50000"/>
-                  </a:schemeClr>
-                </a:solidFill>
-                <a:effectLst>
-                  <a:outerShdw blurRad="38100" dist="38100" dir="2700000" algn="tl">
-                    <a:srgbClr val="C0C0C0"/>
-                  </a:outerShdw>
-                </a:effectLst>
-                <a:latin typeface="Dom Casual" charset="0"/>
-              </a:rPr>
-            </a:br>
-            <a:r>
-              <a:rPr lang="es-MX" sz="3100" dirty="0">
-                <a:solidFill>
-                  <a:schemeClr val="accent6">
-                    <a:lumMod val="75000"/>
-                  </a:schemeClr>
-                </a:solidFill>
-                <a:effectLst>
-                  <a:outerShdw blurRad="38100" dist="38100" dir="2700000" algn="tl">
-                    <a:srgbClr val="C0C0C0"/>
-                  </a:outerShdw>
-                </a:effectLst>
-                <a:latin typeface="Dom Casual" charset="0"/>
-              </a:rPr>
-              <a:t>Documento en equipo</a:t>
-            </a:r>
-          </a:p>
-        </p:txBody>
-      </p:sp>
-      <p:pic>
-        <p:nvPicPr>
-          <p:cNvPr id="3" name="Imagen 2" descr="Un conjunto de letras negras en un fondo blanco&#10;&#10;Descripción generada automáticamente con confianza media">
-            <a:extLst>
-              <a:ext uri="{FF2B5EF4-FFF2-40B4-BE49-F238E27FC236}">
-                <a16:creationId xmlns:a16="http://schemas.microsoft.com/office/drawing/2014/main" id="{B7A2194D-FDB4-4270-A0B6-97ED9690BFC4}"/>
-              </a:ext>
-            </a:extLst>
-          </p:cNvPr>
-          <p:cNvPicPr>
-            <a:picLocks noChangeAspect="1"/>
-          </p:cNvPicPr>
-          <p:nvPr/>
-        </p:nvPicPr>
-        <p:blipFill>
-          <a:blip r:embed="rId2">
-            <a:extLst>
-              <a:ext uri="{28A0092B-C50C-407E-A947-70E740481C1C}">
-                <a14:useLocalDpi xmlns:a14="http://schemas.microsoft.com/office/drawing/2010/main" val="0"/>
-              </a:ext>
-            </a:extLst>
-          </a:blip>
-          <a:stretch>
-            <a:fillRect/>
-          </a:stretch>
-        </p:blipFill>
-        <p:spPr>
-          <a:xfrm>
-            <a:off x="5868144" y="4221088"/>
-            <a:ext cx="2143125" cy="2143125"/>
-          </a:xfrm>
-          <a:prstGeom prst="rect">
-            <a:avLst/>
-          </a:prstGeom>
-        </p:spPr>
-      </p:pic>
-    </p:spTree>
-    <p:extLst>
-      <p:ext uri="{BB962C8B-B14F-4D97-AF65-F5344CB8AC3E}">
-        <p14:creationId xmlns:p14="http://schemas.microsoft.com/office/powerpoint/2010/main" val="3299616051"/>
       </p:ext>
     </p:extLst>
   </p:cSld>
@@ -9879,8 +9141,8 @@
         </p:blipFill>
         <p:spPr>
           <a:xfrm>
-            <a:off x="6948264" y="1412776"/>
-            <a:ext cx="1584176" cy="1584176"/>
+            <a:off x="7098494" y="147373"/>
+            <a:ext cx="1440160" cy="1440160"/>
           </a:xfrm>
           <a:prstGeom prst="rect">
             <a:avLst/>
@@ -9899,8 +9161,8 @@
         </p:nvSpPr>
         <p:spPr>
           <a:xfrm>
-            <a:off x="611560" y="1988840"/>
-            <a:ext cx="7704856" cy="3888432"/>
+            <a:off x="611560" y="1700808"/>
+            <a:ext cx="7967507" cy="4464496"/>
           </a:xfrm>
         </p:spPr>
         <p:txBody>
@@ -9909,9 +9171,9 @@
           </a:bodyPr>
           <a:lstStyle/>
           <a:p>
-            <a:pPr marL="857250" lvl="1" indent="-457200" algn="just">
+            <a:pPr marL="355600" indent="-355600" algn="just">
               <a:lnSpc>
-                <a:spcPct val="120000"/>
+                <a:spcPct val="150000"/>
               </a:lnSpc>
               <a:spcBef>
                 <a:spcPct val="0"/>
@@ -9920,21 +9182,22 @@
               <a:buAutoNum type="arabicPeriod"/>
             </a:pPr>
             <a:r>
-              <a:rPr lang="es-MX" sz="2000" dirty="0">
-                <a:solidFill>
-                  <a:schemeClr val="bg2">
-                    <a:lumMod val="25000"/>
-                  </a:schemeClr>
-                </a:solidFill>
+              <a:rPr lang="es-MX" sz="1400" b="1" dirty="0">
+                <a:solidFill>
+                  <a:schemeClr val="bg2">
+                    <a:lumMod val="25000"/>
+                  </a:schemeClr>
+                </a:solidFill>
+                <a:latin typeface="Arial" panose="020B0604020202020204" pitchFamily="34" charset="0"/>
                 <a:cs typeface="Arial" panose="020B0604020202020204" pitchFamily="34" charset="0"/>
               </a:rPr>
               <a:t>Portada.</a:t>
             </a:r>
           </a:p>
           <a:p>
-            <a:pPr marL="857250" lvl="1" indent="-457200" algn="just">
+            <a:pPr marL="355600" indent="-355600" algn="just">
               <a:lnSpc>
-                <a:spcPct val="120000"/>
+                <a:spcPct val="150000"/>
               </a:lnSpc>
               <a:spcBef>
                 <a:spcPct val="0"/>
@@ -9943,21 +9206,34 @@
               <a:buAutoNum type="arabicPeriod"/>
             </a:pPr>
             <a:r>
-              <a:rPr lang="es-MX" sz="2000" dirty="0">
-                <a:solidFill>
-                  <a:schemeClr val="bg2">
-                    <a:lumMod val="25000"/>
-                  </a:schemeClr>
-                </a:solidFill>
+              <a:rPr lang="es-MX" sz="1400" b="1" dirty="0">
+                <a:solidFill>
+                  <a:schemeClr val="bg2">
+                    <a:lumMod val="25000"/>
+                  </a:schemeClr>
+                </a:solidFill>
+                <a:latin typeface="Arial" panose="020B0604020202020204" pitchFamily="34" charset="0"/>
                 <a:cs typeface="Arial" panose="020B0604020202020204" pitchFamily="34" charset="0"/>
               </a:rPr>
-              <a:t>Pregunta detonadora.</a:t>
-            </a:r>
-          </a:p>
-          <a:p>
-            <a:pPr marL="857250" lvl="1" indent="-457200" algn="just">
+              <a:t>Descripción del giro de la empresa: </a:t>
+            </a:r>
+            <a:r>
+              <a:rPr lang="es-MX" sz="1400" dirty="0">
+                <a:solidFill>
+                  <a:schemeClr val="bg2">
+                    <a:lumMod val="25000"/>
+                  </a:schemeClr>
+                </a:solidFill>
+                <a:latin typeface="Arial" panose="020B0604020202020204" pitchFamily="34" charset="0"/>
+                <a:cs typeface="Arial" panose="020B0604020202020204" pitchFamily="34" charset="0"/>
+              </a:rPr>
+              <a:t>Describir de forma general el giro del negocio.</a:t>
+            </a:r>
+          </a:p>
+          <a:p>
+            <a:pPr marL="355600" indent="-355600" algn="just">
               <a:lnSpc>
-                <a:spcPct val="120000"/>
+                <a:spcPct val="150000"/>
               </a:lnSpc>
               <a:spcBef>
                 <a:spcPct val="0"/>
@@ -9966,21 +9242,34 @@
               <a:buAutoNum type="arabicPeriod"/>
             </a:pPr>
             <a:r>
-              <a:rPr lang="es-MX" sz="2000" dirty="0">
-                <a:solidFill>
-                  <a:schemeClr val="bg2">
-                    <a:lumMod val="25000"/>
-                  </a:schemeClr>
-                </a:solidFill>
+              <a:rPr lang="es-MX" sz="1400" b="1" dirty="0">
+                <a:solidFill>
+                  <a:schemeClr val="bg2">
+                    <a:lumMod val="25000"/>
+                  </a:schemeClr>
+                </a:solidFill>
+                <a:latin typeface="Arial" panose="020B0604020202020204" pitchFamily="34" charset="0"/>
                 <a:cs typeface="Arial" panose="020B0604020202020204" pitchFamily="34" charset="0"/>
               </a:rPr>
-              <a:t>Impresión de pantalla de sus gráficas.</a:t>
-            </a:r>
-          </a:p>
-          <a:p>
-            <a:pPr marL="857250" lvl="1" indent="-457200" algn="just">
+              <a:t>Descripción de los campos: </a:t>
+            </a:r>
+            <a:r>
+              <a:rPr lang="es-MX" sz="1400" dirty="0">
+                <a:solidFill>
+                  <a:schemeClr val="bg2">
+                    <a:lumMod val="25000"/>
+                  </a:schemeClr>
+                </a:solidFill>
+                <a:latin typeface="Arial" panose="020B0604020202020204" pitchFamily="34" charset="0"/>
+                <a:cs typeface="Arial" panose="020B0604020202020204" pitchFamily="34" charset="0"/>
+              </a:rPr>
+              <a:t>Explicar los campos incluidos en la tabla.</a:t>
+            </a:r>
+          </a:p>
+          <a:p>
+            <a:pPr marL="355600" indent="-355600" algn="just">
               <a:lnSpc>
-                <a:spcPct val="120000"/>
+                <a:spcPct val="150000"/>
               </a:lnSpc>
               <a:spcBef>
                 <a:spcPct val="0"/>
@@ -9989,43 +9278,34 @@
               <a:buAutoNum type="arabicPeriod"/>
             </a:pPr>
             <a:r>
-              <a:rPr lang="es-MX" sz="2000" dirty="0">
-                <a:solidFill>
-                  <a:schemeClr val="bg2">
-                    <a:lumMod val="25000"/>
-                  </a:schemeClr>
-                </a:solidFill>
+              <a:rPr lang="es-MX" sz="1400" b="1" dirty="0">
+                <a:solidFill>
+                  <a:schemeClr val="bg2">
+                    <a:lumMod val="25000"/>
+                  </a:schemeClr>
+                </a:solidFill>
+                <a:latin typeface="Arial" panose="020B0604020202020204" pitchFamily="34" charset="0"/>
                 <a:cs typeface="Arial" panose="020B0604020202020204" pitchFamily="34" charset="0"/>
               </a:rPr>
-              <a:t>Impresión de pantalla de los resultados de la función de </a:t>
-            </a:r>
-            <a:r>
-              <a:rPr lang="es-MX" sz="2000" dirty="0" err="1">
-                <a:solidFill>
-                  <a:schemeClr val="bg2">
-                    <a:lumMod val="25000"/>
-                  </a:schemeClr>
-                </a:solidFill>
+              <a:t>Preguntas detonadoras: </a:t>
+            </a:r>
+            <a:r>
+              <a:rPr lang="es-MX" sz="1400" dirty="0">
+                <a:solidFill>
+                  <a:schemeClr val="bg2">
+                    <a:lumMod val="25000"/>
+                  </a:schemeClr>
+                </a:solidFill>
+                <a:latin typeface="Arial" panose="020B0604020202020204" pitchFamily="34" charset="0"/>
                 <a:cs typeface="Arial" panose="020B0604020202020204" pitchFamily="34" charset="0"/>
               </a:rPr>
-              <a:t>estadistica_descriptiva</a:t>
-            </a:r>
-            <a:r>
-              <a:rPr lang="es-MX" sz="2000" dirty="0">
-                <a:solidFill>
-                  <a:schemeClr val="bg2">
-                    <a:lumMod val="25000"/>
-                  </a:schemeClr>
-                </a:solidFill>
-                <a:cs typeface="Arial" panose="020B0604020202020204" pitchFamily="34" charset="0"/>
-              </a:rPr>
-              <a:t>.</a:t>
-            </a:r>
-          </a:p>
-          <a:p>
-            <a:pPr marL="857250" lvl="1" indent="-457200" algn="just">
+              <a:t>Responder a las preguntas planteadas.</a:t>
+            </a:r>
+          </a:p>
+          <a:p>
+            <a:pPr marL="355600" indent="-355600" algn="just">
               <a:lnSpc>
-                <a:spcPct val="120000"/>
+                <a:spcPct val="150000"/>
               </a:lnSpc>
               <a:spcBef>
                 <a:spcPct val="0"/>
@@ -10034,92 +9314,236 @@
               <a:buAutoNum type="arabicPeriod"/>
             </a:pPr>
             <a:r>
-              <a:rPr lang="es-MX" sz="2000" dirty="0">
-                <a:solidFill>
-                  <a:schemeClr val="bg2">
-                    <a:lumMod val="25000"/>
-                  </a:schemeClr>
-                </a:solidFill>
+              <a:rPr lang="es-MX" sz="1400" b="1" dirty="0">
+                <a:solidFill>
+                  <a:schemeClr val="bg2">
+                    <a:lumMod val="25000"/>
+                  </a:schemeClr>
+                </a:solidFill>
+                <a:latin typeface="Arial" panose="020B0604020202020204" pitchFamily="34" charset="0"/>
                 <a:cs typeface="Arial" panose="020B0604020202020204" pitchFamily="34" charset="0"/>
               </a:rPr>
-              <a:t>Conclusión: Estrategia de negocio (mínimo una cuartilla) </a:t>
-            </a:r>
-          </a:p>
-          <a:p>
-            <a:pPr marL="1257300" lvl="2" indent="-457200" algn="just">
+              <a:t>Capturas de pantalla: </a:t>
+            </a:r>
+            <a:r>
+              <a:rPr lang="es-MX" sz="1400" dirty="0">
+                <a:solidFill>
+                  <a:schemeClr val="bg2">
+                    <a:lumMod val="25000"/>
+                  </a:schemeClr>
+                </a:solidFill>
+                <a:latin typeface="Arial" panose="020B0604020202020204" pitchFamily="34" charset="0"/>
+                <a:cs typeface="Arial" panose="020B0604020202020204" pitchFamily="34" charset="0"/>
+              </a:rPr>
+              <a:t>Incluir las impresiones de pantalla de los resultados de la función </a:t>
+            </a:r>
+            <a:r>
+              <a:rPr lang="es-MX" sz="1400" dirty="0" err="1">
+                <a:solidFill>
+                  <a:schemeClr val="bg2">
+                    <a:lumMod val="25000"/>
+                  </a:schemeClr>
+                </a:solidFill>
+                <a:latin typeface="Arial" panose="020B0604020202020204" pitchFamily="34" charset="0"/>
+                <a:cs typeface="Arial" panose="020B0604020202020204" pitchFamily="34" charset="0"/>
+              </a:rPr>
+              <a:t>estadistica_descriptiva</a:t>
+            </a:r>
+            <a:r>
+              <a:rPr lang="es-MX" sz="1400" dirty="0">
+                <a:solidFill>
+                  <a:schemeClr val="bg2">
+                    <a:lumMod val="25000"/>
+                  </a:schemeClr>
+                </a:solidFill>
+                <a:latin typeface="Arial" panose="020B0604020202020204" pitchFamily="34" charset="0"/>
+                <a:cs typeface="Arial" panose="020B0604020202020204" pitchFamily="34" charset="0"/>
+              </a:rPr>
+              <a:t>.</a:t>
+            </a:r>
+          </a:p>
+          <a:p>
+            <a:pPr marL="355600" indent="-355600" algn="just">
               <a:lnSpc>
-                <a:spcPct val="120000"/>
+                <a:spcPct val="150000"/>
               </a:lnSpc>
               <a:spcBef>
                 <a:spcPct val="0"/>
               </a:spcBef>
+              <a:buFont typeface="+mj-lt"/>
+              <a:buAutoNum type="arabicPeriod"/>
             </a:pPr>
             <a:r>
-              <a:rPr lang="es-ES" sz="1600" dirty="0">
-                <a:solidFill>
-                  <a:schemeClr val="bg2">
-                    <a:lumMod val="25000"/>
-                  </a:schemeClr>
-                </a:solidFill>
+              <a:rPr lang="es-MX" sz="1400" b="1" dirty="0">
+                <a:solidFill>
+                  <a:schemeClr val="bg2">
+                    <a:lumMod val="25000"/>
+                  </a:schemeClr>
+                </a:solidFill>
+                <a:latin typeface="Arial" panose="020B0604020202020204" pitchFamily="34" charset="0"/>
                 <a:cs typeface="Arial" panose="020B0604020202020204" pitchFamily="34" charset="0"/>
               </a:rPr>
-              <a:t>Analizar y explicar los resultados obtenidos con las gráficas y con las funciones de estadística descriptiva (Qué les dicen las estadísticas para la estrategia del negocio). </a:t>
-            </a:r>
-          </a:p>
-          <a:p>
-            <a:pPr marL="1257300" lvl="2" indent="-457200" algn="just">
+              <a:t>Gráficas: </a:t>
+            </a:r>
+            <a:r>
+              <a:rPr lang="es-MX" sz="1400" dirty="0">
+                <a:solidFill>
+                  <a:schemeClr val="bg2">
+                    <a:lumMod val="25000"/>
+                  </a:schemeClr>
+                </a:solidFill>
+                <a:latin typeface="Arial" panose="020B0604020202020204" pitchFamily="34" charset="0"/>
+                <a:cs typeface="Arial" panose="020B0604020202020204" pitchFamily="34" charset="0"/>
+              </a:rPr>
+              <a:t>Incluir las capturas de pantalla de las gráficas generadas.</a:t>
+            </a:r>
+          </a:p>
+          <a:p>
+            <a:pPr marL="355600" indent="-355600" algn="just">
               <a:lnSpc>
-                <a:spcPct val="120000"/>
+                <a:spcPct val="150000"/>
               </a:lnSpc>
               <a:spcBef>
                 <a:spcPct val="0"/>
               </a:spcBef>
+              <a:buFont typeface="+mj-lt"/>
+              <a:buAutoNum type="arabicPeriod"/>
             </a:pPr>
             <a:r>
-              <a:rPr lang="es-ES" sz="1600" dirty="0">
-                <a:solidFill>
-                  <a:schemeClr val="bg2">
-                    <a:lumMod val="25000"/>
-                  </a:schemeClr>
-                </a:solidFill>
+              <a:rPr lang="es-MX" sz="1400" b="1" dirty="0">
+                <a:solidFill>
+                  <a:schemeClr val="bg2">
+                    <a:lumMod val="25000"/>
+                  </a:schemeClr>
+                </a:solidFill>
+                <a:latin typeface="Arial" panose="020B0604020202020204" pitchFamily="34" charset="0"/>
                 <a:cs typeface="Arial" panose="020B0604020202020204" pitchFamily="34" charset="0"/>
               </a:rPr>
-              <a:t>Genera tu propuesta de acciones que aporten valor a las estrategias que deberá tomar el negocio, esto de acuerdo a la problemática planteada.</a:t>
-            </a:r>
-          </a:p>
-          <a:p>
-            <a:pPr marL="1257300" lvl="2" indent="-457200" algn="just">
+              <a:t>Conclusión:</a:t>
+            </a:r>
+          </a:p>
+          <a:p>
+            <a:pPr marL="755650" lvl="2" indent="-355600" algn="just">
               <a:lnSpc>
-                <a:spcPct val="120000"/>
+                <a:spcPct val="150000"/>
               </a:lnSpc>
               <a:spcBef>
                 <a:spcPct val="0"/>
               </a:spcBef>
             </a:pPr>
-            <a:endParaRPr lang="es-ES" sz="1600" dirty="0">
+            <a:r>
+              <a:rPr lang="es-MX" sz="1400" b="1" dirty="0">
+                <a:solidFill>
+                  <a:schemeClr val="bg2">
+                    <a:lumMod val="25000"/>
+                  </a:schemeClr>
+                </a:solidFill>
+                <a:latin typeface="Arial" panose="020B0604020202020204" pitchFamily="34" charset="0"/>
+                <a:cs typeface="Arial" panose="020B0604020202020204" pitchFamily="34" charset="0"/>
+              </a:rPr>
+              <a:t>Análisis de resultados: </a:t>
+            </a:r>
+            <a:r>
+              <a:rPr lang="es-MX" sz="1400" dirty="0">
+                <a:solidFill>
+                  <a:schemeClr val="bg2">
+                    <a:lumMod val="25000"/>
+                  </a:schemeClr>
+                </a:solidFill>
+                <a:latin typeface="Arial" panose="020B0604020202020204" pitchFamily="34" charset="0"/>
+                <a:cs typeface="Arial" panose="020B0604020202020204" pitchFamily="34" charset="0"/>
+              </a:rPr>
+              <a:t>Analizar y explicar los hallazgos obtenidos a través de las gráficas y las funciones de estadística descriptiva.</a:t>
+            </a:r>
+          </a:p>
+          <a:p>
+            <a:pPr marL="755650" lvl="2" indent="-355600" algn="just">
+              <a:lnSpc>
+                <a:spcPct val="150000"/>
+              </a:lnSpc>
+              <a:spcBef>
+                <a:spcPct val="0"/>
+              </a:spcBef>
+            </a:pPr>
+            <a:r>
+              <a:rPr lang="es-MX" sz="1400" b="1" dirty="0">
+                <a:solidFill>
+                  <a:schemeClr val="bg2">
+                    <a:lumMod val="25000"/>
+                  </a:schemeClr>
+                </a:solidFill>
+                <a:latin typeface="Arial" panose="020B0604020202020204" pitchFamily="34" charset="0"/>
+                <a:cs typeface="Arial" panose="020B0604020202020204" pitchFamily="34" charset="0"/>
+              </a:rPr>
+              <a:t>Propuesta estratégica: </a:t>
+            </a:r>
+            <a:r>
+              <a:rPr lang="es-MX" sz="1400" dirty="0">
+                <a:solidFill>
+                  <a:schemeClr val="bg2">
+                    <a:lumMod val="25000"/>
+                  </a:schemeClr>
+                </a:solidFill>
+                <a:latin typeface="Arial" panose="020B0604020202020204" pitchFamily="34" charset="0"/>
+                <a:cs typeface="Arial" panose="020B0604020202020204" pitchFamily="34" charset="0"/>
+              </a:rPr>
+              <a:t>Generar una propuesta de acciones que aporten valor a las decisiones del negocio, alineada con la problemática planteada y fundamentada en los datos procesados.</a:t>
+            </a:r>
+          </a:p>
+          <a:p>
+            <a:pPr marL="755650" lvl="2" indent="-355600" algn="just">
+              <a:lnSpc>
+                <a:spcPct val="150000"/>
+              </a:lnSpc>
+              <a:spcBef>
+                <a:spcPct val="0"/>
+              </a:spcBef>
+            </a:pPr>
+            <a:endParaRPr lang="es-ES" sz="1400" dirty="0">
               <a:solidFill>
                 <a:schemeClr val="bg2">
                   <a:lumMod val="25000"/>
                 </a:schemeClr>
               </a:solidFill>
+              <a:latin typeface="Arial" panose="020B0604020202020204" pitchFamily="34" charset="0"/>
               <a:cs typeface="Arial" panose="020B0604020202020204" pitchFamily="34" charset="0"/>
             </a:endParaRPr>
           </a:p>
           <a:p>
-            <a:pPr marL="1257300" lvl="2" indent="-457200" algn="just">
+            <a:pPr marL="755650" lvl="2" indent="-355600" algn="just">
               <a:lnSpc>
-                <a:spcPct val="120000"/>
+                <a:spcPct val="150000"/>
               </a:lnSpc>
               <a:spcBef>
                 <a:spcPct val="0"/>
               </a:spcBef>
             </a:pPr>
-            <a:endParaRPr lang="es-ES" sz="1600" dirty="0">
+            <a:endParaRPr lang="es-ES" sz="1400" dirty="0">
               <a:solidFill>
                 <a:schemeClr val="bg2">
                   <a:lumMod val="25000"/>
                 </a:schemeClr>
               </a:solidFill>
+              <a:latin typeface="Arial" panose="020B0604020202020204" pitchFamily="34" charset="0"/>
+              <a:cs typeface="Arial" panose="020B0604020202020204" pitchFamily="34" charset="0"/>
+            </a:endParaRPr>
+          </a:p>
+          <a:p>
+            <a:pPr marL="355600" lvl="1" indent="-355600" algn="just">
+              <a:lnSpc>
+                <a:spcPct val="150000"/>
+              </a:lnSpc>
+              <a:spcBef>
+                <a:spcPct val="0"/>
+              </a:spcBef>
+            </a:pPr>
+            <a:endParaRPr lang="es-ES" sz="1800" dirty="0">
+              <a:solidFill>
+                <a:schemeClr val="bg2">
+                  <a:lumMod val="25000"/>
+                </a:schemeClr>
+              </a:solidFill>
+              <a:latin typeface="Arial" panose="020B0604020202020204" pitchFamily="34" charset="0"/>
               <a:cs typeface="Arial" panose="020B0604020202020204" pitchFamily="34" charset="0"/>
             </a:endParaRPr>
           </a:p>
@@ -10157,7 +9581,7 @@
         </p:nvSpPr>
         <p:spPr>
           <a:xfrm>
-            <a:off x="516238" y="203245"/>
+            <a:off x="467544" y="147373"/>
             <a:ext cx="8111523" cy="1143000"/>
           </a:xfrm>
         </p:spPr>
@@ -10202,7 +9626,7 @@
               </a:rPr>
             </a:br>
             <a:r>
-              <a:rPr lang="es-MX" sz="3100" dirty="0">
+              <a:rPr lang="es-MX" sz="3100" b="1" dirty="0">
                 <a:solidFill>
                   <a:schemeClr val="accent6">
                     <a:lumMod val="75000"/>
@@ -10215,7 +9639,7 @@
                 </a:effectLst>
                 <a:latin typeface="Dom Casual" charset="0"/>
               </a:rPr>
-              <a:t>Documento individual</a:t>
+              <a:t>Documentación</a:t>
             </a:r>
           </a:p>
         </p:txBody>
@@ -10223,7 +9647,7 @@
     </p:spTree>
     <p:extLst>
       <p:ext uri="{BB962C8B-B14F-4D97-AF65-F5344CB8AC3E}">
-        <p14:creationId xmlns:p14="http://schemas.microsoft.com/office/powerpoint/2010/main" val="1179431574"/>
+        <p14:creationId xmlns:p14="http://schemas.microsoft.com/office/powerpoint/2010/main" val="3299616051"/>
       </p:ext>
     </p:extLst>
   </p:cSld>
@@ -10262,8 +9686,8 @@
         </p:nvSpPr>
         <p:spPr>
           <a:xfrm>
-            <a:off x="572700" y="2007712"/>
-            <a:ext cx="7704856" cy="3888432"/>
+            <a:off x="516237" y="1989787"/>
+            <a:ext cx="8111523" cy="3888432"/>
           </a:xfrm>
         </p:spPr>
         <p:txBody>
@@ -10279,6 +9703,9 @@
               <a:spcBef>
                 <a:spcPct val="0"/>
               </a:spcBef>
+              <a:spcAft>
+                <a:spcPts val="600"/>
+              </a:spcAft>
               <a:buNone/>
             </a:pPr>
             <a:r>
@@ -10301,6 +9728,9 @@
               <a:spcBef>
                 <a:spcPct val="0"/>
               </a:spcBef>
+              <a:spcAft>
+                <a:spcPts val="600"/>
+              </a:spcAft>
               <a:buFont typeface="+mj-lt"/>
               <a:buAutoNum type="arabicPeriod"/>
             </a:pPr>
@@ -10333,7 +9763,7 @@
                 </a:solidFill>
                 <a:cs typeface="Arial" panose="020B0604020202020204" pitchFamily="34" charset="0"/>
               </a:rPr>
-              <a:t> que presente el menú de opciones (menú con números o letras).</a:t>
+              <a:t> que presente el menú de opciones.</a:t>
             </a:r>
           </a:p>
           <a:p>
@@ -10344,6 +9774,9 @@
               <a:spcBef>
                 <a:spcPct val="0"/>
               </a:spcBef>
+              <a:spcAft>
+                <a:spcPts val="600"/>
+              </a:spcAft>
               <a:buFont typeface="+mj-lt"/>
               <a:buAutoNum type="arabicPeriod"/>
             </a:pPr>
@@ -10368,28 +9801,19 @@
               <a:t>main</a:t>
             </a:r>
             <a:r>
-              <a:rPr lang="es-ES" sz="1800" b="1" dirty="0">
-                <a:solidFill>
-                  <a:srgbClr val="FF0000"/>
+              <a:rPr lang="es-ES" sz="1800" dirty="0">
+                <a:solidFill>
+                  <a:schemeClr val="bg2">
+                    <a:lumMod val="25000"/>
+                  </a:schemeClr>
                 </a:solidFill>
                 <a:cs typeface="Arial" panose="020B0604020202020204" pitchFamily="34" charset="0"/>
               </a:rPr>
-              <a:t> </a:t>
-            </a:r>
-            <a:r>
-              <a:rPr lang="es-ES" sz="1800" dirty="0">
-                <a:solidFill>
-                  <a:schemeClr val="bg2">
-                    <a:lumMod val="25000"/>
-                  </a:schemeClr>
-                </a:solidFill>
-                <a:cs typeface="Arial" panose="020B0604020202020204" pitchFamily="34" charset="0"/>
-              </a:rPr>
-              <a:t>debe:</a:t>
-            </a:r>
-          </a:p>
-          <a:p>
-            <a:pPr marL="1257300" lvl="2" indent="-457200" algn="just">
+              <a:t>, la cual debe:</a:t>
+            </a:r>
+          </a:p>
+          <a:p>
+            <a:pPr marL="1074738" lvl="2" indent="-274638" algn="just">
               <a:lnSpc>
                 <a:spcPct val="120000"/>
               </a:lnSpc>
@@ -10409,7 +9833,7 @@
               <a:t>Cargar la información del archivo de Excel en un </a:t>
             </a:r>
             <a:r>
-              <a:rPr lang="es-ES" sz="1800" dirty="0" err="1">
+              <a:rPr lang="es-ES" sz="1800" b="1" dirty="0" err="1">
                 <a:solidFill>
                   <a:schemeClr val="bg2">
                     <a:lumMod val="25000"/>
@@ -10432,7 +9856,7 @@
             </a:r>
           </a:p>
           <a:p>
-            <a:pPr marL="1257300" lvl="2" indent="-457200" algn="just">
+            <a:pPr marL="1074738" lvl="2" indent="-274638" algn="just">
               <a:lnSpc>
                 <a:spcPct val="120000"/>
               </a:lnSpc>
@@ -10441,7 +9865,7 @@
               </a:spcBef>
             </a:pPr>
             <a:r>
-              <a:rPr lang="es-ES" sz="1800" dirty="0">
+              <a:rPr lang="es-MX" sz="1800" dirty="0">
                 <a:solidFill>
                   <a:schemeClr val="bg2">
                     <a:lumMod val="25000"/>
@@ -10449,10 +9873,10 @@
                 </a:solidFill>
                 <a:cs typeface="Arial" panose="020B0604020202020204" pitchFamily="34" charset="0"/>
               </a:rPr>
-              <a:t>Utilizar la función </a:t>
-            </a:r>
-            <a:r>
-              <a:rPr lang="es-ES" sz="1800" b="1" dirty="0" err="1">
+              <a:t>Utilizar la función </a:t>
+            </a:r>
+            <a:r>
+              <a:rPr lang="es-MX" sz="1800" b="1" dirty="0" err="1">
                 <a:solidFill>
                   <a:schemeClr val="bg2">
                     <a:lumMod val="25000"/>
@@ -10463,7 +9887,7 @@
               <a:t>menu</a:t>
             </a:r>
             <a:r>
-              <a:rPr lang="es-ES" sz="1800" dirty="0">
+              <a:rPr lang="es-MX" sz="1800" dirty="0">
                 <a:solidFill>
                   <a:schemeClr val="bg2">
                     <a:lumMod val="25000"/>
@@ -10471,10 +9895,20 @@
                 </a:solidFill>
                 <a:cs typeface="Arial" panose="020B0604020202020204" pitchFamily="34" charset="0"/>
               </a:rPr>
-              <a:t> para desplegar el menú y de acuerdo a la opción seleccionada por el usuario le dé la oportunidad de ejecutar cualquiera de las funciones que han sido construidas. Utiliza el estatuto de control </a:t>
-            </a:r>
-            <a:r>
-              <a:rPr lang="es-ES" sz="1800" dirty="0" err="1">
+              <a:t> para desplegar el menú de opciones. Según la opción seleccionada por el usuario, el programa deberá permitir la ejecución de cualquiera de las funciones previamente construidas.</a:t>
+            </a:r>
+          </a:p>
+          <a:p>
+            <a:pPr marL="1074738" lvl="2" indent="-274638" algn="just">
+              <a:lnSpc>
+                <a:spcPct val="120000"/>
+              </a:lnSpc>
+              <a:spcBef>
+                <a:spcPct val="0"/>
+              </a:spcBef>
+            </a:pPr>
+            <a:r>
+              <a:rPr lang="es-MX" sz="1800" dirty="0">
                 <a:solidFill>
                   <a:schemeClr val="bg2">
                     <a:lumMod val="25000"/>
@@ -10482,10 +9916,21 @@
                 </a:solidFill>
                 <a:cs typeface="Arial" panose="020B0604020202020204" pitchFamily="34" charset="0"/>
               </a:rPr>
+              <a:t>Utilizar la estructura de control </a:t>
+            </a:r>
+            <a:r>
+              <a:rPr lang="es-MX" sz="1800" b="1" dirty="0" err="1">
+                <a:solidFill>
+                  <a:schemeClr val="bg2">
+                    <a:lumMod val="25000"/>
+                  </a:schemeClr>
+                </a:solidFill>
+                <a:cs typeface="Arial" panose="020B0604020202020204" pitchFamily="34" charset="0"/>
+              </a:rPr>
               <a:t>if</a:t>
             </a:r>
             <a:r>
-              <a:rPr lang="es-ES" sz="1800" dirty="0">
+              <a:rPr lang="es-MX" sz="1800" b="1" dirty="0">
                 <a:solidFill>
                   <a:schemeClr val="bg2">
                     <a:lumMod val="25000"/>
@@ -10493,10 +9938,10 @@
                 </a:solidFill>
                 <a:cs typeface="Arial" panose="020B0604020202020204" pitchFamily="34" charset="0"/>
               </a:rPr>
-              <a:t> anidado. Debes utilizar el ciclo </a:t>
-            </a:r>
-            <a:r>
-              <a:rPr lang="es-ES" sz="1800" dirty="0" err="1">
+              <a:t> anidado</a:t>
+            </a:r>
+            <a:r>
+              <a:rPr lang="es-MX" sz="1800" dirty="0">
                 <a:solidFill>
                   <a:schemeClr val="bg2">
                     <a:lumMod val="25000"/>
@@ -10504,10 +9949,42 @@
                 </a:solidFill>
                 <a:cs typeface="Arial" panose="020B0604020202020204" pitchFamily="34" charset="0"/>
               </a:rPr>
+              <a:t> para la toma de decisiones.</a:t>
+            </a:r>
+          </a:p>
+          <a:p>
+            <a:pPr marL="1074738" lvl="2" indent="-274638" algn="just">
+              <a:lnSpc>
+                <a:spcPct val="120000"/>
+              </a:lnSpc>
+              <a:spcBef>
+                <a:spcPct val="0"/>
+              </a:spcBef>
+            </a:pPr>
+            <a:r>
+              <a:rPr lang="es-MX" sz="1800" dirty="0">
+                <a:solidFill>
+                  <a:schemeClr val="bg2">
+                    <a:lumMod val="25000"/>
+                  </a:schemeClr>
+                </a:solidFill>
+                <a:cs typeface="Arial" panose="020B0604020202020204" pitchFamily="34" charset="0"/>
+              </a:rPr>
+              <a:t>Utilizar un ciclo </a:t>
+            </a:r>
+            <a:r>
+              <a:rPr lang="es-MX" sz="1800" b="1" dirty="0" err="1">
+                <a:solidFill>
+                  <a:schemeClr val="bg2">
+                    <a:lumMod val="25000"/>
+                  </a:schemeClr>
+                </a:solidFill>
+                <a:cs typeface="Arial" panose="020B0604020202020204" pitchFamily="34" charset="0"/>
+              </a:rPr>
               <a:t>while</a:t>
             </a:r>
             <a:r>
-              <a:rPr lang="es-ES" sz="1800" dirty="0">
+              <a:rPr lang="es-MX" sz="1800" dirty="0">
                 <a:solidFill>
                   <a:schemeClr val="bg2">
                     <a:lumMod val="25000"/>
@@ -10515,16 +9992,8 @@
                 </a:solidFill>
                 <a:cs typeface="Arial" panose="020B0604020202020204" pitchFamily="34" charset="0"/>
               </a:rPr>
-              <a:t> para que se cicle el programa hasta que el usuario introduzca la opción de salir o una opción inválida.</a:t>
-            </a:r>
-            <a:endParaRPr lang="es-MX" sz="1800" dirty="0">
-              <a:solidFill>
-                <a:schemeClr val="bg2">
-                  <a:lumMod val="25000"/>
-                </a:schemeClr>
-              </a:solidFill>
-              <a:cs typeface="Arial" panose="020B0604020202020204" pitchFamily="34" charset="0"/>
-            </a:endParaRPr>
+              <a:t> para mantener la ejecución del programa hasta que el usuario elija la opción de salir o ingrese una opción inválida.</a:t>
+            </a:r>
           </a:p>
         </p:txBody>
       </p:sp>
@@ -10585,7 +10054,7 @@
               </a:rPr>
             </a:br>
             <a:r>
-              <a:rPr lang="es-MX" sz="3100" dirty="0">
+              <a:rPr lang="es-MX" sz="3100" b="1" dirty="0">
                 <a:solidFill>
                   <a:schemeClr val="accent6">
                     <a:lumMod val="75000"/>
